--- a/training_decks/08_troubleshooting.pptx
+++ b/training_decks/08_troubleshooting.pptx
@@ -22,6 +22,8 @@
     <p:sldId id="267" r:id="rId17"/>
     <p:sldId id="268" r:id="rId18"/>
     <p:sldId id="269" r:id="rId19"/>
+    <p:sldId id="270" r:id="rId20"/>
+    <p:sldId id="271" r:id="rId21"/>
   </p:sldIdLst>
   <p:sldSz cx="12192000" cy="6858000"/>
   <p:notesSz cx="7772400" cy="10058400"/>
@@ -59,7 +61,7 @@
         <p:txBody>
           <a:bodyPr/>
           <a:p>
-            <a:fld id="{01927757-72C9-4602-ACAA-9BCC1F191127}" type="slidenum">
+            <a:fld id="{FD7B4CDB-2BE9-475D-BBF1-183752842D8A}" type="slidenum">
               <a:t>&lt;#&gt;</a:t>
             </a:fld>
           </a:p>
@@ -206,7 +208,7 @@
         <p:txBody>
           <a:bodyPr/>
           <a:p>
-            <a:fld id="{77671830-6A63-4850-8F80-EE153F2621C3}" type="slidenum">
+            <a:fld id="{8432CEAA-E874-442D-85A9-891B2D0767B0}" type="slidenum">
               <a:t>&lt;#&gt;</a:t>
             </a:fld>
           </a:p>
@@ -421,7 +423,7 @@
         <p:txBody>
           <a:bodyPr/>
           <a:p>
-            <a:fld id="{365DC861-EC83-4879-B9F5-34CB601FC907}" type="slidenum">
+            <a:fld id="{40BDD2F4-6347-45A1-8869-9193ACE723BE}" type="slidenum">
               <a:t>&lt;#&gt;</a:t>
             </a:fld>
           </a:p>
@@ -704,7 +706,7 @@
         <p:txBody>
           <a:bodyPr/>
           <a:p>
-            <a:fld id="{7EA1E509-845B-4EFC-86F6-319322D78A97}" type="slidenum">
+            <a:fld id="{294B1824-3A22-4AD1-BC28-4B62A09C6381}" type="slidenum">
               <a:t>&lt;#&gt;</a:t>
             </a:fld>
           </a:p>
@@ -1577,7 +1579,7 @@
         <p:txBody>
           <a:bodyPr/>
           <a:p>
-            <a:fld id="{E9BD7A71-970D-4E02-8FC8-1398063335F1}" type="slidenum">
+            <a:fld id="{23510D39-A691-418F-8CC5-2A8AF6DC616F}" type="slidenum">
               <a:t>&lt;#&gt;</a:t>
             </a:fld>
           </a:p>
@@ -2619,16 +2621,16 @@
             <a:spLocks noGrp="1"/>
           </p:cNvSpPr>
           <p:nvPr>
-            <p:ph type="sldNum" idx="3"/>
+            <p:ph type="ftr" idx="3"/>
           </p:nvPr>
         </p:nvSpPr>
         <p:spPr/>
         <p:txBody>
           <a:bodyPr/>
           <a:p>
-            <a:fld id="{D4C3CCE4-8CB0-4187-AF92-A458D8B2CD3A}" type="slidenum">
-              <a:t>&lt;#&gt;</a:t>
-            </a:fld>
+            <a:r>
+              <a:t>Footer</a:t>
+            </a:r>
           </a:p>
         </p:txBody>
       </p:sp>
@@ -2656,7 +2658,7 @@
       </p:grpSpPr>
       <p:sp>
         <p:nvSpPr>
-          <p:cNvPr id="92" name="PlaceHolder 1"/>
+          <p:cNvPr id="91" name="PlaceHolder 1"/>
           <p:cNvSpPr>
             <a:spLocks noGrp="1"/>
           </p:cNvSpPr>
@@ -2693,7 +2695,7 @@
       </p:sp>
       <p:sp>
         <p:nvSpPr>
-          <p:cNvPr id="93" name="PlaceHolder 2"/>
+          <p:cNvPr id="92" name="PlaceHolder 2"/>
           <p:cNvSpPr>
             <a:spLocks noGrp="1"/>
           </p:cNvSpPr>
@@ -2735,16 +2737,16 @@
             <a:spLocks noGrp="1"/>
           </p:cNvSpPr>
           <p:nvPr>
-            <p:ph type="sldNum" idx="3"/>
+            <p:ph type="ftr" idx="3"/>
           </p:nvPr>
         </p:nvSpPr>
         <p:spPr/>
         <p:txBody>
           <a:bodyPr/>
           <a:p>
-            <a:fld id="{F264E1FE-07F3-4FE3-A53F-352236F46568}" type="slidenum">
-              <a:t>&lt;#&gt;</a:t>
-            </a:fld>
+            <a:r>
+              <a:t>Footer</a:t>
+            </a:r>
           </a:p>
         </p:txBody>
       </p:sp>
@@ -2772,7 +2774,7 @@
       </p:grpSpPr>
       <p:sp>
         <p:nvSpPr>
-          <p:cNvPr id="94" name="PlaceHolder 1"/>
+          <p:cNvPr id="93" name="PlaceHolder 1"/>
           <p:cNvSpPr>
             <a:spLocks noGrp="1"/>
           </p:cNvSpPr>
@@ -2809,7 +2811,7 @@
       </p:sp>
       <p:sp>
         <p:nvSpPr>
-          <p:cNvPr id="95" name="PlaceHolder 2"/>
+          <p:cNvPr id="94" name="PlaceHolder 2"/>
           <p:cNvSpPr>
             <a:spLocks noGrp="1"/>
           </p:cNvSpPr>
@@ -2848,16 +2850,16 @@
             <a:spLocks noGrp="1"/>
           </p:cNvSpPr>
           <p:nvPr>
-            <p:ph type="sldNum" idx="3"/>
+            <p:ph type="ftr" idx="3"/>
           </p:nvPr>
         </p:nvSpPr>
         <p:spPr/>
         <p:txBody>
           <a:bodyPr/>
           <a:p>
-            <a:fld id="{A6D6980D-0284-4026-A4A1-C3E7561421B7}" type="slidenum">
-              <a:t>&lt;#&gt;</a:t>
-            </a:fld>
+            <a:r>
+              <a:t>Footer</a:t>
+            </a:r>
           </a:p>
         </p:txBody>
       </p:sp>
@@ -2885,7 +2887,7 @@
       </p:grpSpPr>
       <p:sp>
         <p:nvSpPr>
-          <p:cNvPr id="96" name="PlaceHolder 1"/>
+          <p:cNvPr id="95" name="PlaceHolder 1"/>
           <p:cNvSpPr>
             <a:spLocks noGrp="1"/>
           </p:cNvSpPr>
@@ -2922,7 +2924,7 @@
       </p:sp>
       <p:sp>
         <p:nvSpPr>
-          <p:cNvPr id="97" name="PlaceHolder 2"/>
+          <p:cNvPr id="96" name="PlaceHolder 2"/>
           <p:cNvSpPr>
             <a:spLocks noGrp="1"/>
           </p:cNvSpPr>
@@ -2956,7 +2958,7 @@
       </p:sp>
       <p:sp>
         <p:nvSpPr>
-          <p:cNvPr id="98" name="PlaceHolder 3"/>
+          <p:cNvPr id="97" name="PlaceHolder 3"/>
           <p:cNvSpPr>
             <a:spLocks noGrp="1"/>
           </p:cNvSpPr>
@@ -2995,16 +2997,16 @@
             <a:spLocks noGrp="1"/>
           </p:cNvSpPr>
           <p:nvPr>
-            <p:ph type="sldNum" idx="3"/>
+            <p:ph type="ftr" idx="3"/>
           </p:nvPr>
         </p:nvSpPr>
         <p:spPr/>
         <p:txBody>
           <a:bodyPr/>
           <a:p>
-            <a:fld id="{890CD8C0-1640-496B-A2B5-41DB3FFB9312}" type="slidenum">
-              <a:t>&lt;#&gt;</a:t>
-            </a:fld>
+            <a:r>
+              <a:t>Footer</a:t>
+            </a:r>
           </a:p>
         </p:txBody>
       </p:sp>
@@ -3032,7 +3034,7 @@
       </p:grpSpPr>
       <p:sp>
         <p:nvSpPr>
-          <p:cNvPr id="99" name="PlaceHolder 1"/>
+          <p:cNvPr id="98" name="PlaceHolder 1"/>
           <p:cNvSpPr>
             <a:spLocks noGrp="1"/>
           </p:cNvSpPr>
@@ -3074,16 +3076,16 @@
             <a:spLocks noGrp="1"/>
           </p:cNvSpPr>
           <p:nvPr>
-            <p:ph type="sldNum" idx="3"/>
+            <p:ph type="ftr" idx="3"/>
           </p:nvPr>
         </p:nvSpPr>
         <p:spPr/>
         <p:txBody>
           <a:bodyPr/>
           <a:p>
-            <a:fld id="{7B38DEE9-874C-4A25-8481-C277D136A571}" type="slidenum">
-              <a:t>&lt;#&gt;</a:t>
-            </a:fld>
+            <a:r>
+              <a:t>Footer</a:t>
+            </a:r>
           </a:p>
         </p:txBody>
       </p:sp>
@@ -3194,7 +3196,7 @@
         <p:txBody>
           <a:bodyPr/>
           <a:p>
-            <a:fld id="{B87D5757-C407-4553-8819-986A3146250B}" type="slidenum">
+            <a:fld id="{BEB5CD4B-FA97-46C1-9755-1199963B4DC1}" type="slidenum">
               <a:t>&lt;#&gt;</a:t>
             </a:fld>
           </a:p>
@@ -3224,7 +3226,7 @@
       </p:grpSpPr>
       <p:sp>
         <p:nvSpPr>
-          <p:cNvPr id="100" name="PlaceHolder 1"/>
+          <p:cNvPr id="99" name="PlaceHolder 1"/>
           <p:cNvSpPr>
             <a:spLocks noGrp="1"/>
           </p:cNvSpPr>
@@ -3266,16 +3268,16 @@
             <a:spLocks noGrp="1"/>
           </p:cNvSpPr>
           <p:nvPr>
-            <p:ph type="sldNum" idx="3"/>
+            <p:ph type="ftr" idx="3"/>
           </p:nvPr>
         </p:nvSpPr>
         <p:spPr/>
         <p:txBody>
           <a:bodyPr/>
           <a:p>
-            <a:fld id="{9E497048-5E23-4F80-939F-34F03EFD1441}" type="slidenum">
-              <a:t>&lt;#&gt;</a:t>
-            </a:fld>
+            <a:r>
+              <a:t>Footer</a:t>
+            </a:r>
           </a:p>
         </p:txBody>
       </p:sp>
@@ -3303,7 +3305,7 @@
       </p:grpSpPr>
       <p:sp>
         <p:nvSpPr>
-          <p:cNvPr id="101" name="PlaceHolder 1"/>
+          <p:cNvPr id="100" name="PlaceHolder 1"/>
           <p:cNvSpPr>
             <a:spLocks noGrp="1"/>
           </p:cNvSpPr>
@@ -3340,7 +3342,7 @@
       </p:sp>
       <p:sp>
         <p:nvSpPr>
-          <p:cNvPr id="102" name="PlaceHolder 2"/>
+          <p:cNvPr id="101" name="PlaceHolder 2"/>
           <p:cNvSpPr>
             <a:spLocks noGrp="1"/>
           </p:cNvSpPr>
@@ -3374,7 +3376,7 @@
       </p:sp>
       <p:sp>
         <p:nvSpPr>
-          <p:cNvPr id="103" name="PlaceHolder 3"/>
+          <p:cNvPr id="102" name="PlaceHolder 3"/>
           <p:cNvSpPr>
             <a:spLocks noGrp="1"/>
           </p:cNvSpPr>
@@ -3408,7 +3410,7 @@
       </p:sp>
       <p:sp>
         <p:nvSpPr>
-          <p:cNvPr id="104" name="PlaceHolder 4"/>
+          <p:cNvPr id="103" name="PlaceHolder 4"/>
           <p:cNvSpPr>
             <a:spLocks noGrp="1"/>
           </p:cNvSpPr>
@@ -3447,16 +3449,16 @@
             <a:spLocks noGrp="1"/>
           </p:cNvSpPr>
           <p:nvPr>
-            <p:ph type="sldNum" idx="3"/>
+            <p:ph type="ftr" idx="3"/>
           </p:nvPr>
         </p:nvSpPr>
         <p:spPr/>
         <p:txBody>
           <a:bodyPr/>
           <a:p>
-            <a:fld id="{CFA2107A-C5FE-43A4-89D7-203576FD0DBC}" type="slidenum">
-              <a:t>&lt;#&gt;</a:t>
-            </a:fld>
+            <a:r>
+              <a:t>Footer</a:t>
+            </a:r>
           </a:p>
         </p:txBody>
       </p:sp>
@@ -3484,7 +3486,7 @@
       </p:grpSpPr>
       <p:sp>
         <p:nvSpPr>
-          <p:cNvPr id="105" name="PlaceHolder 1"/>
+          <p:cNvPr id="104" name="PlaceHolder 1"/>
           <p:cNvSpPr>
             <a:spLocks noGrp="1"/>
           </p:cNvSpPr>
@@ -3521,7 +3523,7 @@
       </p:sp>
       <p:sp>
         <p:nvSpPr>
-          <p:cNvPr id="106" name="PlaceHolder 2"/>
+          <p:cNvPr id="105" name="PlaceHolder 2"/>
           <p:cNvSpPr>
             <a:spLocks noGrp="1"/>
           </p:cNvSpPr>
@@ -3555,7 +3557,7 @@
       </p:sp>
       <p:sp>
         <p:nvSpPr>
-          <p:cNvPr id="107" name="PlaceHolder 3"/>
+          <p:cNvPr id="106" name="PlaceHolder 3"/>
           <p:cNvSpPr>
             <a:spLocks noGrp="1"/>
           </p:cNvSpPr>
@@ -3589,7 +3591,7 @@
       </p:sp>
       <p:sp>
         <p:nvSpPr>
-          <p:cNvPr id="108" name="PlaceHolder 4"/>
+          <p:cNvPr id="107" name="PlaceHolder 4"/>
           <p:cNvSpPr>
             <a:spLocks noGrp="1"/>
           </p:cNvSpPr>
@@ -3628,16 +3630,16 @@
             <a:spLocks noGrp="1"/>
           </p:cNvSpPr>
           <p:nvPr>
-            <p:ph type="sldNum" idx="3"/>
+            <p:ph type="ftr" idx="3"/>
           </p:nvPr>
         </p:nvSpPr>
         <p:spPr/>
         <p:txBody>
           <a:bodyPr/>
           <a:p>
-            <a:fld id="{FAAD2F5D-F0C2-4393-9815-799430C91BEC}" type="slidenum">
-              <a:t>&lt;#&gt;</a:t>
-            </a:fld>
+            <a:r>
+              <a:t>Footer</a:t>
+            </a:r>
           </a:p>
         </p:txBody>
       </p:sp>
@@ -3665,7 +3667,7 @@
       </p:grpSpPr>
       <p:sp>
         <p:nvSpPr>
-          <p:cNvPr id="109" name="PlaceHolder 1"/>
+          <p:cNvPr id="108" name="PlaceHolder 1"/>
           <p:cNvSpPr>
             <a:spLocks noGrp="1"/>
           </p:cNvSpPr>
@@ -3702,7 +3704,7 @@
       </p:sp>
       <p:sp>
         <p:nvSpPr>
-          <p:cNvPr id="110" name="PlaceHolder 2"/>
+          <p:cNvPr id="109" name="PlaceHolder 2"/>
           <p:cNvSpPr>
             <a:spLocks noGrp="1"/>
           </p:cNvSpPr>
@@ -3736,7 +3738,7 @@
       </p:sp>
       <p:sp>
         <p:nvSpPr>
-          <p:cNvPr id="111" name="PlaceHolder 3"/>
+          <p:cNvPr id="110" name="PlaceHolder 3"/>
           <p:cNvSpPr>
             <a:spLocks noGrp="1"/>
           </p:cNvSpPr>
@@ -3770,7 +3772,7 @@
       </p:sp>
       <p:sp>
         <p:nvSpPr>
-          <p:cNvPr id="112" name="PlaceHolder 4"/>
+          <p:cNvPr id="111" name="PlaceHolder 4"/>
           <p:cNvSpPr>
             <a:spLocks noGrp="1"/>
           </p:cNvSpPr>
@@ -3809,16 +3811,16 @@
             <a:spLocks noGrp="1"/>
           </p:cNvSpPr>
           <p:nvPr>
-            <p:ph type="sldNum" idx="3"/>
+            <p:ph type="ftr" idx="3"/>
           </p:nvPr>
         </p:nvSpPr>
         <p:spPr/>
         <p:txBody>
           <a:bodyPr/>
           <a:p>
-            <a:fld id="{F77608CE-7BF6-4BFD-B28E-2ADA04A75566}" type="slidenum">
-              <a:t>&lt;#&gt;</a:t>
-            </a:fld>
+            <a:r>
+              <a:t>Footer</a:t>
+            </a:r>
           </a:p>
         </p:txBody>
       </p:sp>
@@ -3846,7 +3848,7 @@
       </p:grpSpPr>
       <p:sp>
         <p:nvSpPr>
-          <p:cNvPr id="113" name="PlaceHolder 1"/>
+          <p:cNvPr id="112" name="PlaceHolder 1"/>
           <p:cNvSpPr>
             <a:spLocks noGrp="1"/>
           </p:cNvSpPr>
@@ -3883,7 +3885,7 @@
       </p:sp>
       <p:sp>
         <p:nvSpPr>
-          <p:cNvPr id="114" name="PlaceHolder 2"/>
+          <p:cNvPr id="113" name="PlaceHolder 2"/>
           <p:cNvSpPr>
             <a:spLocks noGrp="1"/>
           </p:cNvSpPr>
@@ -3917,7 +3919,7 @@
       </p:sp>
       <p:sp>
         <p:nvSpPr>
-          <p:cNvPr id="115" name="PlaceHolder 3"/>
+          <p:cNvPr id="114" name="PlaceHolder 3"/>
           <p:cNvSpPr>
             <a:spLocks noGrp="1"/>
           </p:cNvSpPr>
@@ -3956,16 +3958,16 @@
             <a:spLocks noGrp="1"/>
           </p:cNvSpPr>
           <p:nvPr>
-            <p:ph type="sldNum" idx="3"/>
+            <p:ph type="ftr" idx="3"/>
           </p:nvPr>
         </p:nvSpPr>
         <p:spPr/>
         <p:txBody>
           <a:bodyPr/>
           <a:p>
-            <a:fld id="{E48509F8-361C-4BB9-BA4C-3F4EC5C11C69}" type="slidenum">
-              <a:t>&lt;#&gt;</a:t>
-            </a:fld>
+            <a:r>
+              <a:t>Footer</a:t>
+            </a:r>
           </a:p>
         </p:txBody>
       </p:sp>
@@ -3993,7 +3995,7 @@
       </p:grpSpPr>
       <p:sp>
         <p:nvSpPr>
-          <p:cNvPr id="116" name="PlaceHolder 1"/>
+          <p:cNvPr id="115" name="PlaceHolder 1"/>
           <p:cNvSpPr>
             <a:spLocks noGrp="1"/>
           </p:cNvSpPr>
@@ -4030,7 +4032,7 @@
       </p:sp>
       <p:sp>
         <p:nvSpPr>
-          <p:cNvPr id="117" name="PlaceHolder 2"/>
+          <p:cNvPr id="116" name="PlaceHolder 2"/>
           <p:cNvSpPr>
             <a:spLocks noGrp="1"/>
           </p:cNvSpPr>
@@ -4064,7 +4066,7 @@
       </p:sp>
       <p:sp>
         <p:nvSpPr>
-          <p:cNvPr id="118" name="PlaceHolder 3"/>
+          <p:cNvPr id="117" name="PlaceHolder 3"/>
           <p:cNvSpPr>
             <a:spLocks noGrp="1"/>
           </p:cNvSpPr>
@@ -4098,7 +4100,7 @@
       </p:sp>
       <p:sp>
         <p:nvSpPr>
-          <p:cNvPr id="119" name="PlaceHolder 4"/>
+          <p:cNvPr id="118" name="PlaceHolder 4"/>
           <p:cNvSpPr>
             <a:spLocks noGrp="1"/>
           </p:cNvSpPr>
@@ -4132,7 +4134,7 @@
       </p:sp>
       <p:sp>
         <p:nvSpPr>
-          <p:cNvPr id="120" name="PlaceHolder 5"/>
+          <p:cNvPr id="119" name="PlaceHolder 5"/>
           <p:cNvSpPr>
             <a:spLocks noGrp="1"/>
           </p:cNvSpPr>
@@ -4171,16 +4173,16 @@
             <a:spLocks noGrp="1"/>
           </p:cNvSpPr>
           <p:nvPr>
-            <p:ph type="sldNum" idx="3"/>
+            <p:ph type="ftr" idx="3"/>
           </p:nvPr>
         </p:nvSpPr>
         <p:spPr/>
         <p:txBody>
           <a:bodyPr/>
           <a:p>
-            <a:fld id="{D1822570-8C54-42B5-9977-08B2F1FD0A73}" type="slidenum">
-              <a:t>&lt;#&gt;</a:t>
-            </a:fld>
+            <a:r>
+              <a:t>Footer</a:t>
+            </a:r>
           </a:p>
         </p:txBody>
       </p:sp>
@@ -4208,7 +4210,7 @@
       </p:grpSpPr>
       <p:sp>
         <p:nvSpPr>
-          <p:cNvPr id="121" name="PlaceHolder 1"/>
+          <p:cNvPr id="120" name="PlaceHolder 1"/>
           <p:cNvSpPr>
             <a:spLocks noGrp="1"/>
           </p:cNvSpPr>
@@ -4245,7 +4247,7 @@
       </p:sp>
       <p:sp>
         <p:nvSpPr>
-          <p:cNvPr id="122" name="PlaceHolder 2"/>
+          <p:cNvPr id="121" name="PlaceHolder 2"/>
           <p:cNvSpPr>
             <a:spLocks noGrp="1"/>
           </p:cNvSpPr>
@@ -4279,7 +4281,7 @@
       </p:sp>
       <p:sp>
         <p:nvSpPr>
-          <p:cNvPr id="123" name="PlaceHolder 3"/>
+          <p:cNvPr id="122" name="PlaceHolder 3"/>
           <p:cNvSpPr>
             <a:spLocks noGrp="1"/>
           </p:cNvSpPr>
@@ -4313,7 +4315,7 @@
       </p:sp>
       <p:sp>
         <p:nvSpPr>
-          <p:cNvPr id="124" name="PlaceHolder 4"/>
+          <p:cNvPr id="123" name="PlaceHolder 4"/>
           <p:cNvSpPr>
             <a:spLocks noGrp="1"/>
           </p:cNvSpPr>
@@ -4347,7 +4349,7 @@
       </p:sp>
       <p:sp>
         <p:nvSpPr>
-          <p:cNvPr id="125" name="PlaceHolder 5"/>
+          <p:cNvPr id="124" name="PlaceHolder 5"/>
           <p:cNvSpPr>
             <a:spLocks noGrp="1"/>
           </p:cNvSpPr>
@@ -4381,7 +4383,7 @@
       </p:sp>
       <p:sp>
         <p:nvSpPr>
-          <p:cNvPr id="126" name="PlaceHolder 6"/>
+          <p:cNvPr id="125" name="PlaceHolder 6"/>
           <p:cNvSpPr>
             <a:spLocks noGrp="1"/>
           </p:cNvSpPr>
@@ -4415,7 +4417,7 @@
       </p:sp>
       <p:sp>
         <p:nvSpPr>
-          <p:cNvPr id="127" name="PlaceHolder 7"/>
+          <p:cNvPr id="126" name="PlaceHolder 7"/>
           <p:cNvSpPr>
             <a:spLocks noGrp="1"/>
           </p:cNvSpPr>
@@ -4454,16 +4456,16 @@
             <a:spLocks noGrp="1"/>
           </p:cNvSpPr>
           <p:nvPr>
-            <p:ph type="sldNum" idx="3"/>
+            <p:ph type="ftr" idx="3"/>
           </p:nvPr>
         </p:nvSpPr>
         <p:spPr/>
         <p:txBody>
           <a:bodyPr/>
           <a:p>
-            <a:fld id="{95C82B19-80B0-4976-90B3-1E3AB68436A2}" type="slidenum">
-              <a:t>&lt;#&gt;</a:t>
-            </a:fld>
+            <a:r>
+              <a:t>Footer</a:t>
+            </a:r>
           </a:p>
         </p:txBody>
       </p:sp>
@@ -4533,7 +4535,7 @@
       </p:grpSpPr>
       <p:sp>
         <p:nvSpPr>
-          <p:cNvPr id="134" name="PlaceHolder 1"/>
+          <p:cNvPr id="133" name="PlaceHolder 1"/>
           <p:cNvSpPr>
             <a:spLocks noGrp="1"/>
           </p:cNvSpPr>
@@ -4570,7 +4572,7 @@
       </p:sp>
       <p:sp>
         <p:nvSpPr>
-          <p:cNvPr id="135" name="PlaceHolder 2"/>
+          <p:cNvPr id="134" name="PlaceHolder 2"/>
           <p:cNvSpPr>
             <a:spLocks noGrp="1"/>
           </p:cNvSpPr>
@@ -4649,7 +4651,7 @@
       </p:grpSpPr>
       <p:sp>
         <p:nvSpPr>
-          <p:cNvPr id="136" name="PlaceHolder 1"/>
+          <p:cNvPr id="135" name="PlaceHolder 1"/>
           <p:cNvSpPr>
             <a:spLocks noGrp="1"/>
           </p:cNvSpPr>
@@ -4686,7 +4688,7 @@
       </p:sp>
       <p:sp>
         <p:nvSpPr>
-          <p:cNvPr id="137" name="PlaceHolder 2"/>
+          <p:cNvPr id="136" name="PlaceHolder 2"/>
           <p:cNvSpPr>
             <a:spLocks noGrp="1"/>
           </p:cNvSpPr>
@@ -4879,7 +4881,7 @@
         <p:txBody>
           <a:bodyPr/>
           <a:p>
-            <a:fld id="{60117F4C-FE46-4230-8C1B-FA66B039D641}" type="slidenum">
+            <a:fld id="{9E0D96A6-0B45-4B82-B751-FF8E85F112A9}" type="slidenum">
               <a:t>&lt;#&gt;</a:t>
             </a:fld>
           </a:p>
@@ -4909,7 +4911,7 @@
       </p:grpSpPr>
       <p:sp>
         <p:nvSpPr>
-          <p:cNvPr id="138" name="PlaceHolder 1"/>
+          <p:cNvPr id="137" name="PlaceHolder 1"/>
           <p:cNvSpPr>
             <a:spLocks noGrp="1"/>
           </p:cNvSpPr>
@@ -4946,7 +4948,7 @@
       </p:sp>
       <p:sp>
         <p:nvSpPr>
-          <p:cNvPr id="139" name="PlaceHolder 2"/>
+          <p:cNvPr id="138" name="PlaceHolder 2"/>
           <p:cNvSpPr>
             <a:spLocks noGrp="1"/>
           </p:cNvSpPr>
@@ -4980,7 +4982,7 @@
       </p:sp>
       <p:sp>
         <p:nvSpPr>
-          <p:cNvPr id="140" name="PlaceHolder 3"/>
+          <p:cNvPr id="139" name="PlaceHolder 3"/>
           <p:cNvSpPr>
             <a:spLocks noGrp="1"/>
           </p:cNvSpPr>
@@ -5056,7 +5058,7 @@
       </p:grpSpPr>
       <p:sp>
         <p:nvSpPr>
-          <p:cNvPr id="141" name="PlaceHolder 1"/>
+          <p:cNvPr id="140" name="PlaceHolder 1"/>
           <p:cNvSpPr>
             <a:spLocks noGrp="1"/>
           </p:cNvSpPr>
@@ -5135,7 +5137,7 @@
       </p:grpSpPr>
       <p:sp>
         <p:nvSpPr>
-          <p:cNvPr id="142" name="PlaceHolder 1"/>
+          <p:cNvPr id="141" name="PlaceHolder 1"/>
           <p:cNvSpPr>
             <a:spLocks noGrp="1"/>
           </p:cNvSpPr>
@@ -5214,7 +5216,7 @@
       </p:grpSpPr>
       <p:sp>
         <p:nvSpPr>
-          <p:cNvPr id="143" name="PlaceHolder 1"/>
+          <p:cNvPr id="142" name="PlaceHolder 1"/>
           <p:cNvSpPr>
             <a:spLocks noGrp="1"/>
           </p:cNvSpPr>
@@ -5251,7 +5253,7 @@
       </p:sp>
       <p:sp>
         <p:nvSpPr>
-          <p:cNvPr id="144" name="PlaceHolder 2"/>
+          <p:cNvPr id="143" name="PlaceHolder 2"/>
           <p:cNvSpPr>
             <a:spLocks noGrp="1"/>
           </p:cNvSpPr>
@@ -5285,7 +5287,7 @@
       </p:sp>
       <p:sp>
         <p:nvSpPr>
-          <p:cNvPr id="145" name="PlaceHolder 3"/>
+          <p:cNvPr id="144" name="PlaceHolder 3"/>
           <p:cNvSpPr>
             <a:spLocks noGrp="1"/>
           </p:cNvSpPr>
@@ -5319,7 +5321,7 @@
       </p:sp>
       <p:sp>
         <p:nvSpPr>
-          <p:cNvPr id="146" name="PlaceHolder 4"/>
+          <p:cNvPr id="145" name="PlaceHolder 4"/>
           <p:cNvSpPr>
             <a:spLocks noGrp="1"/>
           </p:cNvSpPr>
@@ -5395,7 +5397,7 @@
       </p:grpSpPr>
       <p:sp>
         <p:nvSpPr>
-          <p:cNvPr id="147" name="PlaceHolder 1"/>
+          <p:cNvPr id="146" name="PlaceHolder 1"/>
           <p:cNvSpPr>
             <a:spLocks noGrp="1"/>
           </p:cNvSpPr>
@@ -5432,7 +5434,7 @@
       </p:sp>
       <p:sp>
         <p:nvSpPr>
-          <p:cNvPr id="148" name="PlaceHolder 2"/>
+          <p:cNvPr id="147" name="PlaceHolder 2"/>
           <p:cNvSpPr>
             <a:spLocks noGrp="1"/>
           </p:cNvSpPr>
@@ -5466,7 +5468,7 @@
       </p:sp>
       <p:sp>
         <p:nvSpPr>
-          <p:cNvPr id="149" name="PlaceHolder 3"/>
+          <p:cNvPr id="148" name="PlaceHolder 3"/>
           <p:cNvSpPr>
             <a:spLocks noGrp="1"/>
           </p:cNvSpPr>
@@ -5500,7 +5502,7 @@
       </p:sp>
       <p:sp>
         <p:nvSpPr>
-          <p:cNvPr id="150" name="PlaceHolder 4"/>
+          <p:cNvPr id="149" name="PlaceHolder 4"/>
           <p:cNvSpPr>
             <a:spLocks noGrp="1"/>
           </p:cNvSpPr>
@@ -5576,7 +5578,7 @@
       </p:grpSpPr>
       <p:sp>
         <p:nvSpPr>
-          <p:cNvPr id="151" name="PlaceHolder 1"/>
+          <p:cNvPr id="150" name="PlaceHolder 1"/>
           <p:cNvSpPr>
             <a:spLocks noGrp="1"/>
           </p:cNvSpPr>
@@ -5613,7 +5615,7 @@
       </p:sp>
       <p:sp>
         <p:nvSpPr>
-          <p:cNvPr id="152" name="PlaceHolder 2"/>
+          <p:cNvPr id="151" name="PlaceHolder 2"/>
           <p:cNvSpPr>
             <a:spLocks noGrp="1"/>
           </p:cNvSpPr>
@@ -5647,7 +5649,7 @@
       </p:sp>
       <p:sp>
         <p:nvSpPr>
-          <p:cNvPr id="153" name="PlaceHolder 3"/>
+          <p:cNvPr id="152" name="PlaceHolder 3"/>
           <p:cNvSpPr>
             <a:spLocks noGrp="1"/>
           </p:cNvSpPr>
@@ -5681,7 +5683,7 @@
       </p:sp>
       <p:sp>
         <p:nvSpPr>
-          <p:cNvPr id="154" name="PlaceHolder 4"/>
+          <p:cNvPr id="153" name="PlaceHolder 4"/>
           <p:cNvSpPr>
             <a:spLocks noGrp="1"/>
           </p:cNvSpPr>
@@ -5757,7 +5759,7 @@
       </p:grpSpPr>
       <p:sp>
         <p:nvSpPr>
-          <p:cNvPr id="155" name="PlaceHolder 1"/>
+          <p:cNvPr id="154" name="PlaceHolder 1"/>
           <p:cNvSpPr>
             <a:spLocks noGrp="1"/>
           </p:cNvSpPr>
@@ -5794,7 +5796,7 @@
       </p:sp>
       <p:sp>
         <p:nvSpPr>
-          <p:cNvPr id="156" name="PlaceHolder 2"/>
+          <p:cNvPr id="155" name="PlaceHolder 2"/>
           <p:cNvSpPr>
             <a:spLocks noGrp="1"/>
           </p:cNvSpPr>
@@ -5828,7 +5830,7 @@
       </p:sp>
       <p:sp>
         <p:nvSpPr>
-          <p:cNvPr id="157" name="PlaceHolder 3"/>
+          <p:cNvPr id="156" name="PlaceHolder 3"/>
           <p:cNvSpPr>
             <a:spLocks noGrp="1"/>
           </p:cNvSpPr>
@@ -5904,7 +5906,7 @@
       </p:grpSpPr>
       <p:sp>
         <p:nvSpPr>
-          <p:cNvPr id="158" name="PlaceHolder 1"/>
+          <p:cNvPr id="157" name="PlaceHolder 1"/>
           <p:cNvSpPr>
             <a:spLocks noGrp="1"/>
           </p:cNvSpPr>
@@ -5941,7 +5943,7 @@
       </p:sp>
       <p:sp>
         <p:nvSpPr>
-          <p:cNvPr id="159" name="PlaceHolder 2"/>
+          <p:cNvPr id="158" name="PlaceHolder 2"/>
           <p:cNvSpPr>
             <a:spLocks noGrp="1"/>
           </p:cNvSpPr>
@@ -5975,7 +5977,7 @@
       </p:sp>
       <p:sp>
         <p:nvSpPr>
-          <p:cNvPr id="160" name="PlaceHolder 3"/>
+          <p:cNvPr id="159" name="PlaceHolder 3"/>
           <p:cNvSpPr>
             <a:spLocks noGrp="1"/>
           </p:cNvSpPr>
@@ -6009,7 +6011,7 @@
       </p:sp>
       <p:sp>
         <p:nvSpPr>
-          <p:cNvPr id="161" name="PlaceHolder 4"/>
+          <p:cNvPr id="160" name="PlaceHolder 4"/>
           <p:cNvSpPr>
             <a:spLocks noGrp="1"/>
           </p:cNvSpPr>
@@ -6043,7 +6045,7 @@
       </p:sp>
       <p:sp>
         <p:nvSpPr>
-          <p:cNvPr id="162" name="PlaceHolder 5"/>
+          <p:cNvPr id="161" name="PlaceHolder 5"/>
           <p:cNvSpPr>
             <a:spLocks noGrp="1"/>
           </p:cNvSpPr>
@@ -6119,7 +6121,7 @@
       </p:grpSpPr>
       <p:sp>
         <p:nvSpPr>
-          <p:cNvPr id="163" name="PlaceHolder 1"/>
+          <p:cNvPr id="162" name="PlaceHolder 1"/>
           <p:cNvSpPr>
             <a:spLocks noGrp="1"/>
           </p:cNvSpPr>
@@ -6156,7 +6158,7 @@
       </p:sp>
       <p:sp>
         <p:nvSpPr>
-          <p:cNvPr id="164" name="PlaceHolder 2"/>
+          <p:cNvPr id="163" name="PlaceHolder 2"/>
           <p:cNvSpPr>
             <a:spLocks noGrp="1"/>
           </p:cNvSpPr>
@@ -6190,7 +6192,7 @@
       </p:sp>
       <p:sp>
         <p:nvSpPr>
-          <p:cNvPr id="165" name="PlaceHolder 3"/>
+          <p:cNvPr id="164" name="PlaceHolder 3"/>
           <p:cNvSpPr>
             <a:spLocks noGrp="1"/>
           </p:cNvSpPr>
@@ -6224,7 +6226,7 @@
       </p:sp>
       <p:sp>
         <p:nvSpPr>
-          <p:cNvPr id="166" name="PlaceHolder 4"/>
+          <p:cNvPr id="165" name="PlaceHolder 4"/>
           <p:cNvSpPr>
             <a:spLocks noGrp="1"/>
           </p:cNvSpPr>
@@ -6258,7 +6260,7 @@
       </p:sp>
       <p:sp>
         <p:nvSpPr>
-          <p:cNvPr id="167" name="PlaceHolder 5"/>
+          <p:cNvPr id="166" name="PlaceHolder 5"/>
           <p:cNvSpPr>
             <a:spLocks noGrp="1"/>
           </p:cNvSpPr>
@@ -6292,7 +6294,7 @@
       </p:sp>
       <p:sp>
         <p:nvSpPr>
-          <p:cNvPr id="168" name="PlaceHolder 6"/>
+          <p:cNvPr id="167" name="PlaceHolder 6"/>
           <p:cNvSpPr>
             <a:spLocks noGrp="1"/>
           </p:cNvSpPr>
@@ -6326,7 +6328,7 @@
       </p:sp>
       <p:sp>
         <p:nvSpPr>
-          <p:cNvPr id="169" name="PlaceHolder 7"/>
+          <p:cNvPr id="168" name="PlaceHolder 7"/>
           <p:cNvSpPr>
             <a:spLocks noGrp="1"/>
           </p:cNvSpPr>
@@ -6451,7 +6453,7 @@
         <p:txBody>
           <a:bodyPr/>
           <a:p>
-            <a:fld id="{DC4EDC92-C44F-4D27-853A-BFA104D6103A}" type="slidenum">
+            <a:fld id="{E1040135-030D-4558-BBB5-4F748AFB5594}" type="slidenum">
               <a:t>&lt;#&gt;</a:t>
             </a:fld>
           </a:p>
@@ -6530,7 +6532,7 @@
         <p:txBody>
           <a:bodyPr/>
           <a:p>
-            <a:fld id="{39FB64FD-4D8B-4031-9BB4-C47DBF6450FC}" type="slidenum">
+            <a:fld id="{41D9E746-892C-43C9-BBE9-2EE77F2C8DB1}" type="slidenum">
               <a:t>&lt;#&gt;</a:t>
             </a:fld>
           </a:p>
@@ -6711,7 +6713,7 @@
         <p:txBody>
           <a:bodyPr/>
           <a:p>
-            <a:fld id="{A9FAFF4E-6FA0-4D70-8807-54C81CEE0CCD}" type="slidenum">
+            <a:fld id="{BB9DF7F5-E663-4215-84C3-A8B9F9A8F42C}" type="slidenum">
               <a:t>&lt;#&gt;</a:t>
             </a:fld>
           </a:p>
@@ -6892,7 +6894,7 @@
         <p:txBody>
           <a:bodyPr/>
           <a:p>
-            <a:fld id="{7B370204-6CF4-487D-BCE1-C9D8E1B2757B}" type="slidenum">
+            <a:fld id="{1CAD8D4D-B71C-4E4F-A786-68911D931480}" type="slidenum">
               <a:t>&lt;#&gt;</a:t>
             </a:fld>
           </a:p>
@@ -7073,7 +7075,7 @@
         <p:txBody>
           <a:bodyPr/>
           <a:p>
-            <a:fld id="{36CEAE80-534F-4269-BC19-D2E414E6BE29}" type="slidenum">
+            <a:fld id="{0C8BB169-7B1D-459E-9C07-C53909231B4C}" type="slidenum">
               <a:t>&lt;#&gt;</a:t>
             </a:fld>
           </a:p>
@@ -7121,7 +7123,7 @@
         <p:spPr>
           <a:xfrm>
             <a:off x="0" y="0"/>
-            <a:ext cx="10078560" cy="5668560"/>
+            <a:ext cx="12190320" cy="6856200"/>
           </a:xfrm>
           <a:prstGeom prst="rect">
             <a:avLst/>
@@ -7139,8 +7141,8 @@
         </p:nvSpPr>
         <p:spPr>
           <a:xfrm>
-            <a:off x="4276800" y="1071720"/>
-            <a:ext cx="282240" cy="281880"/>
+            <a:off x="5172840" y="1296000"/>
+            <a:ext cx="341640" cy="340920"/>
           </a:xfrm>
           <a:custGeom>
             <a:avLst/>
@@ -7233,8 +7235,8 @@
         </p:nvSpPr>
         <p:spPr>
           <a:xfrm>
-            <a:off x="9856800" y="717480"/>
-            <a:ext cx="221760" cy="4679640"/>
+            <a:off x="11921760" y="867600"/>
+            <a:ext cx="268200" cy="5660280"/>
           </a:xfrm>
           <a:prstGeom prst="rect">
             <a:avLst/>
@@ -7488,8 +7490,8 @@
         </p:nvSpPr>
         <p:spPr>
           <a:xfrm>
-            <a:off x="6852960" y="5079960"/>
-            <a:ext cx="337680" cy="317160"/>
+            <a:off x="8289000" y="6143760"/>
+            <a:ext cx="412560" cy="387720"/>
           </a:xfrm>
           <a:prstGeom prst="rect">
             <a:avLst/>
@@ -7509,10 +7511,10 @@
                 <a:spcPct val="100000"/>
               </a:lnSpc>
               <a:spcBef>
-                <a:spcPts val="264"/>
+                <a:spcPts val="238"/>
               </a:spcBef>
               <a:spcAft>
-                <a:spcPts val="264"/>
+                <a:spcPts val="238"/>
               </a:spcAft>
               <a:buNone/>
               <a:tabLst>
@@ -7556,10 +7558,10 @@
                 <a:spcPct val="100000"/>
               </a:lnSpc>
               <a:spcBef>
-                <a:spcPts val="264"/>
+                <a:spcPts val="238"/>
               </a:spcBef>
               <a:spcAft>
-                <a:spcPts val="264"/>
+                <a:spcPts val="238"/>
               </a:spcAft>
               <a:buNone/>
               <a:tabLst>
@@ -7589,7 +7591,7 @@
                 <a:tab algn="l" pos="10515600"/>
               </a:tabLst>
             </a:pPr>
-            <a:fld id="{ED86DF2E-FCD7-403A-90D6-945574834A6E}" type="slidenum">
+            <a:fld id="{52C4F3EF-7DB1-43DF-900B-ED433FAC2AE6}" type="slidenum">
               <a:rPr b="0" lang="en-US" sz="1000" spc="-1" strike="noStrike">
                 <a:solidFill>
                   <a:srgbClr val="585858"/>
@@ -7658,7 +7660,7 @@
         <p:spPr>
           <a:xfrm>
             <a:off x="0" y="6560280"/>
-            <a:ext cx="12188520" cy="294120"/>
+            <a:ext cx="12188160" cy="293760"/>
           </a:xfrm>
           <a:prstGeom prst="rect">
             <a:avLst/>
@@ -7694,7 +7696,7 @@
         <p:spPr>
           <a:xfrm>
             <a:off x="0" y="0"/>
-            <a:ext cx="12188520" cy="618480"/>
+            <a:ext cx="12188160" cy="618120"/>
           </a:xfrm>
           <a:prstGeom prst="rect">
             <a:avLst/>
@@ -7730,7 +7732,7 @@
         <p:spPr>
           <a:xfrm>
             <a:off x="783000" y="60120"/>
-            <a:ext cx="6590160" cy="500760"/>
+            <a:ext cx="6589800" cy="500400"/>
           </a:xfrm>
           <a:prstGeom prst="rect">
             <a:avLst/>
@@ -7760,7 +7762,7 @@
         <p:spPr>
           <a:xfrm>
             <a:off x="11450880" y="6592320"/>
-            <a:ext cx="647280" cy="230040"/>
+            <a:ext cx="646920" cy="229680"/>
           </a:xfrm>
           <a:prstGeom prst="rect">
             <a:avLst/>
@@ -8080,566 +8082,93 @@
           <a:chExt cx="0" cy="0"/>
         </a:xfrm>
       </p:grpSpPr>
-      <p:pic>
-        <p:nvPicPr>
-          <p:cNvPr id="85" name="" descr=""/>
-          <p:cNvPicPr/>
-          <p:nvPr/>
-        </p:nvPicPr>
-        <p:blipFill>
-          <a:blip r:embed="rId2"/>
-          <a:stretch/>
-        </p:blipFill>
-        <p:spPr>
-          <a:xfrm>
-            <a:off x="0" y="0"/>
-            <a:ext cx="12190680" cy="6856560"/>
-          </a:xfrm>
-          <a:prstGeom prst="rect">
-            <a:avLst/>
-          </a:prstGeom>
-          <a:ln w="0">
-            <a:noFill/>
-          </a:ln>
-        </p:spPr>
-      </p:pic>
-      <p:sp>
-        <p:nvSpPr>
-          <p:cNvPr id="86" name="PlaceHolder 1"/>
-          <p:cNvSpPr>
-            <a:spLocks noGrp="1"/>
-          </p:cNvSpPr>
-          <p:nvPr>
-            <p:ph type="title"/>
-          </p:nvPr>
-        </p:nvSpPr>
-        <p:spPr>
-          <a:xfrm>
-            <a:off x="5703840" y="1153440"/>
-            <a:ext cx="5664600" cy="2064240"/>
-          </a:xfrm>
-          <a:prstGeom prst="rect">
-            <a:avLst/>
-          </a:prstGeom>
-          <a:noFill/>
-          <a:ln w="0">
-            <a:noFill/>
-          </a:ln>
-        </p:spPr>
-        <p:txBody>
-          <a:bodyPr lIns="0" rIns="0" tIns="0" bIns="0" anchor="t">
-            <a:noAutofit/>
-          </a:bodyPr>
-          <a:p>
-            <a:pPr>
-              <a:lnSpc>
-                <a:spcPct val="93000"/>
-              </a:lnSpc>
-              <a:spcBef>
-                <a:spcPts val="238"/>
-              </a:spcBef>
-              <a:spcAft>
-                <a:spcPts val="238"/>
-              </a:spcAft>
-              <a:buNone/>
-              <a:tabLst>
-                <a:tab algn="l" pos="0"/>
-                <a:tab algn="l" pos="457200"/>
-                <a:tab algn="l" pos="914400"/>
-                <a:tab algn="l" pos="1371600"/>
-                <a:tab algn="l" pos="1828800"/>
-                <a:tab algn="l" pos="2286000"/>
-                <a:tab algn="l" pos="2743200"/>
-                <a:tab algn="l" pos="3200400"/>
-                <a:tab algn="l" pos="3657600"/>
-                <a:tab algn="l" pos="4114800"/>
-                <a:tab algn="l" pos="4572000"/>
-                <a:tab algn="l" pos="5029200"/>
-                <a:tab algn="l" pos="5486400"/>
-                <a:tab algn="l" pos="5943600"/>
-                <a:tab algn="l" pos="6400800"/>
-                <a:tab algn="l" pos="6858000"/>
-                <a:tab algn="l" pos="7315200"/>
-                <a:tab algn="l" pos="7772400"/>
-                <a:tab algn="l" pos="8229600"/>
-                <a:tab algn="l" pos="8686800"/>
-                <a:tab algn="l" pos="9144000"/>
-              </a:tabLst>
-            </a:pPr>
-            <a:r>
-              <a:rPr b="0" lang="en-US" sz="2060" spc="-1" strike="noStrike">
-                <a:solidFill>
-                  <a:srgbClr val="000000"/>
-                </a:solidFill>
-                <a:latin typeface="Arial"/>
-              </a:rPr>
-              <a:t>Click to edit the title text format</a:t>
-            </a:r>
-            <a:endParaRPr b="0" lang="en-US" sz="2060" spc="-1" strike="noStrike">
-              <a:solidFill>
-                <a:srgbClr val="000000"/>
-              </a:solidFill>
-              <a:latin typeface="Arial"/>
-            </a:endParaRPr>
-          </a:p>
-        </p:txBody>
-      </p:sp>
-      <p:sp>
-        <p:nvSpPr>
-          <p:cNvPr id="87" name="PlaceHolder 2"/>
-          <p:cNvSpPr>
-            <a:spLocks noGrp="1"/>
-          </p:cNvSpPr>
-          <p:nvPr>
-            <p:ph type="body"/>
-          </p:nvPr>
-        </p:nvSpPr>
-        <p:spPr>
-          <a:xfrm>
-            <a:off x="0" y="1639800"/>
-            <a:ext cx="5895000" cy="5896440"/>
-          </a:xfrm>
-          <a:prstGeom prst="rect">
-            <a:avLst/>
-          </a:prstGeom>
-          <a:noFill/>
-          <a:ln w="0">
-            <a:noFill/>
-          </a:ln>
-        </p:spPr>
-        <p:txBody>
-          <a:bodyPr lIns="90000" rIns="90000" tIns="60840" bIns="45000" anchor="t">
-            <a:normAutofit/>
-          </a:bodyPr>
-          <a:p>
-            <a:pPr marL="414360" indent="-414360">
-              <a:lnSpc>
-                <a:spcPct val="93000"/>
-              </a:lnSpc>
-              <a:spcBef>
-                <a:spcPts val="2160"/>
-              </a:spcBef>
-              <a:spcAft>
-                <a:spcPts val="286"/>
-              </a:spcAft>
-              <a:tabLst>
-                <a:tab algn="l" pos="0"/>
-                <a:tab algn="l" pos="457200"/>
-                <a:tab algn="l" pos="914400"/>
-                <a:tab algn="l" pos="1371600"/>
-                <a:tab algn="l" pos="1828800"/>
-                <a:tab algn="l" pos="2286000"/>
-                <a:tab algn="l" pos="2743200"/>
-                <a:tab algn="l" pos="3200400"/>
-                <a:tab algn="l" pos="3657600"/>
-                <a:tab algn="l" pos="4114800"/>
-                <a:tab algn="l" pos="4572000"/>
-                <a:tab algn="l" pos="5029200"/>
-                <a:tab algn="l" pos="5486400"/>
-                <a:tab algn="l" pos="5943600"/>
-                <a:tab algn="l" pos="6400800"/>
-                <a:tab algn="l" pos="6858000"/>
-                <a:tab algn="l" pos="7315200"/>
-                <a:tab algn="l" pos="7772400"/>
-                <a:tab algn="l" pos="8229600"/>
-                <a:tab algn="l" pos="8686800"/>
-                <a:tab algn="l" pos="9144000"/>
-              </a:tabLst>
-            </a:pPr>
-            <a:r>
-              <a:rPr b="0" lang="en-US" sz="1810" spc="-1" strike="noStrike">
-                <a:solidFill>
-                  <a:srgbClr val="000000"/>
-                </a:solidFill>
-                <a:latin typeface="Arial"/>
-              </a:rPr>
-              <a:t>Click to edit the outline text format</a:t>
-            </a:r>
-            <a:endParaRPr b="0" lang="en-US" sz="1810" spc="-1" strike="noStrike">
-              <a:solidFill>
-                <a:srgbClr val="000000"/>
-              </a:solidFill>
-              <a:latin typeface="Arial"/>
-            </a:endParaRPr>
-          </a:p>
-          <a:p>
-            <a:pPr lvl="1" marL="414360" indent="-414360">
-              <a:lnSpc>
-                <a:spcPct val="93000"/>
-              </a:lnSpc>
-              <a:spcBef>
-                <a:spcPts val="2160"/>
-              </a:spcBef>
-              <a:spcAft>
-                <a:spcPts val="286"/>
-              </a:spcAft>
-              <a:buClr>
-                <a:srgbClr val="000000"/>
-              </a:buClr>
-              <a:buFont typeface="Times New Roman"/>
-              <a:buChar char="–"/>
-              <a:tabLst>
-                <a:tab algn="l" pos="0"/>
-                <a:tab algn="l" pos="457200"/>
-                <a:tab algn="l" pos="914400"/>
-                <a:tab algn="l" pos="1371600"/>
-                <a:tab algn="l" pos="1828800"/>
-                <a:tab algn="l" pos="2286000"/>
-                <a:tab algn="l" pos="2743200"/>
-                <a:tab algn="l" pos="3200400"/>
-                <a:tab algn="l" pos="3657600"/>
-                <a:tab algn="l" pos="4114800"/>
-                <a:tab algn="l" pos="4572000"/>
-                <a:tab algn="l" pos="5029200"/>
-                <a:tab algn="l" pos="5486400"/>
-                <a:tab algn="l" pos="5943600"/>
-                <a:tab algn="l" pos="6400800"/>
-                <a:tab algn="l" pos="6858000"/>
-                <a:tab algn="l" pos="7315200"/>
-                <a:tab algn="l" pos="7772400"/>
-                <a:tab algn="l" pos="8229600"/>
-                <a:tab algn="l" pos="8686800"/>
-                <a:tab algn="l" pos="9144000"/>
-              </a:tabLst>
-            </a:pPr>
-            <a:r>
-              <a:rPr b="0" lang="en-US" sz="1810" spc="-1" strike="noStrike">
-                <a:solidFill>
-                  <a:srgbClr val="000000"/>
-                </a:solidFill>
-                <a:latin typeface="Arial"/>
-              </a:rPr>
-              <a:t>Second Outline Level</a:t>
-            </a:r>
-            <a:endParaRPr b="0" lang="en-US" sz="1810" spc="-1" strike="noStrike">
-              <a:solidFill>
-                <a:srgbClr val="000000"/>
-              </a:solidFill>
-              <a:latin typeface="Arial"/>
-            </a:endParaRPr>
-          </a:p>
-          <a:p>
-            <a:pPr lvl="2" marL="414360" indent="-414360">
-              <a:lnSpc>
-                <a:spcPct val="93000"/>
-              </a:lnSpc>
-              <a:spcBef>
-                <a:spcPts val="2160"/>
-              </a:spcBef>
-              <a:spcAft>
-                <a:spcPts val="286"/>
-              </a:spcAft>
-              <a:buClr>
-                <a:srgbClr val="000000"/>
-              </a:buClr>
-              <a:buFont typeface="Times New Roman"/>
-              <a:buChar char="•"/>
-              <a:tabLst>
-                <a:tab algn="l" pos="0"/>
-                <a:tab algn="l" pos="457200"/>
-                <a:tab algn="l" pos="914400"/>
-                <a:tab algn="l" pos="1371600"/>
-                <a:tab algn="l" pos="1828800"/>
-                <a:tab algn="l" pos="2286000"/>
-                <a:tab algn="l" pos="2743200"/>
-                <a:tab algn="l" pos="3200400"/>
-                <a:tab algn="l" pos="3657600"/>
-                <a:tab algn="l" pos="4114800"/>
-                <a:tab algn="l" pos="4572000"/>
-                <a:tab algn="l" pos="5029200"/>
-                <a:tab algn="l" pos="5486400"/>
-                <a:tab algn="l" pos="5943600"/>
-                <a:tab algn="l" pos="6400800"/>
-                <a:tab algn="l" pos="6858000"/>
-                <a:tab algn="l" pos="7315200"/>
-                <a:tab algn="l" pos="7772400"/>
-                <a:tab algn="l" pos="8229600"/>
-                <a:tab algn="l" pos="8686800"/>
-                <a:tab algn="l" pos="9144000"/>
-              </a:tabLst>
-            </a:pPr>
-            <a:r>
-              <a:rPr b="0" lang="en-US" sz="1810" spc="-1" strike="noStrike">
-                <a:solidFill>
-                  <a:srgbClr val="000000"/>
-                </a:solidFill>
-                <a:latin typeface="Arial"/>
-              </a:rPr>
-              <a:t>Third Outline Level</a:t>
-            </a:r>
-            <a:endParaRPr b="0" lang="en-US" sz="1810" spc="-1" strike="noStrike">
-              <a:solidFill>
-                <a:srgbClr val="000000"/>
-              </a:solidFill>
-              <a:latin typeface="Arial"/>
-            </a:endParaRPr>
-          </a:p>
-          <a:p>
-            <a:pPr lvl="3" marL="414360" indent="-414360">
-              <a:lnSpc>
-                <a:spcPct val="93000"/>
-              </a:lnSpc>
-              <a:spcBef>
-                <a:spcPts val="2160"/>
-              </a:spcBef>
-              <a:spcAft>
-                <a:spcPts val="286"/>
-              </a:spcAft>
-              <a:buClr>
-                <a:srgbClr val="000000"/>
-              </a:buClr>
-              <a:buFont typeface="Times New Roman"/>
-              <a:buChar char="–"/>
-              <a:tabLst>
-                <a:tab algn="l" pos="0"/>
-                <a:tab algn="l" pos="457200"/>
-                <a:tab algn="l" pos="914400"/>
-                <a:tab algn="l" pos="1371600"/>
-                <a:tab algn="l" pos="1828800"/>
-                <a:tab algn="l" pos="2286000"/>
-                <a:tab algn="l" pos="2743200"/>
-                <a:tab algn="l" pos="3200400"/>
-                <a:tab algn="l" pos="3657600"/>
-                <a:tab algn="l" pos="4114800"/>
-                <a:tab algn="l" pos="4572000"/>
-                <a:tab algn="l" pos="5029200"/>
-                <a:tab algn="l" pos="5486400"/>
-                <a:tab algn="l" pos="5943600"/>
-                <a:tab algn="l" pos="6400800"/>
-                <a:tab algn="l" pos="6858000"/>
-                <a:tab algn="l" pos="7315200"/>
-                <a:tab algn="l" pos="7772400"/>
-                <a:tab algn="l" pos="8229600"/>
-                <a:tab algn="l" pos="8686800"/>
-                <a:tab algn="l" pos="9144000"/>
-              </a:tabLst>
-            </a:pPr>
-            <a:r>
-              <a:rPr b="0" lang="en-US" sz="1810" spc="-1" strike="noStrike">
-                <a:solidFill>
-                  <a:srgbClr val="000000"/>
-                </a:solidFill>
-                <a:latin typeface="Arial"/>
-              </a:rPr>
-              <a:t>Fourth Outline Level</a:t>
-            </a:r>
-            <a:endParaRPr b="0" lang="en-US" sz="1810" spc="-1" strike="noStrike">
-              <a:solidFill>
-                <a:srgbClr val="000000"/>
-              </a:solidFill>
-              <a:latin typeface="Arial"/>
-            </a:endParaRPr>
-          </a:p>
-          <a:p>
-            <a:pPr lvl="4" marL="414360" indent="-414360">
-              <a:lnSpc>
-                <a:spcPct val="93000"/>
-              </a:lnSpc>
-              <a:spcBef>
-                <a:spcPts val="2160"/>
-              </a:spcBef>
-              <a:spcAft>
-                <a:spcPts val="286"/>
-              </a:spcAft>
-              <a:buClr>
-                <a:srgbClr val="000000"/>
-              </a:buClr>
-              <a:buFont typeface="Times New Roman"/>
-              <a:buChar char="»"/>
-              <a:tabLst>
-                <a:tab algn="l" pos="0"/>
-                <a:tab algn="l" pos="457200"/>
-                <a:tab algn="l" pos="914400"/>
-                <a:tab algn="l" pos="1371600"/>
-                <a:tab algn="l" pos="1828800"/>
-                <a:tab algn="l" pos="2286000"/>
-                <a:tab algn="l" pos="2743200"/>
-                <a:tab algn="l" pos="3200400"/>
-                <a:tab algn="l" pos="3657600"/>
-                <a:tab algn="l" pos="4114800"/>
-                <a:tab algn="l" pos="4572000"/>
-                <a:tab algn="l" pos="5029200"/>
-                <a:tab algn="l" pos="5486400"/>
-                <a:tab algn="l" pos="5943600"/>
-                <a:tab algn="l" pos="6400800"/>
-                <a:tab algn="l" pos="6858000"/>
-                <a:tab algn="l" pos="7315200"/>
-                <a:tab algn="l" pos="7772400"/>
-                <a:tab algn="l" pos="8229600"/>
-                <a:tab algn="l" pos="8686800"/>
-                <a:tab algn="l" pos="9144000"/>
-              </a:tabLst>
-            </a:pPr>
-            <a:r>
-              <a:rPr b="0" lang="en-US" sz="1810" spc="-1" strike="noStrike">
-                <a:solidFill>
-                  <a:srgbClr val="000000"/>
-                </a:solidFill>
-                <a:latin typeface="Arial"/>
-              </a:rPr>
-              <a:t>Fifth Outline Level</a:t>
-            </a:r>
-            <a:endParaRPr b="0" lang="en-US" sz="1810" spc="-1" strike="noStrike">
-              <a:solidFill>
-                <a:srgbClr val="000000"/>
-              </a:solidFill>
-              <a:latin typeface="Arial"/>
-            </a:endParaRPr>
-          </a:p>
-          <a:p>
-            <a:pPr lvl="5" marL="414360" indent="-414360">
-              <a:lnSpc>
-                <a:spcPct val="93000"/>
-              </a:lnSpc>
-              <a:spcBef>
-                <a:spcPts val="2160"/>
-              </a:spcBef>
-              <a:spcAft>
-                <a:spcPts val="286"/>
-              </a:spcAft>
-              <a:buClr>
-                <a:srgbClr val="000000"/>
-              </a:buClr>
-              <a:buFont typeface="Times New Roman"/>
-              <a:buChar char="»"/>
-              <a:tabLst>
-                <a:tab algn="l" pos="0"/>
-                <a:tab algn="l" pos="457200"/>
-                <a:tab algn="l" pos="914400"/>
-                <a:tab algn="l" pos="1371600"/>
-                <a:tab algn="l" pos="1828800"/>
-                <a:tab algn="l" pos="2286000"/>
-                <a:tab algn="l" pos="2743200"/>
-                <a:tab algn="l" pos="3200400"/>
-                <a:tab algn="l" pos="3657600"/>
-                <a:tab algn="l" pos="4114800"/>
-                <a:tab algn="l" pos="4572000"/>
-                <a:tab algn="l" pos="5029200"/>
-                <a:tab algn="l" pos="5486400"/>
-                <a:tab algn="l" pos="5943600"/>
-                <a:tab algn="l" pos="6400800"/>
-                <a:tab algn="l" pos="6858000"/>
-                <a:tab algn="l" pos="7315200"/>
-                <a:tab algn="l" pos="7772400"/>
-                <a:tab algn="l" pos="8229600"/>
-                <a:tab algn="l" pos="8686800"/>
-                <a:tab algn="l" pos="9144000"/>
-              </a:tabLst>
-            </a:pPr>
-            <a:r>
-              <a:rPr b="0" lang="en-US" sz="1810" spc="-1" strike="noStrike">
-                <a:solidFill>
-                  <a:srgbClr val="000000"/>
-                </a:solidFill>
-                <a:latin typeface="Arial"/>
-              </a:rPr>
-              <a:t>Sixth Outline Level</a:t>
-            </a:r>
-            <a:endParaRPr b="0" lang="en-US" sz="1810" spc="-1" strike="noStrike">
-              <a:solidFill>
-                <a:srgbClr val="000000"/>
-              </a:solidFill>
-              <a:latin typeface="Arial"/>
-            </a:endParaRPr>
-          </a:p>
-          <a:p>
-            <a:pPr lvl="6" marL="414360" indent="-414360">
-              <a:lnSpc>
-                <a:spcPct val="93000"/>
-              </a:lnSpc>
-              <a:spcBef>
-                <a:spcPts val="2160"/>
-              </a:spcBef>
-              <a:spcAft>
-                <a:spcPts val="286"/>
-              </a:spcAft>
-              <a:buClr>
-                <a:srgbClr val="000000"/>
-              </a:buClr>
-              <a:buFont typeface="Times New Roman"/>
-              <a:buChar char="»"/>
-              <a:tabLst>
-                <a:tab algn="l" pos="0"/>
-                <a:tab algn="l" pos="457200"/>
-                <a:tab algn="l" pos="914400"/>
-                <a:tab algn="l" pos="1371600"/>
-                <a:tab algn="l" pos="1828800"/>
-                <a:tab algn="l" pos="2286000"/>
-                <a:tab algn="l" pos="2743200"/>
-                <a:tab algn="l" pos="3200400"/>
-                <a:tab algn="l" pos="3657600"/>
-                <a:tab algn="l" pos="4114800"/>
-                <a:tab algn="l" pos="4572000"/>
-                <a:tab algn="l" pos="5029200"/>
-                <a:tab algn="l" pos="5486400"/>
-                <a:tab algn="l" pos="5943600"/>
-                <a:tab algn="l" pos="6400800"/>
-                <a:tab algn="l" pos="6858000"/>
-                <a:tab algn="l" pos="7315200"/>
-                <a:tab algn="l" pos="7772400"/>
-                <a:tab algn="l" pos="8229600"/>
-                <a:tab algn="l" pos="8686800"/>
-                <a:tab algn="l" pos="9144000"/>
-              </a:tabLst>
-            </a:pPr>
-            <a:r>
-              <a:rPr b="0" lang="en-US" sz="1810" spc="-1" strike="noStrike">
-                <a:solidFill>
-                  <a:srgbClr val="000000"/>
-                </a:solidFill>
-                <a:latin typeface="Arial"/>
-              </a:rPr>
-              <a:t>Seventh Outline Level</a:t>
-            </a:r>
-            <a:endParaRPr b="0" lang="en-US" sz="1810" spc="-1" strike="noStrike">
-              <a:solidFill>
-                <a:srgbClr val="000000"/>
-              </a:solidFill>
-              <a:latin typeface="Arial"/>
-            </a:endParaRPr>
-          </a:p>
-        </p:txBody>
-      </p:sp>
-      <p:sp>
-        <p:nvSpPr>
-          <p:cNvPr id="88" name=""/>
+      <p:sp>
+        <p:nvSpPr>
+          <p:cNvPr id="85" name="矩形 14"/>
           <p:cNvSpPr/>
           <p:nvPr/>
         </p:nvSpPr>
         <p:spPr>
           <a:xfrm>
-            <a:off x="5172840" y="1296000"/>
-            <a:ext cx="342000" cy="341280"/>
-          </a:xfrm>
-          <a:custGeom>
-            <a:avLst/>
-            <a:gdLst/>
-            <a:ahLst/>
-            <a:rect l="l" t="t" r="r" b="b"/>
-            <a:pathLst>
-              <a:path w="394" h="394">
-                <a:moveTo>
-                  <a:pt x="0" y="394"/>
-                </a:moveTo>
-                <a:lnTo>
-                  <a:pt x="394" y="394"/>
-                </a:lnTo>
-                <a:lnTo>
-                  <a:pt x="180" y="90"/>
-                </a:lnTo>
-                <a:lnTo>
-                  <a:pt x="394" y="394"/>
-                </a:lnTo>
-                <a:lnTo>
-                  <a:pt x="270" y="90"/>
-                </a:lnTo>
-                <a:close/>
-              </a:path>
-            </a:pathLst>
-          </a:custGeom>
+            <a:off x="0" y="6560280"/>
+            <a:ext cx="12188160" cy="293760"/>
+          </a:xfrm>
+          <a:prstGeom prst="rect">
+            <a:avLst/>
+          </a:prstGeom>
           <a:solidFill>
-            <a:srgbClr val="4ec8d1"/>
+            <a:srgbClr val="0c275c"/>
           </a:solidFill>
+          <a:ln>
+            <a:noFill/>
+          </a:ln>
+        </p:spPr>
+        <p:style>
+          <a:lnRef idx="2">
+            <a:schemeClr val="accent1">
+              <a:shade val="50000"/>
+            </a:schemeClr>
+          </a:lnRef>
+          <a:fillRef idx="1">
+            <a:schemeClr val="accent1"/>
+          </a:fillRef>
+          <a:effectRef idx="0">
+            <a:schemeClr val="accent1"/>
+          </a:effectRef>
+          <a:fontRef idx="minor"/>
+        </p:style>
+      </p:sp>
+      <p:sp>
+        <p:nvSpPr>
+          <p:cNvPr id="86" name="矩形 8"/>
+          <p:cNvSpPr/>
+          <p:nvPr/>
+        </p:nvSpPr>
+        <p:spPr>
+          <a:xfrm>
+            <a:off x="0" y="0"/>
+            <a:ext cx="12188160" cy="618120"/>
+          </a:xfrm>
+          <a:prstGeom prst="rect">
+            <a:avLst/>
+          </a:prstGeom>
+          <a:solidFill>
+            <a:srgbClr val="0c275c"/>
+          </a:solidFill>
+          <a:ln>
+            <a:noFill/>
+          </a:ln>
+        </p:spPr>
+        <p:style>
+          <a:lnRef idx="2">
+            <a:schemeClr val="accent1">
+              <a:shade val="50000"/>
+            </a:schemeClr>
+          </a:lnRef>
+          <a:fillRef idx="1">
+            <a:schemeClr val="accent1"/>
+          </a:fillRef>
+          <a:effectRef idx="0">
+            <a:schemeClr val="accent1"/>
+          </a:effectRef>
+          <a:fontRef idx="minor"/>
+        </p:style>
+      </p:sp>
+      <p:sp>
+        <p:nvSpPr>
+          <p:cNvPr id="87" name="标题 1"/>
+          <p:cNvSpPr/>
+          <p:nvPr/>
+        </p:nvSpPr>
+        <p:spPr>
+          <a:xfrm>
+            <a:off x="783000" y="60120"/>
+            <a:ext cx="6589800" cy="500400"/>
+          </a:xfrm>
+          <a:prstGeom prst="rect">
+            <a:avLst/>
+          </a:prstGeom>
+          <a:noFill/>
           <a:ln w="0">
             <a:noFill/>
           </a:ln>
@@ -8651,180 +8180,291 @@
           <a:fontRef idx="minor"/>
         </p:style>
       </p:sp>
-      <p:cxnSp>
-        <p:nvCxnSpPr>
-          <p:cNvPr id="89" name=""/>
-          <p:cNvCxnSpPr/>
-          <p:nvPr/>
-        </p:nvCxnSpPr>
-        <p:spPr>
-          <a:xfrm flipH="1" flipV="1">
-            <a:off x="4641120" y="2963520"/>
-            <a:ext cx="2172600" cy="2160"/>
-          </a:xfrm>
-          <a:prstGeom prst="straightConnector1">
-            <a:avLst/>
-          </a:prstGeom>
-          <a:ln w="28440">
-            <a:solidFill>
-              <a:srgbClr val="fad825"/>
-            </a:solidFill>
-            <a:prstDash val="dot"/>
-            <a:miter/>
-          </a:ln>
-        </p:spPr>
-      </p:cxnSp>
-      <p:sp>
-        <p:nvSpPr>
-          <p:cNvPr id="90" name=""/>
-          <p:cNvSpPr/>
-          <p:nvPr/>
-        </p:nvSpPr>
-        <p:spPr>
-          <a:xfrm>
-            <a:off x="11921760" y="867600"/>
-            <a:ext cx="268560" cy="5660640"/>
-          </a:xfrm>
-          <a:prstGeom prst="rect">
-            <a:avLst/>
-          </a:prstGeom>
-          <a:solidFill>
-            <a:srgbClr val="132e6c"/>
-          </a:solidFill>
-          <a:ln w="0">
-            <a:noFill/>
-          </a:ln>
-        </p:spPr>
-        <p:style>
-          <a:lnRef idx="0"/>
-          <a:fillRef idx="0"/>
-          <a:effectRef idx="0"/>
-          <a:fontRef idx="minor"/>
-        </p:style>
-      </p:sp>
-      <p:sp>
-        <p:nvSpPr>
-          <p:cNvPr id="91" name="PlaceHolder 3"/>
-          <p:cNvSpPr>
-            <a:spLocks noGrp="1"/>
-          </p:cNvSpPr>
-          <p:nvPr>
-            <p:ph type="sldNum" idx="3"/>
-          </p:nvPr>
-        </p:nvSpPr>
-        <p:spPr>
-          <a:xfrm>
-            <a:off x="8289000" y="6143760"/>
-            <a:ext cx="412920" cy="388080"/>
-          </a:xfrm>
-          <a:prstGeom prst="rect">
-            <a:avLst/>
-          </a:prstGeom>
-          <a:noFill/>
-          <a:ln w="0">
-            <a:noFill/>
-          </a:ln>
-        </p:spPr>
-        <p:txBody>
-          <a:bodyPr tIns="91440" bIns="91440" anchor="ctr">
+      <p:sp>
+        <p:nvSpPr>
+          <p:cNvPr id="88" name="PlaceHolder 1"/>
+          <p:cNvSpPr>
+            <a:spLocks noGrp="1"/>
+          </p:cNvSpPr>
+          <p:nvPr>
+            <p:ph type="ftr" idx="3"/>
+          </p:nvPr>
+        </p:nvSpPr>
+        <p:spPr>
+          <a:xfrm>
+            <a:off x="11450880" y="6592320"/>
+            <a:ext cx="646920" cy="229680"/>
+          </a:xfrm>
+          <a:prstGeom prst="rect">
+            <a:avLst/>
+          </a:prstGeom>
+          <a:noFill/>
+          <a:ln w="0">
+            <a:noFill/>
+          </a:ln>
+        </p:spPr>
+        <p:txBody>
+          <a:bodyPr lIns="90000" rIns="90000" tIns="45000" bIns="45000" anchor="ctr">
             <a:noAutofit/>
           </a:bodyPr>
           <a:lstStyle>
-            <a:lvl1pPr algn="r">
-              <a:lnSpc>
-                <a:spcPct val="100000"/>
-              </a:lnSpc>
-              <a:spcBef>
-                <a:spcPts val="238"/>
-              </a:spcBef>
-              <a:spcAft>
-                <a:spcPts val="238"/>
-              </a:spcAft>
-              <a:tabLst>
-                <a:tab algn="l" pos="0"/>
-                <a:tab algn="l" pos="457200"/>
-                <a:tab algn="l" pos="914400"/>
-                <a:tab algn="l" pos="1371600"/>
-                <a:tab algn="l" pos="1828800"/>
-                <a:tab algn="l" pos="2286000"/>
-                <a:tab algn="l" pos="2743200"/>
-                <a:tab algn="l" pos="3200400"/>
-                <a:tab algn="l" pos="3657600"/>
-                <a:tab algn="l" pos="4114800"/>
-                <a:tab algn="l" pos="4572000"/>
-                <a:tab algn="l" pos="5029200"/>
-                <a:tab algn="l" pos="5486400"/>
-                <a:tab algn="l" pos="5943600"/>
-                <a:tab algn="l" pos="6400800"/>
-                <a:tab algn="l" pos="6858000"/>
-                <a:tab algn="l" pos="7315200"/>
-                <a:tab algn="l" pos="7772400"/>
-                <a:tab algn="l" pos="8229600"/>
-                <a:tab algn="l" pos="8686800"/>
-                <a:tab algn="l" pos="9144000"/>
-                <a:tab algn="l" pos="9601200"/>
-                <a:tab algn="l" pos="10058400"/>
-                <a:tab algn="l" pos="10515600"/>
-              </a:tabLst>
+            <a:lvl1pPr algn="ctr">
+              <a:lnSpc>
+                <a:spcPct val="100000"/>
+              </a:lnSpc>
+              <a:buNone/>
               <a:defRPr b="0" lang="en-US" sz="1000" spc="-1" strike="noStrike">
                 <a:solidFill>
-                  <a:srgbClr val="585858"/>
+                  <a:srgbClr val="ffffff"/>
                 </a:solidFill>
-                <a:latin typeface="Arial"/>
-                <a:ea typeface="Arial"/>
+                <a:latin typeface="Times New Roman"/>
               </a:defRPr>
             </a:lvl1pPr>
           </a:lstStyle>
           <a:p>
-            <a:pPr algn="r">
-              <a:lnSpc>
-                <a:spcPct val="100000"/>
-              </a:lnSpc>
-              <a:spcBef>
-                <a:spcPts val="238"/>
-              </a:spcBef>
-              <a:spcAft>
-                <a:spcPts val="238"/>
-              </a:spcAft>
-              <a:tabLst>
-                <a:tab algn="l" pos="0"/>
-                <a:tab algn="l" pos="457200"/>
-                <a:tab algn="l" pos="914400"/>
-                <a:tab algn="l" pos="1371600"/>
-                <a:tab algn="l" pos="1828800"/>
-                <a:tab algn="l" pos="2286000"/>
-                <a:tab algn="l" pos="2743200"/>
-                <a:tab algn="l" pos="3200400"/>
-                <a:tab algn="l" pos="3657600"/>
-                <a:tab algn="l" pos="4114800"/>
-                <a:tab algn="l" pos="4572000"/>
-                <a:tab algn="l" pos="5029200"/>
-                <a:tab algn="l" pos="5486400"/>
-                <a:tab algn="l" pos="5943600"/>
-                <a:tab algn="l" pos="6400800"/>
-                <a:tab algn="l" pos="6858000"/>
-                <a:tab algn="l" pos="7315200"/>
-                <a:tab algn="l" pos="7772400"/>
-                <a:tab algn="l" pos="8229600"/>
-                <a:tab algn="l" pos="8686800"/>
-                <a:tab algn="l" pos="9144000"/>
-                <a:tab algn="l" pos="9601200"/>
-                <a:tab algn="l" pos="10058400"/>
-                <a:tab algn="l" pos="10515600"/>
-              </a:tabLst>
-            </a:pPr>
-            <a:fld id="{88CADE23-4469-4534-8EC2-66737AC24F42}" type="slidenum">
+            <a:pPr algn="ctr">
+              <a:lnSpc>
+                <a:spcPct val="100000"/>
+              </a:lnSpc>
+              <a:buNone/>
+            </a:pPr>
+            <a:r>
               <a:rPr b="0" lang="en-US" sz="1000" spc="-1" strike="noStrike">
                 <a:solidFill>
-                  <a:srgbClr val="585858"/>
+                  <a:srgbClr val="ffffff"/>
                 </a:solidFill>
-                <a:latin typeface="Arial"/>
-                <a:ea typeface="Arial"/>
-              </a:rPr>
-              <a:t>&lt;number&gt;</a:t>
-            </a:fld>
+                <a:latin typeface="Times New Roman"/>
+              </a:rPr>
+              <a:t>&lt;footer&gt;</a:t>
+            </a:r>
             <a:endParaRPr b="0" lang="en-US" sz="1000" spc="-1" strike="noStrike">
               <a:latin typeface="Times New Roman"/>
+            </a:endParaRPr>
+          </a:p>
+        </p:txBody>
+      </p:sp>
+      <p:sp>
+        <p:nvSpPr>
+          <p:cNvPr id="89" name="PlaceHolder 2"/>
+          <p:cNvSpPr>
+            <a:spLocks noGrp="1"/>
+          </p:cNvSpPr>
+          <p:nvPr>
+            <p:ph type="title"/>
+          </p:nvPr>
+        </p:nvSpPr>
+        <p:spPr>
+          <a:xfrm>
+            <a:off x="609480" y="273600"/>
+            <a:ext cx="10972440" cy="1144800"/>
+          </a:xfrm>
+          <a:prstGeom prst="rect">
+            <a:avLst/>
+          </a:prstGeom>
+          <a:noFill/>
+          <a:ln w="0">
+            <a:noFill/>
+          </a:ln>
+        </p:spPr>
+        <p:txBody>
+          <a:bodyPr lIns="0" rIns="0" tIns="0" bIns="0" anchor="ctr">
+            <a:noAutofit/>
+          </a:bodyPr>
+          <a:p>
+            <a:pPr algn="ctr">
+              <a:buNone/>
+            </a:pPr>
+            <a:r>
+              <a:rPr b="0" lang="en-US" sz="4400" spc="-1" strike="noStrike">
+                <a:latin typeface="Arial"/>
+              </a:rPr>
+              <a:t>Click to edit the title text format</a:t>
+            </a:r>
+            <a:endParaRPr b="0" lang="en-US" sz="4400" spc="-1" strike="noStrike">
+              <a:latin typeface="Arial"/>
+            </a:endParaRPr>
+          </a:p>
+        </p:txBody>
+      </p:sp>
+      <p:sp>
+        <p:nvSpPr>
+          <p:cNvPr id="90" name="PlaceHolder 3"/>
+          <p:cNvSpPr>
+            <a:spLocks noGrp="1"/>
+          </p:cNvSpPr>
+          <p:nvPr>
+            <p:ph type="body"/>
+          </p:nvPr>
+        </p:nvSpPr>
+        <p:spPr>
+          <a:xfrm>
+            <a:off x="609480" y="1604520"/>
+            <a:ext cx="10972440" cy="3977280"/>
+          </a:xfrm>
+          <a:prstGeom prst="rect">
+            <a:avLst/>
+          </a:prstGeom>
+          <a:noFill/>
+          <a:ln w="0">
+            <a:noFill/>
+          </a:ln>
+        </p:spPr>
+        <p:txBody>
+          <a:bodyPr lIns="0" rIns="0" tIns="0" bIns="0" anchor="t">
+            <a:normAutofit/>
+          </a:bodyPr>
+          <a:p>
+            <a:pPr marL="432000" indent="-324000">
+              <a:spcBef>
+                <a:spcPts val="1417"/>
+              </a:spcBef>
+              <a:buClr>
+                <a:srgbClr val="000000"/>
+              </a:buClr>
+              <a:buSzPct val="45000"/>
+              <a:buFont typeface="Wingdings" charset="2"/>
+              <a:buChar char=""/>
+            </a:pPr>
+            <a:r>
+              <a:rPr b="0" lang="en-US" sz="3200" spc="-1" strike="noStrike">
+                <a:latin typeface="Arial"/>
+              </a:rPr>
+              <a:t>Click to edit the outline text format</a:t>
+            </a:r>
+            <a:endParaRPr b="0" lang="en-US" sz="3200" spc="-1" strike="noStrike">
+              <a:latin typeface="Arial"/>
+            </a:endParaRPr>
+          </a:p>
+          <a:p>
+            <a:pPr lvl="1" marL="864000" indent="-324000">
+              <a:spcBef>
+                <a:spcPts val="1134"/>
+              </a:spcBef>
+              <a:buClr>
+                <a:srgbClr val="000000"/>
+              </a:buClr>
+              <a:buSzPct val="75000"/>
+              <a:buFont typeface="Symbol" charset="2"/>
+              <a:buChar char=""/>
+            </a:pPr>
+            <a:r>
+              <a:rPr b="0" lang="en-US" sz="2800" spc="-1" strike="noStrike">
+                <a:latin typeface="Arial"/>
+              </a:rPr>
+              <a:t>Second Outline Level</a:t>
+            </a:r>
+            <a:endParaRPr b="0" lang="en-US" sz="2800" spc="-1" strike="noStrike">
+              <a:latin typeface="Arial"/>
+            </a:endParaRPr>
+          </a:p>
+          <a:p>
+            <a:pPr lvl="2" marL="1296000" indent="-288000">
+              <a:spcBef>
+                <a:spcPts val="850"/>
+              </a:spcBef>
+              <a:buClr>
+                <a:srgbClr val="000000"/>
+              </a:buClr>
+              <a:buSzPct val="45000"/>
+              <a:buFont typeface="Wingdings" charset="2"/>
+              <a:buChar char=""/>
+            </a:pPr>
+            <a:r>
+              <a:rPr b="0" lang="en-US" sz="2400" spc="-1" strike="noStrike">
+                <a:latin typeface="Arial"/>
+              </a:rPr>
+              <a:t>Third Outline Level</a:t>
+            </a:r>
+            <a:endParaRPr b="0" lang="en-US" sz="2400" spc="-1" strike="noStrike">
+              <a:latin typeface="Arial"/>
+            </a:endParaRPr>
+          </a:p>
+          <a:p>
+            <a:pPr lvl="3" marL="1728000" indent="-216000">
+              <a:spcBef>
+                <a:spcPts val="567"/>
+              </a:spcBef>
+              <a:buClr>
+                <a:srgbClr val="000000"/>
+              </a:buClr>
+              <a:buSzPct val="75000"/>
+              <a:buFont typeface="Symbol" charset="2"/>
+              <a:buChar char=""/>
+            </a:pPr>
+            <a:r>
+              <a:rPr b="0" lang="en-US" sz="2000" spc="-1" strike="noStrike">
+                <a:latin typeface="Arial"/>
+              </a:rPr>
+              <a:t>Fourth Outline Level</a:t>
+            </a:r>
+            <a:endParaRPr b="0" lang="en-US" sz="2000" spc="-1" strike="noStrike">
+              <a:latin typeface="Arial"/>
+            </a:endParaRPr>
+          </a:p>
+          <a:p>
+            <a:pPr lvl="4" marL="2160000" indent="-216000">
+              <a:spcBef>
+                <a:spcPts val="283"/>
+              </a:spcBef>
+              <a:buClr>
+                <a:srgbClr val="000000"/>
+              </a:buClr>
+              <a:buSzPct val="45000"/>
+              <a:buFont typeface="Wingdings" charset="2"/>
+              <a:buChar char=""/>
+            </a:pPr>
+            <a:r>
+              <a:rPr b="0" lang="en-US" sz="2000" spc="-1" strike="noStrike">
+                <a:latin typeface="Arial"/>
+              </a:rPr>
+              <a:t>Fifth Outline Level</a:t>
+            </a:r>
+            <a:endParaRPr b="0" lang="en-US" sz="2000" spc="-1" strike="noStrike">
+              <a:latin typeface="Arial"/>
+            </a:endParaRPr>
+          </a:p>
+          <a:p>
+            <a:pPr lvl="5" marL="2592000" indent="-216000">
+              <a:spcBef>
+                <a:spcPts val="283"/>
+              </a:spcBef>
+              <a:buClr>
+                <a:srgbClr val="000000"/>
+              </a:buClr>
+              <a:buSzPct val="45000"/>
+              <a:buFont typeface="Wingdings" charset="2"/>
+              <a:buChar char=""/>
+            </a:pPr>
+            <a:r>
+              <a:rPr b="0" lang="en-US" sz="2000" spc="-1" strike="noStrike">
+                <a:latin typeface="Arial"/>
+              </a:rPr>
+              <a:t>Sixth Outline Level</a:t>
+            </a:r>
+            <a:endParaRPr b="0" lang="en-US" sz="2000" spc="-1" strike="noStrike">
+              <a:latin typeface="Arial"/>
+            </a:endParaRPr>
+          </a:p>
+          <a:p>
+            <a:pPr lvl="6" marL="3024000" indent="-216000">
+              <a:spcBef>
+                <a:spcPts val="283"/>
+              </a:spcBef>
+              <a:buClr>
+                <a:srgbClr val="000000"/>
+              </a:buClr>
+              <a:buSzPct val="45000"/>
+              <a:buFont typeface="Wingdings" charset="2"/>
+              <a:buChar char=""/>
+            </a:pPr>
+            <a:r>
+              <a:rPr b="0" lang="en-US" sz="2000" spc="-1" strike="noStrike">
+                <a:latin typeface="Arial"/>
+              </a:rPr>
+              <a:t>Seventh Outline Level</a:t>
+            </a:r>
+            <a:endParaRPr b="0" lang="en-US" sz="2000" spc="-1" strike="noStrike">
+              <a:latin typeface="Arial"/>
             </a:endParaRPr>
           </a:p>
         </p:txBody>
@@ -8833,18 +8473,18 @@
   </p:cSld>
   <p:clrMap bg1="lt1" bg2="lt2" tx1="dk1" tx2="dk2" accent1="accent1" accent2="accent2" accent3="accent3" accent4="accent4" accent5="accent5" accent6="accent6" hlink="hlink" folHlink="folHlink"/>
   <p:sldLayoutIdLst>
-    <p:sldLayoutId id="2147483675" r:id="rId3"/>
-    <p:sldLayoutId id="2147483676" r:id="rId4"/>
-    <p:sldLayoutId id="2147483677" r:id="rId5"/>
-    <p:sldLayoutId id="2147483678" r:id="rId6"/>
-    <p:sldLayoutId id="2147483679" r:id="rId7"/>
-    <p:sldLayoutId id="2147483680" r:id="rId8"/>
-    <p:sldLayoutId id="2147483681" r:id="rId9"/>
-    <p:sldLayoutId id="2147483682" r:id="rId10"/>
-    <p:sldLayoutId id="2147483683" r:id="rId11"/>
-    <p:sldLayoutId id="2147483684" r:id="rId12"/>
-    <p:sldLayoutId id="2147483685" r:id="rId13"/>
-    <p:sldLayoutId id="2147483686" r:id="rId14"/>
+    <p:sldLayoutId id="2147483675" r:id="rId2"/>
+    <p:sldLayoutId id="2147483676" r:id="rId3"/>
+    <p:sldLayoutId id="2147483677" r:id="rId4"/>
+    <p:sldLayoutId id="2147483678" r:id="rId5"/>
+    <p:sldLayoutId id="2147483679" r:id="rId6"/>
+    <p:sldLayoutId id="2147483680" r:id="rId7"/>
+    <p:sldLayoutId id="2147483681" r:id="rId8"/>
+    <p:sldLayoutId id="2147483682" r:id="rId9"/>
+    <p:sldLayoutId id="2147483683" r:id="rId10"/>
+    <p:sldLayoutId id="2147483684" r:id="rId11"/>
+    <p:sldLayoutId id="2147483685" r:id="rId12"/>
+    <p:sldLayoutId id="2147483686" r:id="rId13"/>
   </p:sldLayoutIdLst>
 </p:sldMaster>
 </file>
@@ -8875,14 +8515,14 @@
       </p:grpSpPr>
       <p:sp>
         <p:nvSpPr>
-          <p:cNvPr id="128" name="矩形 14"/>
+          <p:cNvPr id="127" name="矩形 14"/>
           <p:cNvSpPr/>
           <p:nvPr/>
         </p:nvSpPr>
         <p:spPr>
           <a:xfrm>
             <a:off x="0" y="6560280"/>
-            <a:ext cx="12188520" cy="294120"/>
+            <a:ext cx="12188160" cy="293760"/>
           </a:xfrm>
           <a:prstGeom prst="rect">
             <a:avLst/>
@@ -8911,14 +8551,14 @@
       </p:sp>
       <p:sp>
         <p:nvSpPr>
-          <p:cNvPr id="129" name="矩形 8"/>
+          <p:cNvPr id="128" name="矩形 8"/>
           <p:cNvSpPr/>
           <p:nvPr/>
         </p:nvSpPr>
         <p:spPr>
           <a:xfrm>
             <a:off x="0" y="0"/>
-            <a:ext cx="12188520" cy="618480"/>
+            <a:ext cx="12188160" cy="618120"/>
           </a:xfrm>
           <a:prstGeom prst="rect">
             <a:avLst/>
@@ -8947,14 +8587,14 @@
       </p:sp>
       <p:sp>
         <p:nvSpPr>
-          <p:cNvPr id="130" name="标题 1"/>
+          <p:cNvPr id="129" name="标题 1"/>
           <p:cNvSpPr/>
           <p:nvPr/>
         </p:nvSpPr>
         <p:spPr>
           <a:xfrm>
             <a:off x="783000" y="60120"/>
-            <a:ext cx="6590160" cy="500760"/>
+            <a:ext cx="6589800" cy="500400"/>
           </a:xfrm>
           <a:prstGeom prst="rect">
             <a:avLst/>
@@ -8973,7 +8613,7 @@
       </p:sp>
       <p:sp>
         <p:nvSpPr>
-          <p:cNvPr id="131" name="PlaceHolder 1"/>
+          <p:cNvPr id="130" name="PlaceHolder 1"/>
           <p:cNvSpPr>
             <a:spLocks noGrp="1"/>
           </p:cNvSpPr>
@@ -8984,7 +8624,7 @@
         <p:spPr>
           <a:xfrm>
             <a:off x="11450880" y="6592320"/>
-            <a:ext cx="647280" cy="230040"/>
+            <a:ext cx="646920" cy="229680"/>
           </a:xfrm>
           <a:prstGeom prst="rect">
             <a:avLst/>
@@ -9036,7 +8676,7 @@
       </p:sp>
       <p:sp>
         <p:nvSpPr>
-          <p:cNvPr id="132" name="PlaceHolder 2"/>
+          <p:cNvPr id="131" name="PlaceHolder 2"/>
           <p:cNvSpPr>
             <a:spLocks noGrp="1"/>
           </p:cNvSpPr>
@@ -9079,7 +8719,7 @@
       </p:sp>
       <p:sp>
         <p:nvSpPr>
-          <p:cNvPr id="133" name="PlaceHolder 3"/>
+          <p:cNvPr id="132" name="PlaceHolder 3"/>
           <p:cNvSpPr>
             <a:spLocks noGrp="1"/>
           </p:cNvSpPr>
@@ -9306,7 +8946,7 @@
       </p:grpSpPr>
       <p:sp>
         <p:nvSpPr>
-          <p:cNvPr id="170" name="PlaceHolder 1"/>
+          <p:cNvPr id="169" name="PlaceHolder 1"/>
           <p:cNvSpPr>
             <a:spLocks noGrp="1"/>
           </p:cNvSpPr>
@@ -9317,7 +8957,7 @@
         <p:spPr>
           <a:xfrm>
             <a:off x="1224360" y="2450520"/>
-            <a:ext cx="9733320" cy="531720"/>
+            <a:ext cx="9732960" cy="531360"/>
           </a:xfrm>
           <a:prstGeom prst="rect">
             <a:avLst/>
@@ -9381,17 +9021,14 @@
               <a:t>Troubleshooting</a:t>
             </a:r>
             <a:endParaRPr b="0" lang="en-US" sz="2400" spc="-1" strike="noStrike">
-              <a:solidFill>
-                <a:srgbClr val="000000"/>
-              </a:solidFill>
-              <a:latin typeface="Arial"/>
-            </a:endParaRPr>
-          </a:p>
-        </p:txBody>
-      </p:sp>
-      <p:sp>
-        <p:nvSpPr>
-          <p:cNvPr id="171" name="PlaceHolder 2"/>
+              <a:latin typeface="Arial"/>
+            </a:endParaRPr>
+          </a:p>
+        </p:txBody>
+      </p:sp>
+      <p:sp>
+        <p:nvSpPr>
+          <p:cNvPr id="170" name="PlaceHolder 2"/>
           <p:cNvSpPr>
             <a:spLocks noGrp="1"/>
           </p:cNvSpPr>
@@ -9402,7 +9039,7 @@
         <p:spPr>
           <a:xfrm>
             <a:off x="2722680" y="3540600"/>
-            <a:ext cx="6578640" cy="2763360"/>
+            <a:ext cx="6578280" cy="2763000"/>
           </a:xfrm>
           <a:prstGeom prst="rect">
             <a:avLst/>
@@ -9466,9 +9103,6 @@
               <a:t>DS 6015: Data Science Capstone</a:t>
             </a:r>
             <a:endParaRPr b="0" lang="en-US" sz="2100" spc="-1" strike="noStrike">
-              <a:solidFill>
-                <a:srgbClr val="000000"/>
-              </a:solidFill>
               <a:latin typeface="Arial"/>
             </a:endParaRPr>
           </a:p>
@@ -9522,9 +9156,6 @@
               <a:t>School of Data Science </a:t>
             </a:r>
             <a:endParaRPr b="0" lang="en-US" sz="2100" spc="-1" strike="noStrike">
-              <a:solidFill>
-                <a:srgbClr val="000000"/>
-              </a:solidFill>
               <a:latin typeface="Arial"/>
             </a:endParaRPr>
           </a:p>
@@ -9578,9 +9209,6 @@
               <a:t>University of Virginia</a:t>
             </a:r>
             <a:endParaRPr b="0" lang="en-US" sz="2100" spc="-1" strike="noStrike">
-              <a:solidFill>
-                <a:srgbClr val="000000"/>
-              </a:solidFill>
               <a:latin typeface="Arial"/>
             </a:endParaRPr>
           </a:p>
@@ -9624,9 +9252,6 @@
               </a:tabLst>
             </a:pPr>
             <a:endParaRPr b="0" lang="en-US" sz="2100" spc="-1" strike="noStrike">
-              <a:solidFill>
-                <a:srgbClr val="000000"/>
-              </a:solidFill>
               <a:latin typeface="Arial"/>
             </a:endParaRPr>
           </a:p>
@@ -9680,9 +9305,6 @@
               <a:t>Last updated: August 18, 2025</a:t>
             </a:r>
             <a:endParaRPr b="0" lang="en-US" sz="2100" spc="-1" strike="noStrike">
-              <a:solidFill>
-                <a:srgbClr val="000000"/>
-              </a:solidFill>
               <a:latin typeface="Arial"/>
             </a:endParaRPr>
           </a:p>
@@ -9690,6 +9312,14 @@
       </p:sp>
     </p:spTree>
   </p:cSld>
+  <mc:AlternateContent>
+    <mc:Choice Requires="p14">
+      <p:transition spd="slow" p14:dur="2000"/>
+    </mc:Choice>
+    <mc:Fallback>
+      <p:transition spd="slow"/>
+    </mc:Fallback>
+  </mc:AlternateContent>
 </p:sld>
 </file>
 
@@ -9712,14 +9342,14 @@
       </p:grpSpPr>
       <p:sp>
         <p:nvSpPr>
-          <p:cNvPr id="195" name=""/>
+          <p:cNvPr id="194" name=""/>
           <p:cNvSpPr/>
           <p:nvPr/>
         </p:nvSpPr>
         <p:spPr>
           <a:xfrm>
             <a:off x="428760" y="71640"/>
-            <a:ext cx="10085040" cy="539280"/>
+            <a:ext cx="10084680" cy="538920"/>
           </a:xfrm>
           <a:prstGeom prst="rect">
             <a:avLst/>
@@ -9754,7 +9384,7 @@
                 <a:latin typeface="Times New Roman"/>
                 <a:ea typeface="DejaVu Sans"/>
               </a:rPr>
-              <a:t>Sparse Feedback</a:t>
+              <a:t>Upskilling</a:t>
             </a:r>
             <a:endParaRPr b="0" lang="en-US" sz="3200" spc="-1" strike="noStrike">
               <a:latin typeface="Arial"/>
@@ -9764,14 +9394,14 @@
       </p:sp>
       <p:sp>
         <p:nvSpPr>
-          <p:cNvPr id="196" name=""/>
+          <p:cNvPr id="195" name=""/>
           <p:cNvSpPr/>
           <p:nvPr/>
         </p:nvSpPr>
         <p:spPr>
           <a:xfrm>
             <a:off x="457200" y="2057400"/>
-            <a:ext cx="4340520" cy="343440"/>
+            <a:ext cx="4340160" cy="343080"/>
           </a:xfrm>
           <a:prstGeom prst="rect">
             <a:avLst/>
@@ -9790,14 +9420,14 @@
       </p:sp>
       <p:sp>
         <p:nvSpPr>
-          <p:cNvPr id="197" name=""/>
+          <p:cNvPr id="196" name=""/>
           <p:cNvSpPr/>
           <p:nvPr/>
         </p:nvSpPr>
         <p:spPr>
           <a:xfrm>
             <a:off x="457200" y="1277640"/>
-            <a:ext cx="11428560" cy="3485880"/>
+            <a:ext cx="10512360" cy="3485520"/>
           </a:xfrm>
           <a:prstGeom prst="rect">
             <a:avLst/>
@@ -9825,139 +9455,188 @@
               <a:buNone/>
             </a:pPr>
             <a:r>
-              <a:rPr b="0" lang="en-US" sz="2400" spc="-1" strike="noStrike">
+              <a:rPr b="0" lang="en-US" sz="2200" spc="-1" strike="noStrike">
                 <a:solidFill>
                   <a:srgbClr val="000000"/>
                 </a:solidFill>
                 <a:latin typeface="Arial"/>
                 <a:ea typeface="DejaVu Sans"/>
               </a:rPr>
-              <a:t>Your mentor and sponsor should provide feedback on your work</a:t>
-            </a:r>
-            <a:endParaRPr b="0" lang="en-US" sz="2400" spc="-1" strike="noStrike">
-              <a:latin typeface="Arial"/>
-            </a:endParaRPr>
-          </a:p>
-          <a:p>
-            <a:pPr>
-              <a:lnSpc>
-                <a:spcPct val="100000"/>
-              </a:lnSpc>
-              <a:buNone/>
-            </a:pPr>
-            <a:endParaRPr b="0" lang="en-US" sz="2400" spc="-1" strike="noStrike">
-              <a:latin typeface="Arial"/>
-            </a:endParaRPr>
-          </a:p>
-          <a:p>
-            <a:pPr>
-              <a:lnSpc>
-                <a:spcPct val="100000"/>
-              </a:lnSpc>
-              <a:buNone/>
-            </a:pPr>
-            <a:r>
-              <a:rPr b="1" lang="en-US" sz="2400" spc="-1" strike="noStrike">
+              <a:t>Ideally, the project brings together skills you’ve learned in the program.</a:t>
+            </a:r>
+            <a:endParaRPr b="0" lang="en-US" sz="2200" spc="-1" strike="noStrike">
+              <a:latin typeface="Arial"/>
+            </a:endParaRPr>
+          </a:p>
+          <a:p>
+            <a:pPr>
+              <a:lnSpc>
+                <a:spcPct val="100000"/>
+              </a:lnSpc>
+              <a:buNone/>
+            </a:pPr>
+            <a:endParaRPr b="0" lang="en-US" sz="2200" spc="-1" strike="noStrike">
+              <a:latin typeface="Arial"/>
+            </a:endParaRPr>
+          </a:p>
+          <a:p>
+            <a:pPr>
+              <a:lnSpc>
+                <a:spcPct val="100000"/>
+              </a:lnSpc>
+              <a:buNone/>
+            </a:pPr>
+            <a:r>
+              <a:rPr b="1" lang="en-US" sz="2200" spc="-1" strike="noStrike">
                 <a:solidFill>
                   <a:srgbClr val="000000"/>
                 </a:solidFill>
                 <a:latin typeface="Arial"/>
                 <a:ea typeface="DejaVu Sans"/>
               </a:rPr>
-              <a:t>Q: What if feedback isn’t arriving often enough?</a:t>
-            </a:r>
-            <a:endParaRPr b="0" lang="en-US" sz="2400" spc="-1" strike="noStrike">
-              <a:latin typeface="Arial"/>
-            </a:endParaRPr>
-          </a:p>
-          <a:p>
-            <a:pPr>
-              <a:lnSpc>
-                <a:spcPct val="100000"/>
-              </a:lnSpc>
-              <a:buNone/>
-            </a:pPr>
-            <a:endParaRPr b="0" lang="en-US" sz="2400" spc="-1" strike="noStrike">
-              <a:latin typeface="Arial"/>
-            </a:endParaRPr>
-          </a:p>
-          <a:p>
-            <a:pPr>
-              <a:lnSpc>
-                <a:spcPct val="100000"/>
-              </a:lnSpc>
-              <a:buNone/>
-            </a:pPr>
-            <a:r>
-              <a:rPr b="0" lang="en-US" sz="2400" spc="-1" strike="noStrike">
+              <a:t>Q: What if I don’t have the skills to solve the problem?</a:t>
+            </a:r>
+            <a:endParaRPr b="0" lang="en-US" sz="2200" spc="-1" strike="noStrike">
+              <a:latin typeface="Arial"/>
+            </a:endParaRPr>
+          </a:p>
+          <a:p>
+            <a:pPr>
+              <a:lnSpc>
+                <a:spcPct val="100000"/>
+              </a:lnSpc>
+              <a:buNone/>
+            </a:pPr>
+            <a:endParaRPr b="0" lang="en-US" sz="2200" spc="-1" strike="noStrike">
+              <a:latin typeface="Arial"/>
+            </a:endParaRPr>
+          </a:p>
+          <a:p>
+            <a:pPr>
+              <a:lnSpc>
+                <a:spcPct val="100000"/>
+              </a:lnSpc>
+              <a:buNone/>
+            </a:pPr>
+            <a:r>
+              <a:rPr b="0" lang="en-US" sz="2200" spc="-1" strike="noStrike">
                 <a:solidFill>
                   <a:srgbClr val="000000"/>
                 </a:solidFill>
                 <a:latin typeface="Arial"/>
                 <a:ea typeface="DejaVu Sans"/>
               </a:rPr>
-              <a:t>You can try:</a:t>
-            </a:r>
-            <a:endParaRPr b="0" lang="en-US" sz="2400" spc="-1" strike="noStrike">
-              <a:latin typeface="Arial"/>
-            </a:endParaRPr>
-          </a:p>
-          <a:p>
-            <a:pPr>
-              <a:lnSpc>
-                <a:spcPct val="100000"/>
-              </a:lnSpc>
-              <a:buNone/>
-            </a:pPr>
-            <a:br>
-              <a:rPr sz="2400"/>
-            </a:br>
-            <a:r>
-              <a:rPr b="0" lang="en-US" sz="2400" spc="-1" strike="noStrike">
+              <a:t>&gt; In some cases, you will need to learn new things</a:t>
+            </a:r>
+            <a:endParaRPr b="0" lang="en-US" sz="2200" spc="-1" strike="noStrike">
+              <a:latin typeface="Arial"/>
+            </a:endParaRPr>
+          </a:p>
+          <a:p>
+            <a:pPr>
+              <a:lnSpc>
+                <a:spcPct val="100000"/>
+              </a:lnSpc>
+              <a:buNone/>
+            </a:pPr>
+            <a:r>
+              <a:rPr b="0" lang="en-US" sz="2200" spc="-1" strike="noStrike">
                 <a:solidFill>
                   <a:srgbClr val="000000"/>
                 </a:solidFill>
                 <a:latin typeface="Arial"/>
                 <a:ea typeface="DejaVu Sans"/>
               </a:rPr>
-              <a:t>&gt; Understanding if there are busier/quieter periods</a:t>
-            </a:r>
-            <a:endParaRPr b="0" lang="en-US" sz="2400" spc="-1" strike="noStrike">
-              <a:latin typeface="Arial"/>
-            </a:endParaRPr>
-          </a:p>
-          <a:p>
-            <a:pPr>
-              <a:lnSpc>
-                <a:spcPct val="100000"/>
-              </a:lnSpc>
-              <a:buNone/>
-            </a:pPr>
+              <a:t>&gt; Your sponsor / mentor might be able to suggest resources</a:t>
+            </a:r>
             <a:br>
-              <a:rPr sz="2400"/>
+              <a:rPr sz="2200"/>
             </a:br>
-            <a:r>
-              <a:rPr b="0" lang="en-US" sz="2400" spc="-1" strike="noStrike">
+            <a:endParaRPr b="0" lang="en-US" sz="2200" spc="-1" strike="noStrike">
+              <a:latin typeface="Arial"/>
+            </a:endParaRPr>
+          </a:p>
+          <a:p>
+            <a:pPr>
+              <a:lnSpc>
+                <a:spcPct val="100000"/>
+              </a:lnSpc>
+              <a:buNone/>
+            </a:pPr>
+            <a:r>
+              <a:rPr b="0" lang="en-US" sz="2200" spc="-1" strike="noStrike">
                 <a:solidFill>
                   <a:srgbClr val="000000"/>
                 </a:solidFill>
                 <a:latin typeface="Arial"/>
                 <a:ea typeface="DejaVu Sans"/>
               </a:rPr>
-              <a:t>&gt; Working on aspects not requiring the feedback</a:t>
-            </a:r>
-            <a:endParaRPr b="0" lang="en-US" sz="2400" spc="-1" strike="noStrike">
-              <a:latin typeface="Arial"/>
-            </a:endParaRPr>
-          </a:p>
-          <a:p>
-            <a:pPr>
-              <a:lnSpc>
-                <a:spcPct val="100000"/>
-              </a:lnSpc>
-              <a:buNone/>
-            </a:pPr>
-            <a:endParaRPr b="0" lang="en-US" sz="2400" spc="-1" strike="noStrike">
+              <a:t>&gt; Keep a list of open questions, skills needed</a:t>
+            </a:r>
+            <a:endParaRPr b="0" lang="en-US" sz="2200" spc="-1" strike="noStrike">
+              <a:latin typeface="Arial"/>
+            </a:endParaRPr>
+          </a:p>
+          <a:p>
+            <a:pPr>
+              <a:lnSpc>
+                <a:spcPct val="100000"/>
+              </a:lnSpc>
+              <a:buNone/>
+            </a:pPr>
+            <a:r>
+              <a:rPr b="0" lang="en-US" sz="2200" spc="-1" strike="noStrike">
+                <a:solidFill>
+                  <a:srgbClr val="000000"/>
+                </a:solidFill>
+                <a:latin typeface="Arial"/>
+                <a:ea typeface="DejaVu Sans"/>
+              </a:rPr>
+              <a:t>   </a:t>
+            </a:r>
+            <a:r>
+              <a:rPr b="0" lang="en-US" sz="2200" spc="-1" strike="noStrike">
+                <a:solidFill>
+                  <a:srgbClr val="000000"/>
+                </a:solidFill>
+                <a:latin typeface="Arial"/>
+                <a:ea typeface="DejaVu Sans"/>
+              </a:rPr>
+              <a:t>Break these down into manageable tasks (e.g., learn n-gram models)</a:t>
+            </a:r>
+            <a:endParaRPr b="0" lang="en-US" sz="2200" spc="-1" strike="noStrike">
+              <a:latin typeface="Arial"/>
+            </a:endParaRPr>
+          </a:p>
+          <a:p>
+            <a:pPr>
+              <a:lnSpc>
+                <a:spcPct val="100000"/>
+              </a:lnSpc>
+              <a:buNone/>
+            </a:pPr>
+            <a:r>
+              <a:rPr b="0" lang="en-US" sz="2200" spc="-1" strike="noStrike">
+                <a:solidFill>
+                  <a:srgbClr val="000000"/>
+                </a:solidFill>
+                <a:latin typeface="Arial"/>
+                <a:ea typeface="DejaVu Sans"/>
+              </a:rPr>
+              <a:t>&gt; You might distribute the work across teammates and share learnings </a:t>
+            </a:r>
+            <a:endParaRPr b="0" lang="en-US" sz="2200" spc="-1" strike="noStrike">
+              <a:latin typeface="Arial"/>
+            </a:endParaRPr>
+          </a:p>
+          <a:p>
+            <a:pPr>
+              <a:lnSpc>
+                <a:spcPct val="100000"/>
+              </a:lnSpc>
+              <a:buNone/>
+            </a:pPr>
+            <a:endParaRPr b="0" lang="en-US" sz="2200" spc="-1" strike="noStrike">
               <a:latin typeface="Arial"/>
             </a:endParaRPr>
           </a:p>
@@ -9995,14 +9674,14 @@
       </p:grpSpPr>
       <p:sp>
         <p:nvSpPr>
-          <p:cNvPr id="198" name=""/>
+          <p:cNvPr id="197" name=""/>
           <p:cNvSpPr/>
           <p:nvPr/>
         </p:nvSpPr>
         <p:spPr>
           <a:xfrm>
             <a:off x="428760" y="71640"/>
-            <a:ext cx="10085040" cy="539280"/>
+            <a:ext cx="10084680" cy="538920"/>
           </a:xfrm>
           <a:prstGeom prst="rect">
             <a:avLst/>
@@ -10037,7 +9716,7 @@
                 <a:latin typeface="Times New Roman"/>
                 <a:ea typeface="DejaVu Sans"/>
               </a:rPr>
-              <a:t>Model Doesn’t Generalize</a:t>
+              <a:t>Sparse Feedback</a:t>
             </a:r>
             <a:endParaRPr b="0" lang="en-US" sz="3200" spc="-1" strike="noStrike">
               <a:latin typeface="Arial"/>
@@ -10047,14 +9726,14 @@
       </p:sp>
       <p:sp>
         <p:nvSpPr>
-          <p:cNvPr id="199" name=""/>
+          <p:cNvPr id="198" name=""/>
           <p:cNvSpPr/>
           <p:nvPr/>
         </p:nvSpPr>
         <p:spPr>
           <a:xfrm>
             <a:off x="457200" y="2057400"/>
-            <a:ext cx="4340520" cy="343440"/>
+            <a:ext cx="4340160" cy="343080"/>
           </a:xfrm>
           <a:prstGeom prst="rect">
             <a:avLst/>
@@ -10073,14 +9752,14 @@
       </p:sp>
       <p:sp>
         <p:nvSpPr>
-          <p:cNvPr id="200" name=""/>
+          <p:cNvPr id="199" name=""/>
           <p:cNvSpPr/>
           <p:nvPr/>
         </p:nvSpPr>
         <p:spPr>
           <a:xfrm>
             <a:off x="457200" y="1277640"/>
-            <a:ext cx="10512720" cy="3485880"/>
+            <a:ext cx="11428200" cy="3485520"/>
           </a:xfrm>
           <a:prstGeom prst="rect">
             <a:avLst/>
@@ -10115,8 +9794,51 @@
                 <a:latin typeface="Arial"/>
                 <a:ea typeface="DejaVu Sans"/>
               </a:rPr>
-              <a:t>You’ve built a model on training data</a:t>
-            </a:r>
+              <a:t>Your mentor and sponsor should provide feedback on your work</a:t>
+            </a:r>
+            <a:endParaRPr b="0" lang="en-US" sz="2400" spc="-1" strike="noStrike">
+              <a:latin typeface="Arial"/>
+            </a:endParaRPr>
+          </a:p>
+          <a:p>
+            <a:pPr>
+              <a:lnSpc>
+                <a:spcPct val="100000"/>
+              </a:lnSpc>
+              <a:buNone/>
+            </a:pPr>
+            <a:endParaRPr b="0" lang="en-US" sz="2400" spc="-1" strike="noStrike">
+              <a:latin typeface="Arial"/>
+            </a:endParaRPr>
+          </a:p>
+          <a:p>
+            <a:pPr>
+              <a:lnSpc>
+                <a:spcPct val="100000"/>
+              </a:lnSpc>
+              <a:buNone/>
+            </a:pPr>
+            <a:r>
+              <a:rPr b="1" lang="en-US" sz="2400" spc="-1" strike="noStrike">
+                <a:solidFill>
+                  <a:srgbClr val="000000"/>
+                </a:solidFill>
+                <a:latin typeface="Arial"/>
+                <a:ea typeface="DejaVu Sans"/>
+              </a:rPr>
+              <a:t>Q: What if feedback isn’t arriving often enough?</a:t>
+            </a:r>
+            <a:endParaRPr b="0" lang="en-US" sz="2400" spc="-1" strike="noStrike">
+              <a:latin typeface="Arial"/>
+            </a:endParaRPr>
+          </a:p>
+          <a:p>
+            <a:pPr>
+              <a:lnSpc>
+                <a:spcPct val="100000"/>
+              </a:lnSpc>
+              <a:buNone/>
+            </a:pPr>
             <a:endParaRPr b="0" lang="en-US" sz="2400" spc="-1" strike="noStrike">
               <a:latin typeface="Arial"/>
             </a:endParaRPr>
@@ -10136,7 +9858,7 @@
                 <a:latin typeface="Arial"/>
                 <a:ea typeface="DejaVu Sans"/>
               </a:rPr>
-              <a:t>The performance on new data is worse</a:t>
+              <a:t>You can try:</a:t>
             </a:r>
             <a:endParaRPr b="0" lang="en-US" sz="2400" spc="-1" strike="noStrike">
               <a:latin typeface="Arial"/>
@@ -10149,49 +9871,9 @@
               </a:lnSpc>
               <a:buNone/>
             </a:pPr>
-            <a:endParaRPr b="0" lang="en-US" sz="2400" spc="-1" strike="noStrike">
-              <a:latin typeface="Arial"/>
-            </a:endParaRPr>
-          </a:p>
-          <a:p>
-            <a:pPr>
-              <a:lnSpc>
-                <a:spcPct val="100000"/>
-              </a:lnSpc>
-              <a:buNone/>
-            </a:pPr>
-            <a:r>
-              <a:rPr b="1" lang="en-US" sz="2400" spc="-1" strike="noStrike">
-                <a:solidFill>
-                  <a:srgbClr val="000000"/>
-                </a:solidFill>
-                <a:latin typeface="Arial"/>
-                <a:ea typeface="DejaVu Sans"/>
-              </a:rPr>
-              <a:t>Q: Why does my model perform much worse on new data?</a:t>
-            </a:r>
-            <a:endParaRPr b="0" lang="en-US" sz="2400" spc="-1" strike="noStrike">
-              <a:latin typeface="Arial"/>
-            </a:endParaRPr>
-          </a:p>
-          <a:p>
-            <a:pPr>
-              <a:lnSpc>
-                <a:spcPct val="100000"/>
-              </a:lnSpc>
-              <a:buNone/>
-            </a:pPr>
-            <a:endParaRPr b="0" lang="en-US" sz="2400" spc="-1" strike="noStrike">
-              <a:latin typeface="Arial"/>
-            </a:endParaRPr>
-          </a:p>
-          <a:p>
-            <a:pPr>
-              <a:lnSpc>
-                <a:spcPct val="100000"/>
-              </a:lnSpc>
-              <a:buNone/>
-            </a:pPr>
+            <a:br>
+              <a:rPr sz="2400"/>
+            </a:br>
             <a:r>
               <a:rPr b="0" lang="en-US" sz="2400" spc="-1" strike="noStrike">
                 <a:solidFill>
@@ -10200,8 +9882,19 @@
                 <a:latin typeface="Arial"/>
                 <a:ea typeface="DejaVu Sans"/>
               </a:rPr>
-              <a:t>This is usually a symptom of overfitting. Can consider:</a:t>
-            </a:r>
+              <a:t>&gt; Checking if there is a better medium for feedback (email, meetings, …)</a:t>
+            </a:r>
+            <a:endParaRPr b="0" lang="en-US" sz="2400" spc="-1" strike="noStrike">
+              <a:latin typeface="Arial"/>
+            </a:endParaRPr>
+          </a:p>
+          <a:p>
+            <a:pPr>
+              <a:lnSpc>
+                <a:spcPct val="100000"/>
+              </a:lnSpc>
+              <a:buNone/>
+            </a:pPr>
             <a:br>
               <a:rPr sz="2400"/>
             </a:br>
@@ -10213,7 +9906,7 @@
                 <a:latin typeface="Arial"/>
                 <a:ea typeface="DejaVu Sans"/>
               </a:rPr>
-              <a:t>- k-fold cross validation (for ML models)</a:t>
+              <a:t>&gt; Asking if there is a better way to share results</a:t>
             </a:r>
             <a:br>
               <a:rPr sz="2400"/>
@@ -10226,7 +9919,7 @@
                 <a:latin typeface="Arial"/>
                 <a:ea typeface="DejaVu Sans"/>
               </a:rPr>
-              <a:t>- Dropout layers (for deep neural networks)</a:t>
+              <a:t>   - Are questions clear enough?</a:t>
             </a:r>
             <a:br>
               <a:rPr sz="2400"/>
@@ -10239,19 +9932,11 @@
                 <a:latin typeface="Arial"/>
                 <a:ea typeface="DejaVu Sans"/>
               </a:rPr>
-              <a:t>- More suitable data (larger dataset, more recent data)</a:t>
-            </a:r>
-            <a:endParaRPr b="0" lang="en-US" sz="2400" spc="-1" strike="noStrike">
-              <a:latin typeface="Arial"/>
-            </a:endParaRPr>
-          </a:p>
-          <a:p>
-            <a:pPr>
-              <a:lnSpc>
-                <a:spcPct val="100000"/>
-              </a:lnSpc>
-              <a:buNone/>
-            </a:pPr>
+              <a:t>   - Are things summarized? </a:t>
+            </a:r>
+            <a:br>
+              <a:rPr sz="2400"/>
+            </a:br>
             <a:r>
               <a:rPr b="0" lang="en-US" sz="2400" spc="-1" strike="noStrike">
                 <a:solidFill>
@@ -10260,20 +9945,7 @@
                 <a:latin typeface="Arial"/>
                 <a:ea typeface="DejaVu Sans"/>
               </a:rPr>
-              <a:t>- Looking at the distribution of training data, new data. </a:t>
-            </a:r>
-            <a:br>
-              <a:rPr sz="2400"/>
-            </a:br>
-            <a:r>
-              <a:rPr b="0" lang="en-US" sz="2400" spc="-1" strike="noStrike">
-                <a:solidFill>
-                  <a:srgbClr val="000000"/>
-                </a:solidFill>
-                <a:latin typeface="Arial"/>
-                <a:ea typeface="DejaVu Sans"/>
-              </a:rPr>
-              <a:t>  Is there drift in distribution? If so, training set isn’t sufficient.</a:t>
+              <a:t>    (e.g., assemble separate questions into single slide)</a:t>
             </a:r>
             <a:endParaRPr b="0" lang="en-US" sz="2400" spc="-1" strike="noStrike">
               <a:latin typeface="Arial"/>
@@ -10313,14 +9985,14 @@
       </p:grpSpPr>
       <p:sp>
         <p:nvSpPr>
-          <p:cNvPr id="201" name=""/>
+          <p:cNvPr id="200" name=""/>
           <p:cNvSpPr/>
           <p:nvPr/>
         </p:nvSpPr>
         <p:spPr>
           <a:xfrm>
             <a:off x="428760" y="71640"/>
-            <a:ext cx="10085040" cy="539280"/>
+            <a:ext cx="10084680" cy="538920"/>
           </a:xfrm>
           <a:prstGeom prst="rect">
             <a:avLst/>
@@ -10355,7 +10027,7 @@
                 <a:latin typeface="Times New Roman"/>
                 <a:ea typeface="DejaVu Sans"/>
               </a:rPr>
-              <a:t>Unstable Model</a:t>
+              <a:t>Sparse Feedback</a:t>
             </a:r>
             <a:endParaRPr b="0" lang="en-US" sz="3200" spc="-1" strike="noStrike">
               <a:latin typeface="Arial"/>
@@ -10365,14 +10037,14 @@
       </p:sp>
       <p:sp>
         <p:nvSpPr>
-          <p:cNvPr id="202" name=""/>
+          <p:cNvPr id="201" name=""/>
           <p:cNvSpPr/>
           <p:nvPr/>
         </p:nvSpPr>
         <p:spPr>
           <a:xfrm>
             <a:off x="457200" y="2057400"/>
-            <a:ext cx="4340520" cy="343440"/>
+            <a:ext cx="4340160" cy="343080"/>
           </a:xfrm>
           <a:prstGeom prst="rect">
             <a:avLst/>
@@ -10391,14 +10063,14 @@
       </p:sp>
       <p:sp>
         <p:nvSpPr>
-          <p:cNvPr id="203" name=""/>
+          <p:cNvPr id="202" name=""/>
           <p:cNvSpPr/>
           <p:nvPr/>
         </p:nvSpPr>
         <p:spPr>
           <a:xfrm>
             <a:off x="457200" y="1277640"/>
-            <a:ext cx="10512720" cy="3485880"/>
+            <a:ext cx="11428200" cy="3485520"/>
           </a:xfrm>
           <a:prstGeom prst="rect">
             <a:avLst/>
@@ -10426,207 +10098,139 @@
               <a:buNone/>
             </a:pPr>
             <a:r>
-              <a:rPr b="0" lang="en-US" sz="2200" spc="-1" strike="noStrike">
+              <a:rPr b="0" lang="en-US" sz="2400" spc="-1" strike="noStrike">
                 <a:solidFill>
                   <a:srgbClr val="000000"/>
                 </a:solidFill>
                 <a:latin typeface="Arial"/>
                 <a:ea typeface="DejaVu Sans"/>
               </a:rPr>
-              <a:t>You’ve built a model</a:t>
-            </a:r>
-            <a:endParaRPr b="0" lang="en-US" sz="2200" spc="-1" strike="noStrike">
-              <a:latin typeface="Arial"/>
-            </a:endParaRPr>
-          </a:p>
-          <a:p>
-            <a:pPr>
-              <a:lnSpc>
-                <a:spcPct val="100000"/>
-              </a:lnSpc>
-              <a:buNone/>
-            </a:pPr>
-            <a:r>
-              <a:rPr b="0" lang="en-US" sz="2200" spc="-1" strike="noStrike">
+              <a:t>Your mentor and sponsor should provide feedback on your work</a:t>
+            </a:r>
+            <a:endParaRPr b="0" lang="en-US" sz="2400" spc="-1" strike="noStrike">
+              <a:latin typeface="Arial"/>
+            </a:endParaRPr>
+          </a:p>
+          <a:p>
+            <a:pPr>
+              <a:lnSpc>
+                <a:spcPct val="100000"/>
+              </a:lnSpc>
+              <a:buNone/>
+            </a:pPr>
+            <a:endParaRPr b="0" lang="en-US" sz="2400" spc="-1" strike="noStrike">
+              <a:latin typeface="Arial"/>
+            </a:endParaRPr>
+          </a:p>
+          <a:p>
+            <a:pPr>
+              <a:lnSpc>
+                <a:spcPct val="100000"/>
+              </a:lnSpc>
+              <a:buNone/>
+            </a:pPr>
+            <a:r>
+              <a:rPr b="1" lang="en-US" sz="2400" spc="-1" strike="noStrike">
                 <a:solidFill>
                   <a:srgbClr val="000000"/>
                 </a:solidFill>
                 <a:latin typeface="Arial"/>
                 <a:ea typeface="DejaVu Sans"/>
               </a:rPr>
-              <a:t>When you change hyperparameters slightly, the results change drastically</a:t>
-            </a:r>
-            <a:endParaRPr b="0" lang="en-US" sz="2200" spc="-1" strike="noStrike">
-              <a:latin typeface="Arial"/>
-            </a:endParaRPr>
-          </a:p>
-          <a:p>
-            <a:pPr>
-              <a:lnSpc>
-                <a:spcPct val="100000"/>
-              </a:lnSpc>
-              <a:buNone/>
-            </a:pPr>
-            <a:endParaRPr b="0" lang="en-US" sz="2200" spc="-1" strike="noStrike">
-              <a:latin typeface="Arial"/>
-            </a:endParaRPr>
-          </a:p>
-          <a:p>
-            <a:pPr>
-              <a:lnSpc>
-                <a:spcPct val="100000"/>
-              </a:lnSpc>
-              <a:buNone/>
-            </a:pPr>
-            <a:r>
-              <a:rPr b="1" lang="en-US" sz="2200" spc="-1" strike="noStrike">
+              <a:t>Q: What if feedback isn’t arriving often enough?</a:t>
+            </a:r>
+            <a:endParaRPr b="0" lang="en-US" sz="2400" spc="-1" strike="noStrike">
+              <a:latin typeface="Arial"/>
+            </a:endParaRPr>
+          </a:p>
+          <a:p>
+            <a:pPr>
+              <a:lnSpc>
+                <a:spcPct val="100000"/>
+              </a:lnSpc>
+              <a:buNone/>
+            </a:pPr>
+            <a:endParaRPr b="0" lang="en-US" sz="2400" spc="-1" strike="noStrike">
+              <a:latin typeface="Arial"/>
+            </a:endParaRPr>
+          </a:p>
+          <a:p>
+            <a:pPr>
+              <a:lnSpc>
+                <a:spcPct val="100000"/>
+              </a:lnSpc>
+              <a:buNone/>
+            </a:pPr>
+            <a:r>
+              <a:rPr b="0" lang="en-US" sz="2400" spc="-1" strike="noStrike">
                 <a:solidFill>
                   <a:srgbClr val="000000"/>
                 </a:solidFill>
                 <a:latin typeface="Arial"/>
                 <a:ea typeface="DejaVu Sans"/>
               </a:rPr>
-              <a:t>Q: Why is my model so unstable?</a:t>
-            </a:r>
-            <a:endParaRPr b="0" lang="en-US" sz="2200" spc="-1" strike="noStrike">
-              <a:latin typeface="Arial"/>
-            </a:endParaRPr>
-          </a:p>
-          <a:p>
-            <a:pPr>
-              <a:lnSpc>
-                <a:spcPct val="100000"/>
-              </a:lnSpc>
-              <a:buNone/>
-            </a:pPr>
-            <a:endParaRPr b="0" lang="en-US" sz="2200" spc="-1" strike="noStrike">
-              <a:latin typeface="Arial"/>
-            </a:endParaRPr>
-          </a:p>
-          <a:p>
-            <a:pPr>
-              <a:lnSpc>
-                <a:spcPct val="100000"/>
-              </a:lnSpc>
-              <a:buNone/>
-            </a:pPr>
-            <a:r>
-              <a:rPr b="0" lang="en-US" sz="2200" spc="-1" strike="noStrike">
+              <a:t>You can try:</a:t>
+            </a:r>
+            <a:endParaRPr b="0" lang="en-US" sz="2400" spc="-1" strike="noStrike">
+              <a:latin typeface="Arial"/>
+            </a:endParaRPr>
+          </a:p>
+          <a:p>
+            <a:pPr>
+              <a:lnSpc>
+                <a:spcPct val="100000"/>
+              </a:lnSpc>
+              <a:buNone/>
+            </a:pPr>
+            <a:br>
+              <a:rPr sz="2400"/>
+            </a:br>
+            <a:r>
+              <a:rPr b="0" lang="en-US" sz="2400" spc="-1" strike="noStrike">
                 <a:solidFill>
                   <a:srgbClr val="000000"/>
                 </a:solidFill>
                 <a:latin typeface="Arial"/>
                 <a:ea typeface="DejaVu Sans"/>
               </a:rPr>
-              <a:t>While we tune models for better performance,</a:t>
-            </a:r>
-            <a:endParaRPr b="0" lang="en-US" sz="2200" spc="-1" strike="noStrike">
-              <a:latin typeface="Arial"/>
-            </a:endParaRPr>
-          </a:p>
-          <a:p>
-            <a:pPr>
-              <a:lnSpc>
-                <a:spcPct val="100000"/>
-              </a:lnSpc>
-              <a:buNone/>
-            </a:pPr>
-            <a:r>
-              <a:rPr b="0" lang="en-US" sz="2200" spc="-1" strike="noStrike">
+              <a:t>&gt; Understanding if there are busier/quieter periods</a:t>
+            </a:r>
+            <a:endParaRPr b="0" lang="en-US" sz="2400" spc="-1" strike="noStrike">
+              <a:latin typeface="Arial"/>
+            </a:endParaRPr>
+          </a:p>
+          <a:p>
+            <a:pPr>
+              <a:lnSpc>
+                <a:spcPct val="100000"/>
+              </a:lnSpc>
+              <a:buNone/>
+            </a:pPr>
+            <a:br>
+              <a:rPr sz="2400"/>
+            </a:br>
+            <a:r>
+              <a:rPr b="0" lang="en-US" sz="2400" spc="-1" strike="noStrike">
                 <a:solidFill>
                   <a:srgbClr val="000000"/>
                 </a:solidFill>
                 <a:latin typeface="Arial"/>
                 <a:ea typeface="DejaVu Sans"/>
               </a:rPr>
-              <a:t>a drastic change in output is not desirable</a:t>
-            </a:r>
-            <a:endParaRPr b="0" lang="en-US" sz="2200" spc="-1" strike="noStrike">
-              <a:latin typeface="Arial"/>
-            </a:endParaRPr>
-          </a:p>
-          <a:p>
-            <a:pPr>
-              <a:lnSpc>
-                <a:spcPct val="100000"/>
-              </a:lnSpc>
-              <a:buNone/>
-            </a:pPr>
-            <a:endParaRPr b="0" lang="en-US" sz="2200" spc="-1" strike="noStrike">
-              <a:latin typeface="Arial"/>
-            </a:endParaRPr>
-          </a:p>
-          <a:p>
-            <a:pPr>
-              <a:lnSpc>
-                <a:spcPct val="100000"/>
-              </a:lnSpc>
-              <a:buNone/>
-            </a:pPr>
-            <a:r>
-              <a:rPr b="0" lang="en-US" sz="2200" spc="-1" strike="noStrike">
-                <a:solidFill>
-                  <a:srgbClr val="000000"/>
-                </a:solidFill>
-                <a:latin typeface="Arial"/>
-                <a:ea typeface="DejaVu Sans"/>
-              </a:rPr>
-              <a:t>&gt; The model may be too complex</a:t>
-            </a:r>
-            <a:endParaRPr b="0" lang="en-US" sz="2200" spc="-1" strike="noStrike">
-              <a:latin typeface="Arial"/>
-            </a:endParaRPr>
-          </a:p>
-          <a:p>
-            <a:pPr>
-              <a:lnSpc>
-                <a:spcPct val="100000"/>
-              </a:lnSpc>
-              <a:buNone/>
-            </a:pPr>
-            <a:r>
-              <a:rPr b="0" lang="en-US" sz="2200" spc="-1" strike="noStrike">
-                <a:solidFill>
-                  <a:srgbClr val="000000"/>
-                </a:solidFill>
-                <a:latin typeface="Arial"/>
-                <a:ea typeface="DejaVu Sans"/>
-              </a:rPr>
-              <a:t>Can try simpler model and examine sensitivity</a:t>
-            </a:r>
-            <a:endParaRPr b="0" lang="en-US" sz="2200" spc="-1" strike="noStrike">
-              <a:latin typeface="Arial"/>
-            </a:endParaRPr>
-          </a:p>
-          <a:p>
-            <a:pPr>
-              <a:lnSpc>
-                <a:spcPct val="100000"/>
-              </a:lnSpc>
-              <a:buNone/>
-            </a:pPr>
-            <a:endParaRPr b="0" lang="en-US" sz="2200" spc="-1" strike="noStrike">
-              <a:latin typeface="Arial"/>
-            </a:endParaRPr>
-          </a:p>
-          <a:p>
-            <a:pPr>
-              <a:lnSpc>
-                <a:spcPct val="100000"/>
-              </a:lnSpc>
-              <a:buNone/>
-            </a:pPr>
-            <a:r>
-              <a:rPr b="0" lang="en-US" sz="2200" spc="-1" strike="noStrike">
-                <a:solidFill>
-                  <a:srgbClr val="000000"/>
-                </a:solidFill>
-                <a:latin typeface="Arial"/>
-                <a:ea typeface="DejaVu Sans"/>
-              </a:rPr>
-              <a:t>&gt; Did you cross validate the model? This is a good practice when feasible</a:t>
-            </a:r>
-            <a:endParaRPr b="0" lang="en-US" sz="2200" spc="-1" strike="noStrike">
+              <a:t>&gt; Working on aspects not requiring the feedback</a:t>
+            </a:r>
+            <a:endParaRPr b="0" lang="en-US" sz="2400" spc="-1" strike="noStrike">
+              <a:latin typeface="Arial"/>
+            </a:endParaRPr>
+          </a:p>
+          <a:p>
+            <a:pPr>
+              <a:lnSpc>
+                <a:spcPct val="100000"/>
+              </a:lnSpc>
+              <a:buNone/>
+            </a:pPr>
+            <a:endParaRPr b="0" lang="en-US" sz="2400" spc="-1" strike="noStrike">
               <a:latin typeface="Arial"/>
             </a:endParaRPr>
           </a:p>
@@ -10664,14 +10268,14 @@
       </p:grpSpPr>
       <p:sp>
         <p:nvSpPr>
-          <p:cNvPr id="204" name=""/>
+          <p:cNvPr id="203" name=""/>
           <p:cNvSpPr/>
           <p:nvPr/>
         </p:nvSpPr>
         <p:spPr>
           <a:xfrm>
             <a:off x="428760" y="71640"/>
-            <a:ext cx="10085040" cy="539280"/>
+            <a:ext cx="10084680" cy="538920"/>
           </a:xfrm>
           <a:prstGeom prst="rect">
             <a:avLst/>
@@ -10706,7 +10310,7 @@
                 <a:latin typeface="Times New Roman"/>
                 <a:ea typeface="DejaVu Sans"/>
               </a:rPr>
-              <a:t>Sponsor Unsure how to use Deliverables</a:t>
+              <a:t>Model Doesn’t Generalize</a:t>
             </a:r>
             <a:endParaRPr b="0" lang="en-US" sz="3200" spc="-1" strike="noStrike">
               <a:latin typeface="Arial"/>
@@ -10716,14 +10320,14 @@
       </p:sp>
       <p:sp>
         <p:nvSpPr>
-          <p:cNvPr id="205" name=""/>
+          <p:cNvPr id="204" name=""/>
           <p:cNvSpPr/>
           <p:nvPr/>
         </p:nvSpPr>
         <p:spPr>
           <a:xfrm>
             <a:off x="457200" y="2057400"/>
-            <a:ext cx="4340520" cy="343440"/>
+            <a:ext cx="4340160" cy="343080"/>
           </a:xfrm>
           <a:prstGeom prst="rect">
             <a:avLst/>
@@ -10742,14 +10346,14 @@
       </p:sp>
       <p:sp>
         <p:nvSpPr>
-          <p:cNvPr id="206" name=""/>
+          <p:cNvPr id="205" name=""/>
           <p:cNvSpPr/>
           <p:nvPr/>
         </p:nvSpPr>
         <p:spPr>
           <a:xfrm>
             <a:off x="457200" y="1277640"/>
-            <a:ext cx="10512720" cy="3485880"/>
+            <a:ext cx="10512360" cy="3485520"/>
           </a:xfrm>
           <a:prstGeom prst="rect">
             <a:avLst/>
@@ -10776,213 +10380,175 @@
               </a:lnSpc>
               <a:buNone/>
             </a:pPr>
-            <a:endParaRPr b="0" lang="en-US" sz="2200" spc="-1" strike="noStrike">
-              <a:latin typeface="Arial"/>
-            </a:endParaRPr>
-          </a:p>
-          <a:p>
-            <a:pPr>
-              <a:lnSpc>
-                <a:spcPct val="100000"/>
-              </a:lnSpc>
-              <a:buNone/>
-            </a:pPr>
-            <a:endParaRPr b="0" lang="en-US" sz="2200" spc="-1" strike="noStrike">
-              <a:latin typeface="Arial"/>
-            </a:endParaRPr>
-          </a:p>
-          <a:p>
-            <a:pPr>
-              <a:lnSpc>
-                <a:spcPct val="100000"/>
-              </a:lnSpc>
-              <a:buNone/>
-            </a:pPr>
-            <a:r>
-              <a:rPr b="1" lang="en-US" sz="2200" spc="-1" strike="noStrike">
+            <a:r>
+              <a:rPr b="0" lang="en-US" sz="2400" spc="-1" strike="noStrike">
                 <a:solidFill>
                   <a:srgbClr val="000000"/>
                 </a:solidFill>
                 <a:latin typeface="Arial"/>
                 <a:ea typeface="DejaVu Sans"/>
               </a:rPr>
-              <a:t>Q: What if the sponsor is unsure how to use the deliverables?</a:t>
-            </a:r>
-            <a:endParaRPr b="0" lang="en-US" sz="2200" spc="-1" strike="noStrike">
-              <a:latin typeface="Arial"/>
-            </a:endParaRPr>
-          </a:p>
-          <a:p>
-            <a:pPr>
-              <a:lnSpc>
-                <a:spcPct val="100000"/>
-              </a:lnSpc>
-              <a:buNone/>
-            </a:pPr>
-            <a:endParaRPr b="0" lang="en-US" sz="2200" spc="-1" strike="noStrike">
-              <a:latin typeface="Arial"/>
-            </a:endParaRPr>
-          </a:p>
-          <a:p>
-            <a:pPr>
-              <a:lnSpc>
-                <a:spcPct val="100000"/>
-              </a:lnSpc>
-              <a:buNone/>
-            </a:pPr>
-            <a:r>
-              <a:rPr b="0" lang="en-US" sz="2200" spc="-1" strike="noStrike">
+              <a:t>You’ve built a model on training data</a:t>
+            </a:r>
+            <a:endParaRPr b="0" lang="en-US" sz="2400" spc="-1" strike="noStrike">
+              <a:latin typeface="Arial"/>
+            </a:endParaRPr>
+          </a:p>
+          <a:p>
+            <a:pPr>
+              <a:lnSpc>
+                <a:spcPct val="100000"/>
+              </a:lnSpc>
+              <a:buNone/>
+            </a:pPr>
+            <a:r>
+              <a:rPr b="0" lang="en-US" sz="2400" spc="-1" strike="noStrike">
                 <a:solidFill>
                   <a:srgbClr val="000000"/>
                 </a:solidFill>
                 <a:latin typeface="Arial"/>
                 <a:ea typeface="DejaVu Sans"/>
               </a:rPr>
-              <a:t>&gt; Share work early and often. Avoid dropping everything on them at the end.</a:t>
-            </a:r>
-            <a:endParaRPr b="0" lang="en-US" sz="2200" spc="-1" strike="noStrike">
-              <a:latin typeface="Arial"/>
-            </a:endParaRPr>
-          </a:p>
-          <a:p>
-            <a:pPr>
-              <a:lnSpc>
-                <a:spcPct val="100000"/>
-              </a:lnSpc>
-              <a:buNone/>
-            </a:pPr>
-            <a:endParaRPr b="0" lang="en-US" sz="2200" spc="-1" strike="noStrike">
-              <a:latin typeface="Arial"/>
-            </a:endParaRPr>
-          </a:p>
-          <a:p>
-            <a:pPr>
-              <a:lnSpc>
-                <a:spcPct val="100000"/>
-              </a:lnSpc>
-              <a:buNone/>
-            </a:pPr>
-            <a:r>
-              <a:rPr b="0" lang="en-US" sz="2200" spc="-1" strike="noStrike">
+              <a:t>The performance on new data is worse</a:t>
+            </a:r>
+            <a:endParaRPr b="0" lang="en-US" sz="2400" spc="-1" strike="noStrike">
+              <a:latin typeface="Arial"/>
+            </a:endParaRPr>
+          </a:p>
+          <a:p>
+            <a:pPr>
+              <a:lnSpc>
+                <a:spcPct val="100000"/>
+              </a:lnSpc>
+              <a:buNone/>
+            </a:pPr>
+            <a:endParaRPr b="0" lang="en-US" sz="2400" spc="-1" strike="noStrike">
+              <a:latin typeface="Arial"/>
+            </a:endParaRPr>
+          </a:p>
+          <a:p>
+            <a:pPr>
+              <a:lnSpc>
+                <a:spcPct val="100000"/>
+              </a:lnSpc>
+              <a:buNone/>
+            </a:pPr>
+            <a:r>
+              <a:rPr b="1" lang="en-US" sz="2400" spc="-1" strike="noStrike">
                 <a:solidFill>
                   <a:srgbClr val="000000"/>
                 </a:solidFill>
                 <a:latin typeface="Arial"/>
                 <a:ea typeface="DejaVu Sans"/>
               </a:rPr>
-              <a:t>&gt; Leave time at the end to walk sponsor through deliverables</a:t>
-            </a:r>
-            <a:endParaRPr b="0" lang="en-US" sz="2200" spc="-1" strike="noStrike">
-              <a:latin typeface="Arial"/>
-            </a:endParaRPr>
-          </a:p>
-          <a:p>
-            <a:pPr>
-              <a:lnSpc>
-                <a:spcPct val="100000"/>
-              </a:lnSpc>
-              <a:buNone/>
-            </a:pPr>
-            <a:endParaRPr b="0" lang="en-US" sz="2200" spc="-1" strike="noStrike">
-              <a:latin typeface="Arial"/>
-            </a:endParaRPr>
-          </a:p>
-          <a:p>
-            <a:pPr>
-              <a:lnSpc>
-                <a:spcPct val="100000"/>
-              </a:lnSpc>
-              <a:buNone/>
-            </a:pPr>
-            <a:r>
-              <a:rPr b="0" lang="en-US" sz="2200" spc="-1" strike="noStrike">
+              <a:t>Q: Why does my model perform much worse on new data?</a:t>
+            </a:r>
+            <a:endParaRPr b="0" lang="en-US" sz="2400" spc="-1" strike="noStrike">
+              <a:latin typeface="Arial"/>
+            </a:endParaRPr>
+          </a:p>
+          <a:p>
+            <a:pPr>
+              <a:lnSpc>
+                <a:spcPct val="100000"/>
+              </a:lnSpc>
+              <a:buNone/>
+            </a:pPr>
+            <a:endParaRPr b="0" lang="en-US" sz="2400" spc="-1" strike="noStrike">
+              <a:latin typeface="Arial"/>
+            </a:endParaRPr>
+          </a:p>
+          <a:p>
+            <a:pPr>
+              <a:lnSpc>
+                <a:spcPct val="100000"/>
+              </a:lnSpc>
+              <a:buNone/>
+            </a:pPr>
+            <a:r>
+              <a:rPr b="0" lang="en-US" sz="2400" spc="-1" strike="noStrike">
                 <a:solidFill>
                   <a:srgbClr val="000000"/>
                 </a:solidFill>
                 <a:latin typeface="Arial"/>
                 <a:ea typeface="DejaVu Sans"/>
               </a:rPr>
-              <a:t>&gt; Have a meeting where sponsor team runs the code</a:t>
-            </a:r>
-            <a:endParaRPr b="0" lang="en-US" sz="2200" spc="-1" strike="noStrike">
-              <a:latin typeface="Arial"/>
-            </a:endParaRPr>
-          </a:p>
-          <a:p>
-            <a:pPr>
-              <a:lnSpc>
-                <a:spcPct val="100000"/>
-              </a:lnSpc>
-              <a:buNone/>
-            </a:pPr>
-            <a:endParaRPr b="0" lang="en-US" sz="2200" spc="-1" strike="noStrike">
-              <a:latin typeface="Arial"/>
-            </a:endParaRPr>
-          </a:p>
-          <a:p>
-            <a:pPr>
-              <a:lnSpc>
-                <a:spcPct val="100000"/>
-              </a:lnSpc>
-              <a:buNone/>
-            </a:pPr>
-            <a:r>
-              <a:rPr b="0" lang="en-US" sz="2200" spc="-1" strike="noStrike">
+              <a:t>This is usually a symptom of overfitting. Can consider:</a:t>
+            </a:r>
+            <a:br>
+              <a:rPr sz="2400"/>
+            </a:br>
+            <a:r>
+              <a:rPr b="0" lang="en-US" sz="2400" spc="-1" strike="noStrike">
                 <a:solidFill>
                   <a:srgbClr val="000000"/>
                 </a:solidFill>
                 <a:latin typeface="Arial"/>
                 <a:ea typeface="DejaVu Sans"/>
               </a:rPr>
-              <a:t>&gt; Clearly document the work / code. A README file can be very effective.</a:t>
+              <a:t>- k-fold cross validation (for ML models)</a:t>
             </a:r>
             <a:br>
-              <a:rPr sz="2200"/>
+              <a:rPr sz="2400"/>
             </a:br>
             <a:r>
-              <a:rPr b="0" lang="en-US" sz="2200" spc="-1" strike="noStrike">
+              <a:rPr b="0" lang="en-US" sz="2400" spc="-1" strike="noStrike">
                 <a:solidFill>
                   <a:srgbClr val="000000"/>
                 </a:solidFill>
                 <a:latin typeface="Arial"/>
                 <a:ea typeface="DejaVu Sans"/>
               </a:rPr>
-              <a:t>It can include objective, main functionality.</a:t>
-            </a:r>
-            <a:endParaRPr b="0" lang="en-US" sz="2200" spc="-1" strike="noStrike">
-              <a:latin typeface="Arial"/>
-            </a:endParaRPr>
-          </a:p>
-          <a:p>
-            <a:pPr>
-              <a:lnSpc>
-                <a:spcPct val="100000"/>
-              </a:lnSpc>
-              <a:buNone/>
-            </a:pPr>
-            <a:endParaRPr b="0" lang="en-US" sz="2200" spc="-1" strike="noStrike">
-              <a:latin typeface="Arial"/>
-            </a:endParaRPr>
-          </a:p>
-          <a:p>
-            <a:pPr>
-              <a:lnSpc>
-                <a:spcPct val="100000"/>
-              </a:lnSpc>
-              <a:buNone/>
-            </a:pPr>
-            <a:endParaRPr b="0" lang="en-US" sz="2200" spc="-1" strike="noStrike">
-              <a:latin typeface="Arial"/>
-            </a:endParaRPr>
-          </a:p>
-          <a:p>
-            <a:pPr>
-              <a:lnSpc>
-                <a:spcPct val="100000"/>
-              </a:lnSpc>
-              <a:buNone/>
-            </a:pPr>
-            <a:endParaRPr b="0" lang="en-US" sz="2200" spc="-1" strike="noStrike">
+              <a:t>- Dropout layers (for deep neural networks)</a:t>
+            </a:r>
+            <a:br>
+              <a:rPr sz="2400"/>
+            </a:br>
+            <a:r>
+              <a:rPr b="0" lang="en-US" sz="2400" spc="-1" strike="noStrike">
+                <a:solidFill>
+                  <a:srgbClr val="000000"/>
+                </a:solidFill>
+                <a:latin typeface="Arial"/>
+                <a:ea typeface="DejaVu Sans"/>
+              </a:rPr>
+              <a:t>- More suitable data (larger dataset, more recent data)</a:t>
+            </a:r>
+            <a:endParaRPr b="0" lang="en-US" sz="2400" spc="-1" strike="noStrike">
+              <a:latin typeface="Arial"/>
+            </a:endParaRPr>
+          </a:p>
+          <a:p>
+            <a:pPr>
+              <a:lnSpc>
+                <a:spcPct val="100000"/>
+              </a:lnSpc>
+              <a:buNone/>
+            </a:pPr>
+            <a:r>
+              <a:rPr b="0" lang="en-US" sz="2400" spc="-1" strike="noStrike">
+                <a:solidFill>
+                  <a:srgbClr val="000000"/>
+                </a:solidFill>
+                <a:latin typeface="Arial"/>
+                <a:ea typeface="DejaVu Sans"/>
+              </a:rPr>
+              <a:t>- Looking at the distribution of training data, new data. </a:t>
+            </a:r>
+            <a:br>
+              <a:rPr sz="2400"/>
+            </a:br>
+            <a:r>
+              <a:rPr b="0" lang="en-US" sz="2400" spc="-1" strike="noStrike">
+                <a:solidFill>
+                  <a:srgbClr val="000000"/>
+                </a:solidFill>
+                <a:latin typeface="Arial"/>
+                <a:ea typeface="DejaVu Sans"/>
+              </a:rPr>
+              <a:t>  Is there drift in distribution? If so, training set isn’t sufficient.</a:t>
+            </a:r>
+            <a:endParaRPr b="0" lang="en-US" sz="2400" spc="-1" strike="noStrike">
               <a:latin typeface="Arial"/>
             </a:endParaRPr>
           </a:p>
@@ -11020,14 +10586,14 @@
       </p:grpSpPr>
       <p:sp>
         <p:nvSpPr>
-          <p:cNvPr id="207" name=""/>
+          <p:cNvPr id="206" name=""/>
           <p:cNvSpPr/>
           <p:nvPr/>
         </p:nvSpPr>
         <p:spPr>
           <a:xfrm>
             <a:off x="428760" y="71640"/>
-            <a:ext cx="10085040" cy="539280"/>
+            <a:ext cx="10084680" cy="538920"/>
           </a:xfrm>
           <a:prstGeom prst="rect">
             <a:avLst/>
@@ -11062,7 +10628,7 @@
                 <a:latin typeface="Times New Roman"/>
                 <a:ea typeface="DejaVu Sans"/>
               </a:rPr>
-              <a:t>Final Thoughts</a:t>
+              <a:t>Unstable Model</a:t>
             </a:r>
             <a:endParaRPr b="0" lang="en-US" sz="3200" spc="-1" strike="noStrike">
               <a:latin typeface="Arial"/>
@@ -11072,14 +10638,14 @@
       </p:sp>
       <p:sp>
         <p:nvSpPr>
-          <p:cNvPr id="208" name=""/>
+          <p:cNvPr id="207" name=""/>
           <p:cNvSpPr/>
           <p:nvPr/>
         </p:nvSpPr>
         <p:spPr>
           <a:xfrm>
             <a:off x="457200" y="2057400"/>
-            <a:ext cx="4340520" cy="343440"/>
+            <a:ext cx="4340160" cy="343080"/>
           </a:xfrm>
           <a:prstGeom prst="rect">
             <a:avLst/>
@@ -11098,14 +10664,721 @@
       </p:sp>
       <p:sp>
         <p:nvSpPr>
+          <p:cNvPr id="208" name=""/>
+          <p:cNvSpPr/>
+          <p:nvPr/>
+        </p:nvSpPr>
+        <p:spPr>
+          <a:xfrm>
+            <a:off x="457200" y="1277640"/>
+            <a:ext cx="10512360" cy="3485520"/>
+          </a:xfrm>
+          <a:prstGeom prst="rect">
+            <a:avLst/>
+          </a:prstGeom>
+          <a:noFill/>
+          <a:ln w="0">
+            <a:noFill/>
+          </a:ln>
+        </p:spPr>
+        <p:style>
+          <a:lnRef idx="0"/>
+          <a:fillRef idx="0"/>
+          <a:effectRef idx="0"/>
+          <a:fontRef idx="minor"/>
+        </p:style>
+        <p:txBody>
+          <a:bodyPr lIns="90000" rIns="90000" tIns="45000" bIns="45000" anchor="t">
+            <a:noAutofit/>
+          </a:bodyPr>
+          <a:p>
+            <a:pPr>
+              <a:lnSpc>
+                <a:spcPct val="100000"/>
+              </a:lnSpc>
+              <a:buNone/>
+            </a:pPr>
+            <a:r>
+              <a:rPr b="0" lang="en-US" sz="2200" spc="-1" strike="noStrike">
+                <a:solidFill>
+                  <a:srgbClr val="000000"/>
+                </a:solidFill>
+                <a:latin typeface="Arial"/>
+                <a:ea typeface="DejaVu Sans"/>
+              </a:rPr>
+              <a:t>You’ve built a model</a:t>
+            </a:r>
+            <a:endParaRPr b="0" lang="en-US" sz="2200" spc="-1" strike="noStrike">
+              <a:latin typeface="Arial"/>
+            </a:endParaRPr>
+          </a:p>
+          <a:p>
+            <a:pPr>
+              <a:lnSpc>
+                <a:spcPct val="100000"/>
+              </a:lnSpc>
+              <a:buNone/>
+            </a:pPr>
+            <a:r>
+              <a:rPr b="0" lang="en-US" sz="2200" spc="-1" strike="noStrike">
+                <a:solidFill>
+                  <a:srgbClr val="000000"/>
+                </a:solidFill>
+                <a:latin typeface="Arial"/>
+                <a:ea typeface="DejaVu Sans"/>
+              </a:rPr>
+              <a:t>When you change hyperparameters slightly, the results change drastically</a:t>
+            </a:r>
+            <a:endParaRPr b="0" lang="en-US" sz="2200" spc="-1" strike="noStrike">
+              <a:latin typeface="Arial"/>
+            </a:endParaRPr>
+          </a:p>
+          <a:p>
+            <a:pPr>
+              <a:lnSpc>
+                <a:spcPct val="100000"/>
+              </a:lnSpc>
+              <a:buNone/>
+            </a:pPr>
+            <a:endParaRPr b="0" lang="en-US" sz="2200" spc="-1" strike="noStrike">
+              <a:latin typeface="Arial"/>
+            </a:endParaRPr>
+          </a:p>
+          <a:p>
+            <a:pPr>
+              <a:lnSpc>
+                <a:spcPct val="100000"/>
+              </a:lnSpc>
+              <a:buNone/>
+            </a:pPr>
+            <a:r>
+              <a:rPr b="1" lang="en-US" sz="2200" spc="-1" strike="noStrike">
+                <a:solidFill>
+                  <a:srgbClr val="000000"/>
+                </a:solidFill>
+                <a:latin typeface="Arial"/>
+                <a:ea typeface="DejaVu Sans"/>
+              </a:rPr>
+              <a:t>Q: Why is my model so unstable?</a:t>
+            </a:r>
+            <a:endParaRPr b="0" lang="en-US" sz="2200" spc="-1" strike="noStrike">
+              <a:latin typeface="Arial"/>
+            </a:endParaRPr>
+          </a:p>
+          <a:p>
+            <a:pPr>
+              <a:lnSpc>
+                <a:spcPct val="100000"/>
+              </a:lnSpc>
+              <a:buNone/>
+            </a:pPr>
+            <a:endParaRPr b="0" lang="en-US" sz="2200" spc="-1" strike="noStrike">
+              <a:latin typeface="Arial"/>
+            </a:endParaRPr>
+          </a:p>
+          <a:p>
+            <a:pPr>
+              <a:lnSpc>
+                <a:spcPct val="100000"/>
+              </a:lnSpc>
+              <a:buNone/>
+            </a:pPr>
+            <a:r>
+              <a:rPr b="0" lang="en-US" sz="2200" spc="-1" strike="noStrike">
+                <a:solidFill>
+                  <a:srgbClr val="000000"/>
+                </a:solidFill>
+                <a:latin typeface="Arial"/>
+                <a:ea typeface="DejaVu Sans"/>
+              </a:rPr>
+              <a:t>While we tune models for better performance,</a:t>
+            </a:r>
+            <a:endParaRPr b="0" lang="en-US" sz="2200" spc="-1" strike="noStrike">
+              <a:latin typeface="Arial"/>
+            </a:endParaRPr>
+          </a:p>
+          <a:p>
+            <a:pPr>
+              <a:lnSpc>
+                <a:spcPct val="100000"/>
+              </a:lnSpc>
+              <a:buNone/>
+            </a:pPr>
+            <a:r>
+              <a:rPr b="0" lang="en-US" sz="2200" spc="-1" strike="noStrike">
+                <a:solidFill>
+                  <a:srgbClr val="000000"/>
+                </a:solidFill>
+                <a:latin typeface="Arial"/>
+                <a:ea typeface="DejaVu Sans"/>
+              </a:rPr>
+              <a:t>a drastic change in output is not desirable</a:t>
+            </a:r>
+            <a:endParaRPr b="0" lang="en-US" sz="2200" spc="-1" strike="noStrike">
+              <a:latin typeface="Arial"/>
+            </a:endParaRPr>
+          </a:p>
+          <a:p>
+            <a:pPr>
+              <a:lnSpc>
+                <a:spcPct val="100000"/>
+              </a:lnSpc>
+              <a:buNone/>
+            </a:pPr>
+            <a:endParaRPr b="0" lang="en-US" sz="2200" spc="-1" strike="noStrike">
+              <a:latin typeface="Arial"/>
+            </a:endParaRPr>
+          </a:p>
+          <a:p>
+            <a:pPr>
+              <a:lnSpc>
+                <a:spcPct val="100000"/>
+              </a:lnSpc>
+              <a:buNone/>
+            </a:pPr>
+            <a:r>
+              <a:rPr b="0" lang="en-US" sz="2200" spc="-1" strike="noStrike">
+                <a:solidFill>
+                  <a:srgbClr val="000000"/>
+                </a:solidFill>
+                <a:latin typeface="Arial"/>
+                <a:ea typeface="DejaVu Sans"/>
+              </a:rPr>
+              <a:t>&gt; The model may be too complex</a:t>
+            </a:r>
+            <a:endParaRPr b="0" lang="en-US" sz="2200" spc="-1" strike="noStrike">
+              <a:latin typeface="Arial"/>
+            </a:endParaRPr>
+          </a:p>
+          <a:p>
+            <a:pPr>
+              <a:lnSpc>
+                <a:spcPct val="100000"/>
+              </a:lnSpc>
+              <a:buNone/>
+            </a:pPr>
+            <a:r>
+              <a:rPr b="0" lang="en-US" sz="2200" spc="-1" strike="noStrike">
+                <a:solidFill>
+                  <a:srgbClr val="000000"/>
+                </a:solidFill>
+                <a:latin typeface="Arial"/>
+                <a:ea typeface="DejaVu Sans"/>
+              </a:rPr>
+              <a:t>Can try simpler model and examine sensitivity</a:t>
+            </a:r>
+            <a:endParaRPr b="0" lang="en-US" sz="2200" spc="-1" strike="noStrike">
+              <a:latin typeface="Arial"/>
+            </a:endParaRPr>
+          </a:p>
+          <a:p>
+            <a:pPr>
+              <a:lnSpc>
+                <a:spcPct val="100000"/>
+              </a:lnSpc>
+              <a:buNone/>
+            </a:pPr>
+            <a:endParaRPr b="0" lang="en-US" sz="2200" spc="-1" strike="noStrike">
+              <a:latin typeface="Arial"/>
+            </a:endParaRPr>
+          </a:p>
+          <a:p>
+            <a:pPr>
+              <a:lnSpc>
+                <a:spcPct val="100000"/>
+              </a:lnSpc>
+              <a:buNone/>
+            </a:pPr>
+            <a:r>
+              <a:rPr b="0" lang="en-US" sz="2200" spc="-1" strike="noStrike">
+                <a:solidFill>
+                  <a:srgbClr val="000000"/>
+                </a:solidFill>
+                <a:latin typeface="Arial"/>
+                <a:ea typeface="DejaVu Sans"/>
+              </a:rPr>
+              <a:t>&gt; Did you cross validate the model? This is a good practice when feasible</a:t>
+            </a:r>
+            <a:endParaRPr b="0" lang="en-US" sz="2200" spc="-1" strike="noStrike">
+              <a:latin typeface="Arial"/>
+            </a:endParaRPr>
+          </a:p>
+        </p:txBody>
+      </p:sp>
+    </p:spTree>
+  </p:cSld>
+  <mc:AlternateContent>
+    <mc:Choice Requires="p14">
+      <p:transition spd="slow" p14:dur="2000"/>
+    </mc:Choice>
+    <mc:Fallback>
+      <p:transition spd="slow"/>
+    </mc:Fallback>
+  </mc:AlternateContent>
+</p:sld>
+</file>
+
+<file path=ppt/slides/slide15.xml><?xml version="1.0" encoding="utf-8"?>
+<p:sld xmlns:a="http://schemas.openxmlformats.org/drawingml/2006/main" xmlns:p="http://schemas.openxmlformats.org/presentationml/2006/main" xmlns:r="http://schemas.openxmlformats.org/officeDocument/2006/relationships" xmlns:p14="http://schemas.microsoft.com/office/powerpoint/2010/main" xmlns:p15="http://schemas.microsoft.com/office/powerpoint/2012/main" xmlns:mc="http://schemas.openxmlformats.org/markup-compatibility/2006">
+  <p:cSld>
+    <p:spTree>
+      <p:nvGrpSpPr>
+        <p:cNvPr id="1" name=""/>
+        <p:cNvGrpSpPr/>
+        <p:nvPr/>
+      </p:nvGrpSpPr>
+      <p:grpSpPr>
+        <a:xfrm>
+          <a:off x="0" y="0"/>
+          <a:ext cx="0" cy="0"/>
+          <a:chOff x="0" y="0"/>
+          <a:chExt cx="0" cy="0"/>
+        </a:xfrm>
+      </p:grpSpPr>
+      <p:sp>
+        <p:nvSpPr>
           <p:cNvPr id="209" name=""/>
           <p:cNvSpPr/>
           <p:nvPr/>
         </p:nvSpPr>
         <p:spPr>
           <a:xfrm>
+            <a:off x="428760" y="71640"/>
+            <a:ext cx="10084680" cy="538920"/>
+          </a:xfrm>
+          <a:prstGeom prst="rect">
+            <a:avLst/>
+          </a:prstGeom>
+          <a:noFill/>
+          <a:ln w="0">
+            <a:noFill/>
+          </a:ln>
+        </p:spPr>
+        <p:style>
+          <a:lnRef idx="0"/>
+          <a:fillRef idx="0"/>
+          <a:effectRef idx="0"/>
+          <a:fontRef idx="minor"/>
+        </p:style>
+        <p:txBody>
+          <a:bodyPr lIns="90000" rIns="90000" tIns="45000" bIns="45000" anchor="t">
+            <a:noAutofit/>
+          </a:bodyPr>
+          <a:p>
+            <a:pPr>
+              <a:lnSpc>
+                <a:spcPct val="100000"/>
+              </a:lnSpc>
+              <a:buNone/>
+            </a:pPr>
+            <a:r>
+              <a:rPr b="0" lang="en-US" sz="3200" spc="-1" strike="noStrike">
+                <a:solidFill>
+                  <a:srgbClr val="ffffff"/>
+                </a:solidFill>
+                <a:latin typeface="Times New Roman"/>
+                <a:ea typeface="DejaVu Sans"/>
+              </a:rPr>
+              <a:t>Sponsor Unsure how to use Deliverables</a:t>
+            </a:r>
+            <a:endParaRPr b="0" lang="en-US" sz="3200" spc="-1" strike="noStrike">
+              <a:latin typeface="Arial"/>
+            </a:endParaRPr>
+          </a:p>
+        </p:txBody>
+      </p:sp>
+      <p:sp>
+        <p:nvSpPr>
+          <p:cNvPr id="210" name=""/>
+          <p:cNvSpPr/>
+          <p:nvPr/>
+        </p:nvSpPr>
+        <p:spPr>
+          <a:xfrm>
+            <a:off x="457200" y="2057400"/>
+            <a:ext cx="4340160" cy="343080"/>
+          </a:xfrm>
+          <a:prstGeom prst="rect">
+            <a:avLst/>
+          </a:prstGeom>
+          <a:noFill/>
+          <a:ln w="0">
+            <a:noFill/>
+          </a:ln>
+        </p:spPr>
+        <p:style>
+          <a:lnRef idx="0"/>
+          <a:fillRef idx="0"/>
+          <a:effectRef idx="0"/>
+          <a:fontRef idx="minor"/>
+        </p:style>
+      </p:sp>
+      <p:sp>
+        <p:nvSpPr>
+          <p:cNvPr id="211" name=""/>
+          <p:cNvSpPr/>
+          <p:nvPr/>
+        </p:nvSpPr>
+        <p:spPr>
+          <a:xfrm>
             <a:off x="457200" y="1277640"/>
-            <a:ext cx="10512720" cy="3485880"/>
+            <a:ext cx="10512360" cy="3485520"/>
+          </a:xfrm>
+          <a:prstGeom prst="rect">
+            <a:avLst/>
+          </a:prstGeom>
+          <a:noFill/>
+          <a:ln w="0">
+            <a:noFill/>
+          </a:ln>
+        </p:spPr>
+        <p:style>
+          <a:lnRef idx="0"/>
+          <a:fillRef idx="0"/>
+          <a:effectRef idx="0"/>
+          <a:fontRef idx="minor"/>
+        </p:style>
+        <p:txBody>
+          <a:bodyPr lIns="90000" rIns="90000" tIns="45000" bIns="45000" anchor="t">
+            <a:noAutofit/>
+          </a:bodyPr>
+          <a:p>
+            <a:pPr>
+              <a:lnSpc>
+                <a:spcPct val="100000"/>
+              </a:lnSpc>
+              <a:buNone/>
+            </a:pPr>
+            <a:endParaRPr b="0" lang="en-US" sz="2200" spc="-1" strike="noStrike">
+              <a:latin typeface="Arial"/>
+            </a:endParaRPr>
+          </a:p>
+          <a:p>
+            <a:pPr>
+              <a:lnSpc>
+                <a:spcPct val="100000"/>
+              </a:lnSpc>
+              <a:buNone/>
+            </a:pPr>
+            <a:endParaRPr b="0" lang="en-US" sz="2200" spc="-1" strike="noStrike">
+              <a:latin typeface="Arial"/>
+            </a:endParaRPr>
+          </a:p>
+          <a:p>
+            <a:pPr>
+              <a:lnSpc>
+                <a:spcPct val="100000"/>
+              </a:lnSpc>
+              <a:buNone/>
+            </a:pPr>
+            <a:r>
+              <a:rPr b="1" lang="en-US" sz="2200" spc="-1" strike="noStrike">
+                <a:solidFill>
+                  <a:srgbClr val="000000"/>
+                </a:solidFill>
+                <a:latin typeface="Arial"/>
+                <a:ea typeface="DejaVu Sans"/>
+              </a:rPr>
+              <a:t>Q: What if the sponsor is unsure how to use the deliverables?</a:t>
+            </a:r>
+            <a:endParaRPr b="0" lang="en-US" sz="2200" spc="-1" strike="noStrike">
+              <a:latin typeface="Arial"/>
+            </a:endParaRPr>
+          </a:p>
+          <a:p>
+            <a:pPr>
+              <a:lnSpc>
+                <a:spcPct val="100000"/>
+              </a:lnSpc>
+              <a:buNone/>
+            </a:pPr>
+            <a:endParaRPr b="0" lang="en-US" sz="2200" spc="-1" strike="noStrike">
+              <a:latin typeface="Arial"/>
+            </a:endParaRPr>
+          </a:p>
+          <a:p>
+            <a:pPr>
+              <a:lnSpc>
+                <a:spcPct val="100000"/>
+              </a:lnSpc>
+              <a:buNone/>
+            </a:pPr>
+            <a:r>
+              <a:rPr b="0" lang="en-US" sz="2200" spc="-1" strike="noStrike">
+                <a:solidFill>
+                  <a:srgbClr val="000000"/>
+                </a:solidFill>
+                <a:latin typeface="Arial"/>
+                <a:ea typeface="DejaVu Sans"/>
+              </a:rPr>
+              <a:t>&gt; Share work early and often. Avoid dropping everything on them at the end.</a:t>
+            </a:r>
+            <a:endParaRPr b="0" lang="en-US" sz="2200" spc="-1" strike="noStrike">
+              <a:latin typeface="Arial"/>
+            </a:endParaRPr>
+          </a:p>
+          <a:p>
+            <a:pPr>
+              <a:lnSpc>
+                <a:spcPct val="100000"/>
+              </a:lnSpc>
+              <a:buNone/>
+            </a:pPr>
+            <a:endParaRPr b="0" lang="en-US" sz="2200" spc="-1" strike="noStrike">
+              <a:latin typeface="Arial"/>
+            </a:endParaRPr>
+          </a:p>
+          <a:p>
+            <a:pPr>
+              <a:lnSpc>
+                <a:spcPct val="100000"/>
+              </a:lnSpc>
+              <a:buNone/>
+            </a:pPr>
+            <a:r>
+              <a:rPr b="0" lang="en-US" sz="2200" spc="-1" strike="noStrike">
+                <a:solidFill>
+                  <a:srgbClr val="000000"/>
+                </a:solidFill>
+                <a:latin typeface="Arial"/>
+                <a:ea typeface="DejaVu Sans"/>
+              </a:rPr>
+              <a:t>&gt; Leave time at the end to walk sponsor through deliverables</a:t>
+            </a:r>
+            <a:endParaRPr b="0" lang="en-US" sz="2200" spc="-1" strike="noStrike">
+              <a:latin typeface="Arial"/>
+            </a:endParaRPr>
+          </a:p>
+          <a:p>
+            <a:pPr>
+              <a:lnSpc>
+                <a:spcPct val="100000"/>
+              </a:lnSpc>
+              <a:buNone/>
+            </a:pPr>
+            <a:endParaRPr b="0" lang="en-US" sz="2200" spc="-1" strike="noStrike">
+              <a:latin typeface="Arial"/>
+            </a:endParaRPr>
+          </a:p>
+          <a:p>
+            <a:pPr>
+              <a:lnSpc>
+                <a:spcPct val="100000"/>
+              </a:lnSpc>
+              <a:buNone/>
+            </a:pPr>
+            <a:r>
+              <a:rPr b="0" lang="en-US" sz="2200" spc="-1" strike="noStrike">
+                <a:solidFill>
+                  <a:srgbClr val="000000"/>
+                </a:solidFill>
+                <a:latin typeface="Arial"/>
+                <a:ea typeface="DejaVu Sans"/>
+              </a:rPr>
+              <a:t>&gt; Have a meeting where sponsor team runs the code</a:t>
+            </a:r>
+            <a:endParaRPr b="0" lang="en-US" sz="2200" spc="-1" strike="noStrike">
+              <a:latin typeface="Arial"/>
+            </a:endParaRPr>
+          </a:p>
+          <a:p>
+            <a:pPr>
+              <a:lnSpc>
+                <a:spcPct val="100000"/>
+              </a:lnSpc>
+              <a:buNone/>
+            </a:pPr>
+            <a:endParaRPr b="0" lang="en-US" sz="2200" spc="-1" strike="noStrike">
+              <a:latin typeface="Arial"/>
+            </a:endParaRPr>
+          </a:p>
+          <a:p>
+            <a:pPr>
+              <a:lnSpc>
+                <a:spcPct val="100000"/>
+              </a:lnSpc>
+              <a:buNone/>
+            </a:pPr>
+            <a:r>
+              <a:rPr b="0" lang="en-US" sz="2200" spc="-1" strike="noStrike">
+                <a:solidFill>
+                  <a:srgbClr val="000000"/>
+                </a:solidFill>
+                <a:latin typeface="Arial"/>
+                <a:ea typeface="DejaVu Sans"/>
+              </a:rPr>
+              <a:t>&gt; Clearly document the work / code. A README file can be very effective.</a:t>
+            </a:r>
+            <a:br>
+              <a:rPr sz="2200"/>
+            </a:br>
+            <a:r>
+              <a:rPr b="0" lang="en-US" sz="2200" spc="-1" strike="noStrike">
+                <a:solidFill>
+                  <a:srgbClr val="000000"/>
+                </a:solidFill>
+                <a:latin typeface="Arial"/>
+                <a:ea typeface="DejaVu Sans"/>
+              </a:rPr>
+              <a:t>It can include objective, main functionality.</a:t>
+            </a:r>
+            <a:endParaRPr b="0" lang="en-US" sz="2200" spc="-1" strike="noStrike">
+              <a:latin typeface="Arial"/>
+            </a:endParaRPr>
+          </a:p>
+          <a:p>
+            <a:pPr>
+              <a:lnSpc>
+                <a:spcPct val="100000"/>
+              </a:lnSpc>
+              <a:buNone/>
+            </a:pPr>
+            <a:endParaRPr b="0" lang="en-US" sz="2200" spc="-1" strike="noStrike">
+              <a:latin typeface="Arial"/>
+            </a:endParaRPr>
+          </a:p>
+          <a:p>
+            <a:pPr>
+              <a:lnSpc>
+                <a:spcPct val="100000"/>
+              </a:lnSpc>
+              <a:buNone/>
+            </a:pPr>
+            <a:endParaRPr b="0" lang="en-US" sz="2200" spc="-1" strike="noStrike">
+              <a:latin typeface="Arial"/>
+            </a:endParaRPr>
+          </a:p>
+          <a:p>
+            <a:pPr>
+              <a:lnSpc>
+                <a:spcPct val="100000"/>
+              </a:lnSpc>
+              <a:buNone/>
+            </a:pPr>
+            <a:endParaRPr b="0" lang="en-US" sz="2200" spc="-1" strike="noStrike">
+              <a:latin typeface="Arial"/>
+            </a:endParaRPr>
+          </a:p>
+        </p:txBody>
+      </p:sp>
+    </p:spTree>
+  </p:cSld>
+  <mc:AlternateContent>
+    <mc:Choice Requires="p14">
+      <p:transition spd="slow" p14:dur="2000"/>
+    </mc:Choice>
+    <mc:Fallback>
+      <p:transition spd="slow"/>
+    </mc:Fallback>
+  </mc:AlternateContent>
+</p:sld>
+</file>
+
+<file path=ppt/slides/slide16.xml><?xml version="1.0" encoding="utf-8"?>
+<p:sld xmlns:a="http://schemas.openxmlformats.org/drawingml/2006/main" xmlns:p="http://schemas.openxmlformats.org/presentationml/2006/main" xmlns:r="http://schemas.openxmlformats.org/officeDocument/2006/relationships" xmlns:p14="http://schemas.microsoft.com/office/powerpoint/2010/main" xmlns:p15="http://schemas.microsoft.com/office/powerpoint/2012/main" xmlns:mc="http://schemas.openxmlformats.org/markup-compatibility/2006">
+  <p:cSld>
+    <p:spTree>
+      <p:nvGrpSpPr>
+        <p:cNvPr id="1" name=""/>
+        <p:cNvGrpSpPr/>
+        <p:nvPr/>
+      </p:nvGrpSpPr>
+      <p:grpSpPr>
+        <a:xfrm>
+          <a:off x="0" y="0"/>
+          <a:ext cx="0" cy="0"/>
+          <a:chOff x="0" y="0"/>
+          <a:chExt cx="0" cy="0"/>
+        </a:xfrm>
+      </p:grpSpPr>
+      <p:sp>
+        <p:nvSpPr>
+          <p:cNvPr id="212" name=""/>
+          <p:cNvSpPr/>
+          <p:nvPr/>
+        </p:nvSpPr>
+        <p:spPr>
+          <a:xfrm>
+            <a:off x="428760" y="71640"/>
+            <a:ext cx="10084680" cy="538920"/>
+          </a:xfrm>
+          <a:prstGeom prst="rect">
+            <a:avLst/>
+          </a:prstGeom>
+          <a:noFill/>
+          <a:ln w="0">
+            <a:noFill/>
+          </a:ln>
+        </p:spPr>
+        <p:style>
+          <a:lnRef idx="0"/>
+          <a:fillRef idx="0"/>
+          <a:effectRef idx="0"/>
+          <a:fontRef idx="minor"/>
+        </p:style>
+        <p:txBody>
+          <a:bodyPr lIns="90000" rIns="90000" tIns="45000" bIns="45000" anchor="t">
+            <a:noAutofit/>
+          </a:bodyPr>
+          <a:p>
+            <a:pPr>
+              <a:lnSpc>
+                <a:spcPct val="100000"/>
+              </a:lnSpc>
+              <a:buNone/>
+            </a:pPr>
+            <a:r>
+              <a:rPr b="0" lang="en-US" sz="3200" spc="-1" strike="noStrike">
+                <a:solidFill>
+                  <a:srgbClr val="ffffff"/>
+                </a:solidFill>
+                <a:latin typeface="Times New Roman"/>
+                <a:ea typeface="DejaVu Sans"/>
+              </a:rPr>
+              <a:t>Final Thoughts</a:t>
+            </a:r>
+            <a:endParaRPr b="0" lang="en-US" sz="3200" spc="-1" strike="noStrike">
+              <a:latin typeface="Arial"/>
+            </a:endParaRPr>
+          </a:p>
+        </p:txBody>
+      </p:sp>
+      <p:sp>
+        <p:nvSpPr>
+          <p:cNvPr id="213" name=""/>
+          <p:cNvSpPr/>
+          <p:nvPr/>
+        </p:nvSpPr>
+        <p:spPr>
+          <a:xfrm>
+            <a:off x="457200" y="2057400"/>
+            <a:ext cx="4340160" cy="343080"/>
+          </a:xfrm>
+          <a:prstGeom prst="rect">
+            <a:avLst/>
+          </a:prstGeom>
+          <a:noFill/>
+          <a:ln w="0">
+            <a:noFill/>
+          </a:ln>
+        </p:spPr>
+        <p:style>
+          <a:lnRef idx="0"/>
+          <a:fillRef idx="0"/>
+          <a:effectRef idx="0"/>
+          <a:fontRef idx="minor"/>
+        </p:style>
+      </p:sp>
+      <p:sp>
+        <p:nvSpPr>
+          <p:cNvPr id="214" name=""/>
+          <p:cNvSpPr/>
+          <p:nvPr/>
+        </p:nvSpPr>
+        <p:spPr>
+          <a:xfrm>
+            <a:off x="457200" y="1277640"/>
+            <a:ext cx="10512360" cy="3485520"/>
           </a:xfrm>
           <a:prstGeom prst="rect">
             <a:avLst/>
@@ -11313,14 +11586,14 @@
       </p:grpSpPr>
       <p:sp>
         <p:nvSpPr>
-          <p:cNvPr id="172" name=""/>
+          <p:cNvPr id="171" name=""/>
           <p:cNvSpPr/>
           <p:nvPr/>
         </p:nvSpPr>
         <p:spPr>
           <a:xfrm>
             <a:off x="428760" y="2807640"/>
-            <a:ext cx="11228040" cy="539280"/>
+            <a:ext cx="11227680" cy="538920"/>
           </a:xfrm>
           <a:prstGeom prst="rect">
             <a:avLst/>
@@ -11430,14 +11703,14 @@
       </p:sp>
       <p:sp>
         <p:nvSpPr>
-          <p:cNvPr id="173" name=""/>
+          <p:cNvPr id="172" name=""/>
           <p:cNvSpPr/>
           <p:nvPr/>
         </p:nvSpPr>
         <p:spPr>
           <a:xfrm>
             <a:off x="457200" y="2057400"/>
-            <a:ext cx="4340520" cy="343440"/>
+            <a:ext cx="4340160" cy="343080"/>
           </a:xfrm>
           <a:prstGeom prst="rect">
             <a:avLst/>
@@ -11486,14 +11759,14 @@
       </p:grpSpPr>
       <p:sp>
         <p:nvSpPr>
-          <p:cNvPr id="174" name=""/>
+          <p:cNvPr id="173" name=""/>
           <p:cNvSpPr/>
           <p:nvPr/>
         </p:nvSpPr>
         <p:spPr>
           <a:xfrm>
             <a:off x="428760" y="71640"/>
-            <a:ext cx="10085040" cy="539280"/>
+            <a:ext cx="10084680" cy="538920"/>
           </a:xfrm>
           <a:prstGeom prst="rect">
             <a:avLst/>
@@ -11528,7 +11801,7 @@
                 <a:latin typeface="Times New Roman"/>
                 <a:ea typeface="DejaVu Sans"/>
               </a:rPr>
-              <a:t>Not Enough Time</a:t>
+              <a:t>Table of Contents</a:t>
             </a:r>
             <a:endParaRPr b="0" lang="en-US" sz="3200" spc="-1" strike="noStrike">
               <a:latin typeface="Arial"/>
@@ -11538,14 +11811,14 @@
       </p:sp>
       <p:sp>
         <p:nvSpPr>
-          <p:cNvPr id="175" name=""/>
+          <p:cNvPr id="174" name=""/>
           <p:cNvSpPr/>
           <p:nvPr/>
         </p:nvSpPr>
         <p:spPr>
           <a:xfrm>
             <a:off x="457200" y="2057400"/>
-            <a:ext cx="4340520" cy="343440"/>
+            <a:ext cx="4340160" cy="343080"/>
           </a:xfrm>
           <a:prstGeom prst="rect">
             <a:avLst/>
@@ -11564,14 +11837,14 @@
       </p:sp>
       <p:sp>
         <p:nvSpPr>
-          <p:cNvPr id="176" name=""/>
+          <p:cNvPr id="175" name=""/>
           <p:cNvSpPr/>
           <p:nvPr/>
         </p:nvSpPr>
         <p:spPr>
           <a:xfrm>
-            <a:off x="457200" y="1277640"/>
-            <a:ext cx="10512720" cy="3485880"/>
+            <a:off x="457200" y="1133640"/>
+            <a:ext cx="10512360" cy="3485520"/>
           </a:xfrm>
           <a:prstGeom prst="rect">
             <a:avLst/>
@@ -11599,17 +11872,9 @@
               <a:buNone/>
             </a:pPr>
             <a:endParaRPr b="0" lang="en-US" sz="2200" spc="-1" strike="noStrike">
-              <a:latin typeface="Arial"/>
-            </a:endParaRPr>
-          </a:p>
-          <a:p>
-            <a:pPr>
-              <a:lnSpc>
-                <a:spcPct val="100000"/>
-              </a:lnSpc>
-              <a:buNone/>
-            </a:pPr>
-            <a:endParaRPr b="0" lang="en-US" sz="2200" spc="-1" strike="noStrike">
+              <a:solidFill>
+                <a:srgbClr val="000000"/>
+              </a:solidFill>
               <a:latin typeface="Arial"/>
             </a:endParaRPr>
           </a:p>
@@ -11628,20 +11893,12 @@
                 <a:latin typeface="Arial"/>
                 <a:ea typeface="DejaVu Sans"/>
               </a:rPr>
-              <a:t>Q: What if there isn’t enough time to complete capstone?</a:t>
+              <a:t>Troubleshooting Topics:</a:t>
             </a:r>
             <a:endParaRPr b="0" lang="en-US" sz="2200" spc="-1" strike="noStrike">
-              <a:latin typeface="Arial"/>
-            </a:endParaRPr>
-          </a:p>
-          <a:p>
-            <a:pPr>
-              <a:lnSpc>
-                <a:spcPct val="100000"/>
-              </a:lnSpc>
-              <a:buNone/>
-            </a:pPr>
-            <a:endParaRPr b="0" lang="en-US" sz="2200" spc="-1" strike="noStrike">
+              <a:solidFill>
+                <a:srgbClr val="000000"/>
+              </a:solidFill>
               <a:latin typeface="Arial"/>
             </a:endParaRPr>
           </a:p>
@@ -11660,20 +11917,12 @@
                 <a:latin typeface="Arial"/>
                 <a:ea typeface="DejaVu Sans"/>
               </a:rPr>
-              <a:t>&gt; Capstone projects are generally scoped to fit</a:t>
+              <a:t>&gt; Not Enough Time</a:t>
             </a:r>
             <a:endParaRPr b="0" lang="en-US" sz="2200" spc="-1" strike="noStrike">
-              <a:latin typeface="Arial"/>
-            </a:endParaRPr>
-          </a:p>
-          <a:p>
-            <a:pPr>
-              <a:lnSpc>
-                <a:spcPct val="100000"/>
-              </a:lnSpc>
-              <a:buNone/>
-            </a:pPr>
-            <a:endParaRPr b="0" lang="en-US" sz="2200" spc="-1" strike="noStrike">
+              <a:solidFill>
+                <a:srgbClr val="000000"/>
+              </a:solidFill>
               <a:latin typeface="Arial"/>
             </a:endParaRPr>
           </a:p>
@@ -11692,33 +11941,12 @@
                 <a:latin typeface="Arial"/>
                 <a:ea typeface="DejaVu Sans"/>
               </a:rPr>
-              <a:t>&gt; Projects kick off the term before to allow for onboarding and discovery. </a:t>
-            </a:r>
-            <a:br>
-              <a:rPr sz="2200"/>
-            </a:br>
-            <a:r>
-              <a:rPr b="1" lang="en-US" sz="2200" spc="-1" strike="noStrike">
-                <a:solidFill>
-                  <a:srgbClr val="000000"/>
-                </a:solidFill>
-                <a:latin typeface="Arial"/>
-                <a:ea typeface="DejaVu Sans"/>
-              </a:rPr>
-              <a:t>Teams that use this time wisely tend to do better.</a:t>
+              <a:t>&gt; Unclear Problem Definition</a:t>
             </a:r>
             <a:endParaRPr b="0" lang="en-US" sz="2200" spc="-1" strike="noStrike">
-              <a:latin typeface="Arial"/>
-            </a:endParaRPr>
-          </a:p>
-          <a:p>
-            <a:pPr>
-              <a:lnSpc>
-                <a:spcPct val="100000"/>
-              </a:lnSpc>
-              <a:buNone/>
-            </a:pPr>
-            <a:endParaRPr b="0" lang="en-US" sz="2200" spc="-1" strike="noStrike">
+              <a:solidFill>
+                <a:srgbClr val="000000"/>
+              </a:solidFill>
               <a:latin typeface="Arial"/>
             </a:endParaRPr>
           </a:p>
@@ -11737,11 +11965,22 @@
                 <a:latin typeface="Arial"/>
                 <a:ea typeface="DejaVu Sans"/>
               </a:rPr>
-              <a:t>&gt; If you are waiting on feedback, data, etc., stay productive. </a:t>
-            </a:r>
-            <a:br>
-              <a:rPr sz="2200"/>
-            </a:br>
+              <a:t>&gt; Lack of Data</a:t>
+            </a:r>
+            <a:endParaRPr b="0" lang="en-US" sz="2200" spc="-1" strike="noStrike">
+              <a:solidFill>
+                <a:srgbClr val="000000"/>
+              </a:solidFill>
+              <a:latin typeface="Arial"/>
+            </a:endParaRPr>
+          </a:p>
+          <a:p>
+            <a:pPr>
+              <a:lnSpc>
+                <a:spcPct val="100000"/>
+              </a:lnSpc>
+              <a:buNone/>
+            </a:pPr>
             <a:r>
               <a:rPr b="0" lang="en-US" sz="2200" spc="-1" strike="noStrike">
                 <a:solidFill>
@@ -11750,20 +11989,12 @@
                 <a:latin typeface="Arial"/>
                 <a:ea typeface="DejaVu Sans"/>
               </a:rPr>
-              <a:t>What else can be done?</a:t>
+              <a:t>&gt; Meetings not Productive Enough</a:t>
             </a:r>
             <a:endParaRPr b="0" lang="en-US" sz="2200" spc="-1" strike="noStrike">
-              <a:latin typeface="Arial"/>
-            </a:endParaRPr>
-          </a:p>
-          <a:p>
-            <a:pPr>
-              <a:lnSpc>
-                <a:spcPct val="100000"/>
-              </a:lnSpc>
-              <a:buNone/>
-            </a:pPr>
-            <a:endParaRPr b="0" lang="en-US" sz="2200" spc="-1" strike="noStrike">
+              <a:solidFill>
+                <a:srgbClr val="000000"/>
+              </a:solidFill>
               <a:latin typeface="Arial"/>
             </a:endParaRPr>
           </a:p>
@@ -11782,31 +12013,160 @@
                 <a:latin typeface="Arial"/>
                 <a:ea typeface="DejaVu Sans"/>
               </a:rPr>
-              <a:t>&gt; Share the work across students</a:t>
+              <a:t>&gt; High Workload</a:t>
             </a:r>
             <a:endParaRPr b="0" lang="en-US" sz="2200" spc="-1" strike="noStrike">
-              <a:latin typeface="Arial"/>
-            </a:endParaRPr>
-          </a:p>
-          <a:p>
-            <a:pPr>
-              <a:lnSpc>
-                <a:spcPct val="100000"/>
-              </a:lnSpc>
-              <a:buNone/>
-            </a:pPr>
+              <a:solidFill>
+                <a:srgbClr val="000000"/>
+              </a:solidFill>
+              <a:latin typeface="Arial"/>
+            </a:endParaRPr>
+          </a:p>
+          <a:p>
+            <a:pPr>
+              <a:lnSpc>
+                <a:spcPct val="100000"/>
+              </a:lnSpc>
+              <a:buNone/>
+            </a:pPr>
+            <a:r>
+              <a:rPr b="0" lang="en-US" sz="2200" spc="-1" strike="noStrike">
+                <a:solidFill>
+                  <a:srgbClr val="000000"/>
+                </a:solidFill>
+                <a:latin typeface="Arial"/>
+                <a:ea typeface="DejaVu Sans"/>
+              </a:rPr>
+              <a:t>&gt; Lacking Skills</a:t>
+            </a:r>
             <a:endParaRPr b="0" lang="en-US" sz="2200" spc="-1" strike="noStrike">
-              <a:latin typeface="Arial"/>
-            </a:endParaRPr>
-          </a:p>
-          <a:p>
-            <a:pPr>
-              <a:lnSpc>
-                <a:spcPct val="100000"/>
-              </a:lnSpc>
-              <a:buNone/>
-            </a:pPr>
+              <a:solidFill>
+                <a:srgbClr val="000000"/>
+              </a:solidFill>
+              <a:latin typeface="Arial"/>
+            </a:endParaRPr>
+          </a:p>
+          <a:p>
+            <a:pPr>
+              <a:lnSpc>
+                <a:spcPct val="100000"/>
+              </a:lnSpc>
+              <a:buNone/>
+            </a:pPr>
+            <a:r>
+              <a:rPr b="0" lang="en-US" sz="2200" spc="-1" strike="noStrike">
+                <a:solidFill>
+                  <a:srgbClr val="000000"/>
+                </a:solidFill>
+                <a:latin typeface="Arial"/>
+                <a:ea typeface="DejaVu Sans"/>
+              </a:rPr>
+              <a:t>&gt; Feedback not Frequent Enough</a:t>
+            </a:r>
             <a:endParaRPr b="0" lang="en-US" sz="2200" spc="-1" strike="noStrike">
+              <a:solidFill>
+                <a:srgbClr val="000000"/>
+              </a:solidFill>
+              <a:latin typeface="Arial"/>
+            </a:endParaRPr>
+          </a:p>
+          <a:p>
+            <a:pPr>
+              <a:lnSpc>
+                <a:spcPct val="100000"/>
+              </a:lnSpc>
+              <a:buNone/>
+            </a:pPr>
+            <a:r>
+              <a:rPr b="0" lang="en-US" sz="2200" spc="-1" strike="noStrike">
+                <a:solidFill>
+                  <a:srgbClr val="000000"/>
+                </a:solidFill>
+                <a:latin typeface="Arial"/>
+                <a:ea typeface="DejaVu Sans"/>
+              </a:rPr>
+              <a:t>&gt; Model Doesn’t Generalize</a:t>
+            </a:r>
+            <a:endParaRPr b="0" lang="en-US" sz="2200" spc="-1" strike="noStrike">
+              <a:solidFill>
+                <a:srgbClr val="000000"/>
+              </a:solidFill>
+              <a:latin typeface="Arial"/>
+            </a:endParaRPr>
+          </a:p>
+          <a:p>
+            <a:pPr>
+              <a:lnSpc>
+                <a:spcPct val="100000"/>
+              </a:lnSpc>
+              <a:buNone/>
+            </a:pPr>
+            <a:r>
+              <a:rPr b="0" lang="en-US" sz="2200" spc="-1" strike="noStrike">
+                <a:solidFill>
+                  <a:srgbClr val="000000"/>
+                </a:solidFill>
+                <a:latin typeface="Arial"/>
+                <a:ea typeface="DejaVu Sans"/>
+              </a:rPr>
+              <a:t>&gt; Model is Unstable</a:t>
+            </a:r>
+            <a:endParaRPr b="0" lang="en-US" sz="2200" spc="-1" strike="noStrike">
+              <a:solidFill>
+                <a:srgbClr val="000000"/>
+              </a:solidFill>
+              <a:latin typeface="Arial"/>
+            </a:endParaRPr>
+          </a:p>
+          <a:p>
+            <a:pPr>
+              <a:lnSpc>
+                <a:spcPct val="100000"/>
+              </a:lnSpc>
+              <a:buNone/>
+            </a:pPr>
+            <a:r>
+              <a:rPr b="0" lang="en-US" sz="2200" spc="-1" strike="noStrike">
+                <a:solidFill>
+                  <a:srgbClr val="000000"/>
+                </a:solidFill>
+                <a:latin typeface="Arial"/>
+                <a:ea typeface="DejaVu Sans"/>
+              </a:rPr>
+              <a:t>&gt; Sponsor Unsure how to use Deliverables</a:t>
+            </a:r>
+            <a:endParaRPr b="0" lang="en-US" sz="2200" spc="-1" strike="noStrike">
+              <a:solidFill>
+                <a:srgbClr val="000000"/>
+              </a:solidFill>
+              <a:latin typeface="Arial"/>
+            </a:endParaRPr>
+          </a:p>
+          <a:p>
+            <a:pPr>
+              <a:lnSpc>
+                <a:spcPct val="100000"/>
+              </a:lnSpc>
+              <a:buNone/>
+            </a:pPr>
+            <a:endParaRPr b="0" lang="en-US" sz="2200" spc="-1" strike="noStrike">
+              <a:solidFill>
+                <a:srgbClr val="000000"/>
+              </a:solidFill>
+              <a:latin typeface="Arial"/>
+            </a:endParaRPr>
+          </a:p>
+          <a:p>
+            <a:pPr>
+              <a:lnSpc>
+                <a:spcPct val="100000"/>
+              </a:lnSpc>
+              <a:buNone/>
+            </a:pPr>
+            <a:endParaRPr b="0" lang="en-US" sz="2200" spc="-1" strike="noStrike">
+              <a:solidFill>
+                <a:srgbClr val="000000"/>
+              </a:solidFill>
               <a:latin typeface="Arial"/>
             </a:endParaRPr>
           </a:p>
@@ -11844,14 +12204,14 @@
       </p:grpSpPr>
       <p:sp>
         <p:nvSpPr>
-          <p:cNvPr id="177" name=""/>
+          <p:cNvPr id="176" name=""/>
           <p:cNvSpPr/>
           <p:nvPr/>
         </p:nvSpPr>
         <p:spPr>
           <a:xfrm>
             <a:off x="428760" y="71640"/>
-            <a:ext cx="10085040" cy="539280"/>
+            <a:ext cx="10084680" cy="538920"/>
           </a:xfrm>
           <a:prstGeom prst="rect">
             <a:avLst/>
@@ -11886,7 +12246,7 @@
                 <a:latin typeface="Times New Roman"/>
                 <a:ea typeface="DejaVu Sans"/>
               </a:rPr>
-              <a:t>Unclear Problem Definition</a:t>
+              <a:t>Not Enough Time</a:t>
             </a:r>
             <a:endParaRPr b="0" lang="en-US" sz="3200" spc="-1" strike="noStrike">
               <a:latin typeface="Arial"/>
@@ -11896,14 +12256,14 @@
       </p:sp>
       <p:sp>
         <p:nvSpPr>
-          <p:cNvPr id="178" name=""/>
+          <p:cNvPr id="177" name=""/>
           <p:cNvSpPr/>
           <p:nvPr/>
         </p:nvSpPr>
         <p:spPr>
           <a:xfrm>
             <a:off x="457200" y="2057400"/>
-            <a:ext cx="4340520" cy="343440"/>
+            <a:ext cx="4340160" cy="343080"/>
           </a:xfrm>
           <a:prstGeom prst="rect">
             <a:avLst/>
@@ -11922,14 +12282,14 @@
       </p:sp>
       <p:sp>
         <p:nvSpPr>
-          <p:cNvPr id="179" name=""/>
+          <p:cNvPr id="178" name=""/>
           <p:cNvSpPr/>
           <p:nvPr/>
         </p:nvSpPr>
         <p:spPr>
           <a:xfrm>
             <a:off x="457200" y="1277640"/>
-            <a:ext cx="10512720" cy="3485880"/>
+            <a:ext cx="10512360" cy="3485520"/>
           </a:xfrm>
           <a:prstGeom prst="rect">
             <a:avLst/>
@@ -11956,6 +12316,60 @@
               </a:lnSpc>
               <a:buNone/>
             </a:pPr>
+            <a:endParaRPr b="0" lang="en-US" sz="2200" spc="-1" strike="noStrike">
+              <a:latin typeface="Arial"/>
+            </a:endParaRPr>
+          </a:p>
+          <a:p>
+            <a:pPr>
+              <a:lnSpc>
+                <a:spcPct val="100000"/>
+              </a:lnSpc>
+              <a:buNone/>
+            </a:pPr>
+            <a:endParaRPr b="0" lang="en-US" sz="2200" spc="-1" strike="noStrike">
+              <a:latin typeface="Arial"/>
+            </a:endParaRPr>
+          </a:p>
+          <a:p>
+            <a:pPr>
+              <a:lnSpc>
+                <a:spcPct val="100000"/>
+              </a:lnSpc>
+              <a:buNone/>
+            </a:pPr>
+            <a:r>
+              <a:rPr b="1" lang="en-US" sz="2200" spc="-1" strike="noStrike">
+                <a:solidFill>
+                  <a:srgbClr val="000000"/>
+                </a:solidFill>
+                <a:latin typeface="Arial"/>
+                <a:ea typeface="DejaVu Sans"/>
+              </a:rPr>
+              <a:t>Q: What if there isn’t enough time to complete capstone?</a:t>
+            </a:r>
+            <a:endParaRPr b="0" lang="en-US" sz="2200" spc="-1" strike="noStrike">
+              <a:latin typeface="Arial"/>
+            </a:endParaRPr>
+          </a:p>
+          <a:p>
+            <a:pPr>
+              <a:lnSpc>
+                <a:spcPct val="100000"/>
+              </a:lnSpc>
+              <a:buNone/>
+            </a:pPr>
+            <a:endParaRPr b="0" lang="en-US" sz="2200" spc="-1" strike="noStrike">
+              <a:latin typeface="Arial"/>
+            </a:endParaRPr>
+          </a:p>
+          <a:p>
+            <a:pPr>
+              <a:lnSpc>
+                <a:spcPct val="100000"/>
+              </a:lnSpc>
+              <a:buNone/>
+            </a:pPr>
             <a:r>
               <a:rPr b="0" lang="en-US" sz="2200" spc="-1" strike="noStrike">
                 <a:solidFill>
@@ -11964,7 +12378,7 @@
                 <a:latin typeface="Arial"/>
                 <a:ea typeface="DejaVu Sans"/>
               </a:rPr>
-              <a:t>Each project should have a problem statement, but clarity may vary.</a:t>
+              <a:t>&gt; Capstone projects are generally scoped to fit</a:t>
             </a:r>
             <a:endParaRPr b="0" lang="en-US" sz="2200" spc="-1" strike="noStrike">
               <a:latin typeface="Arial"/>
@@ -11988,6 +12402,19 @@
               </a:lnSpc>
               <a:buNone/>
             </a:pPr>
+            <a:r>
+              <a:rPr b="0" lang="en-US" sz="2200" spc="-1" strike="noStrike">
+                <a:solidFill>
+                  <a:srgbClr val="000000"/>
+                </a:solidFill>
+                <a:latin typeface="Arial"/>
+                <a:ea typeface="DejaVu Sans"/>
+              </a:rPr>
+              <a:t>&gt; Projects kick off the term before to allow for onboarding and discovery. </a:t>
+            </a:r>
+            <a:br>
+              <a:rPr sz="2200"/>
+            </a:br>
             <a:r>
               <a:rPr b="1" lang="en-US" sz="2200" spc="-1" strike="noStrike">
                 <a:solidFill>
@@ -11996,7 +12423,7 @@
                 <a:latin typeface="Arial"/>
                 <a:ea typeface="DejaVu Sans"/>
               </a:rPr>
-              <a:t>Q: What if the sponsor doesn’t clearly define the problem?</a:t>
+              <a:t>Teams that use this time wisely tend to do better.</a:t>
             </a:r>
             <a:endParaRPr b="0" lang="en-US" sz="2200" spc="-1" strike="noStrike">
               <a:latin typeface="Arial"/>
@@ -12028,7 +12455,52 @@
                 <a:latin typeface="Arial"/>
                 <a:ea typeface="DejaVu Sans"/>
               </a:rPr>
-              <a:t>You might propose ideas at intersection of what’s achievable &amp; interesting</a:t>
+              <a:t>&gt; If you are waiting on feedback, data, etc., stay productive. </a:t>
+            </a:r>
+            <a:br>
+              <a:rPr sz="2200"/>
+            </a:br>
+            <a:r>
+              <a:rPr b="0" lang="en-US" sz="2200" spc="-1" strike="noStrike">
+                <a:solidFill>
+                  <a:srgbClr val="000000"/>
+                </a:solidFill>
+                <a:latin typeface="Arial"/>
+                <a:ea typeface="DejaVu Sans"/>
+              </a:rPr>
+              <a:t>What else can be done?</a:t>
+            </a:r>
+            <a:endParaRPr b="0" lang="en-US" sz="2200" spc="-1" strike="noStrike">
+              <a:latin typeface="Arial"/>
+            </a:endParaRPr>
+          </a:p>
+          <a:p>
+            <a:pPr>
+              <a:lnSpc>
+                <a:spcPct val="100000"/>
+              </a:lnSpc>
+              <a:buNone/>
+            </a:pPr>
+            <a:endParaRPr b="0" lang="en-US" sz="2200" spc="-1" strike="noStrike">
+              <a:latin typeface="Arial"/>
+            </a:endParaRPr>
+          </a:p>
+          <a:p>
+            <a:pPr>
+              <a:lnSpc>
+                <a:spcPct val="100000"/>
+              </a:lnSpc>
+              <a:buNone/>
+            </a:pPr>
+            <a:r>
+              <a:rPr b="0" lang="en-US" sz="2200" spc="-1" strike="noStrike">
+                <a:solidFill>
+                  <a:srgbClr val="000000"/>
+                </a:solidFill>
+                <a:latin typeface="Arial"/>
+                <a:ea typeface="DejaVu Sans"/>
+              </a:rPr>
+              <a:t>&gt; Share the work across students</a:t>
             </a:r>
             <a:endParaRPr b="0" lang="en-US" sz="2200" spc="-1" strike="noStrike">
               <a:latin typeface="Arial"/>
@@ -12090,14 +12562,14 @@
       </p:grpSpPr>
       <p:sp>
         <p:nvSpPr>
-          <p:cNvPr id="180" name=""/>
+          <p:cNvPr id="179" name=""/>
           <p:cNvSpPr/>
           <p:nvPr/>
         </p:nvSpPr>
         <p:spPr>
           <a:xfrm>
             <a:off x="428760" y="71640"/>
-            <a:ext cx="10085040" cy="539280"/>
+            <a:ext cx="10084680" cy="538920"/>
           </a:xfrm>
           <a:prstGeom prst="rect">
             <a:avLst/>
@@ -12132,7 +12604,7 @@
                 <a:latin typeface="Times New Roman"/>
                 <a:ea typeface="DejaVu Sans"/>
               </a:rPr>
-              <a:t>Lack of Data</a:t>
+              <a:t>Unclear Problem Definition</a:t>
             </a:r>
             <a:endParaRPr b="0" lang="en-US" sz="3200" spc="-1" strike="noStrike">
               <a:latin typeface="Arial"/>
@@ -12142,14 +12614,14 @@
       </p:sp>
       <p:sp>
         <p:nvSpPr>
-          <p:cNvPr id="181" name=""/>
+          <p:cNvPr id="180" name=""/>
           <p:cNvSpPr/>
           <p:nvPr/>
         </p:nvSpPr>
         <p:spPr>
           <a:xfrm>
             <a:off x="457200" y="2057400"/>
-            <a:ext cx="4340520" cy="343440"/>
+            <a:ext cx="4340160" cy="343080"/>
           </a:xfrm>
           <a:prstGeom prst="rect">
             <a:avLst/>
@@ -12168,14 +12640,14 @@
       </p:sp>
       <p:sp>
         <p:nvSpPr>
-          <p:cNvPr id="182" name=""/>
+          <p:cNvPr id="181" name=""/>
           <p:cNvSpPr/>
           <p:nvPr/>
         </p:nvSpPr>
         <p:spPr>
           <a:xfrm>
             <a:off x="457200" y="1277640"/>
-            <a:ext cx="10512720" cy="3485880"/>
+            <a:ext cx="10512360" cy="3485520"/>
           </a:xfrm>
           <a:prstGeom prst="rect">
             <a:avLst/>
@@ -12203,199 +12675,102 @@
               <a:buNone/>
             </a:pPr>
             <a:r>
-              <a:rPr b="0" lang="en-US" sz="2400" spc="-1" strike="noStrike">
+              <a:rPr b="0" lang="en-US" sz="2200" spc="-1" strike="noStrike">
                 <a:solidFill>
                   <a:srgbClr val="000000"/>
                 </a:solidFill>
                 <a:latin typeface="Arial"/>
                 <a:ea typeface="DejaVu Sans"/>
               </a:rPr>
-              <a:t>Each project should have data, but coverage and quality may vary</a:t>
-            </a:r>
-            <a:endParaRPr b="0" lang="en-US" sz="2400" spc="-1" strike="noStrike">
-              <a:latin typeface="Arial"/>
-            </a:endParaRPr>
-          </a:p>
-          <a:p>
-            <a:pPr>
-              <a:lnSpc>
-                <a:spcPct val="100000"/>
-              </a:lnSpc>
-              <a:buNone/>
-            </a:pPr>
-            <a:endParaRPr b="0" lang="en-US" sz="2400" spc="-1" strike="noStrike">
-              <a:latin typeface="Arial"/>
-            </a:endParaRPr>
-          </a:p>
-          <a:p>
-            <a:pPr>
-              <a:lnSpc>
-                <a:spcPct val="100000"/>
-              </a:lnSpc>
-              <a:buNone/>
-            </a:pPr>
-            <a:r>
-              <a:rPr b="1" lang="en-US" sz="2400" spc="-1" strike="noStrike">
+              <a:t>Each project should have a problem statement, but clarity may vary.</a:t>
+            </a:r>
+            <a:endParaRPr b="0" lang="en-US" sz="2200" spc="-1" strike="noStrike">
+              <a:latin typeface="Arial"/>
+            </a:endParaRPr>
+          </a:p>
+          <a:p>
+            <a:pPr>
+              <a:lnSpc>
+                <a:spcPct val="100000"/>
+              </a:lnSpc>
+              <a:buNone/>
+            </a:pPr>
+            <a:endParaRPr b="0" lang="en-US" sz="2200" spc="-1" strike="noStrike">
+              <a:latin typeface="Arial"/>
+            </a:endParaRPr>
+          </a:p>
+          <a:p>
+            <a:pPr>
+              <a:lnSpc>
+                <a:spcPct val="100000"/>
+              </a:lnSpc>
+              <a:buNone/>
+            </a:pPr>
+            <a:r>
+              <a:rPr b="1" lang="en-US" sz="2200" spc="-1" strike="noStrike">
                 <a:solidFill>
                   <a:srgbClr val="000000"/>
                 </a:solidFill>
                 <a:latin typeface="Arial"/>
                 <a:ea typeface="DejaVu Sans"/>
               </a:rPr>
-              <a:t>Q: What if the data won’t support the objective?</a:t>
-            </a:r>
-            <a:endParaRPr b="0" lang="en-US" sz="2400" spc="-1" strike="noStrike">
-              <a:latin typeface="Arial"/>
-            </a:endParaRPr>
-          </a:p>
-          <a:p>
-            <a:pPr>
-              <a:lnSpc>
-                <a:spcPct val="100000"/>
-              </a:lnSpc>
-              <a:buNone/>
-            </a:pPr>
-            <a:endParaRPr b="0" lang="en-US" sz="2400" spc="-1" strike="noStrike">
-              <a:latin typeface="Arial"/>
-            </a:endParaRPr>
-          </a:p>
-          <a:p>
-            <a:pPr>
-              <a:lnSpc>
-                <a:spcPct val="100000"/>
-              </a:lnSpc>
-              <a:buNone/>
-            </a:pPr>
-            <a:r>
-              <a:rPr b="0" lang="en-US" sz="2400" spc="-1" strike="noStrike">
+              <a:t>Q: What if the sponsor doesn’t clearly define the problem?</a:t>
+            </a:r>
+            <a:endParaRPr b="0" lang="en-US" sz="2200" spc="-1" strike="noStrike">
+              <a:latin typeface="Arial"/>
+            </a:endParaRPr>
+          </a:p>
+          <a:p>
+            <a:pPr>
+              <a:lnSpc>
+                <a:spcPct val="100000"/>
+              </a:lnSpc>
+              <a:buNone/>
+            </a:pPr>
+            <a:endParaRPr b="0" lang="en-US" sz="2200" spc="-1" strike="noStrike">
+              <a:latin typeface="Arial"/>
+            </a:endParaRPr>
+          </a:p>
+          <a:p>
+            <a:pPr>
+              <a:lnSpc>
+                <a:spcPct val="100000"/>
+              </a:lnSpc>
+              <a:buNone/>
+            </a:pPr>
+            <a:r>
+              <a:rPr b="0" lang="en-US" sz="2200" spc="-1" strike="noStrike">
                 <a:solidFill>
                   <a:srgbClr val="000000"/>
                 </a:solidFill>
                 <a:latin typeface="Arial"/>
                 <a:ea typeface="DejaVu Sans"/>
               </a:rPr>
-              <a:t>You might propose ideas on what is achievable</a:t>
-            </a:r>
-            <a:endParaRPr b="0" lang="en-US" sz="2400" spc="-1" strike="noStrike">
-              <a:latin typeface="Arial"/>
-            </a:endParaRPr>
-          </a:p>
-          <a:p>
-            <a:pPr>
-              <a:lnSpc>
-                <a:spcPct val="100000"/>
-              </a:lnSpc>
-              <a:buNone/>
-            </a:pPr>
-            <a:r>
-              <a:rPr b="0" lang="en-US" sz="2400" spc="-1" strike="noStrike">
-                <a:solidFill>
-                  <a:srgbClr val="000000"/>
-                </a:solidFill>
-                <a:latin typeface="Arial"/>
-                <a:ea typeface="DejaVu Sans"/>
-              </a:rPr>
-              <a:t>- Solve for subset of population?</a:t>
-            </a:r>
-            <a:endParaRPr b="0" lang="en-US" sz="2400" spc="-1" strike="noStrike">
-              <a:latin typeface="Arial"/>
-            </a:endParaRPr>
-          </a:p>
-          <a:p>
-            <a:pPr>
-              <a:lnSpc>
-                <a:spcPct val="100000"/>
-              </a:lnSpc>
-              <a:buNone/>
-            </a:pPr>
-            <a:r>
-              <a:rPr b="0" lang="en-US" sz="2400" spc="-1" strike="noStrike">
-                <a:solidFill>
-                  <a:srgbClr val="000000"/>
-                </a:solidFill>
-                <a:latin typeface="Arial"/>
-                <a:ea typeface="DejaVu Sans"/>
-              </a:rPr>
-              <a:t>- Pivot the question?</a:t>
-            </a:r>
-            <a:endParaRPr b="0" lang="en-US" sz="2400" spc="-1" strike="noStrike">
-              <a:latin typeface="Arial"/>
-            </a:endParaRPr>
-          </a:p>
-          <a:p>
-            <a:pPr>
-              <a:lnSpc>
-                <a:spcPct val="100000"/>
-              </a:lnSpc>
-              <a:buNone/>
-            </a:pPr>
-            <a:r>
-              <a:rPr b="0" lang="en-US" sz="2400" spc="-1" strike="noStrike">
-                <a:solidFill>
-                  <a:srgbClr val="000000"/>
-                </a:solidFill>
-                <a:latin typeface="Arial"/>
-                <a:ea typeface="DejaVu Sans"/>
-              </a:rPr>
-              <a:t>- If labeled dataset is small, you might train on labeled data, </a:t>
-            </a:r>
-            <a:br>
-              <a:rPr sz="2400"/>
-            </a:br>
-            <a:r>
-              <a:rPr b="0" lang="en-US" sz="2400" spc="-1" strike="noStrike">
-                <a:solidFill>
-                  <a:srgbClr val="000000"/>
-                </a:solidFill>
-                <a:latin typeface="Arial"/>
-                <a:ea typeface="DejaVu Sans"/>
-              </a:rPr>
-              <a:t>  predict on unlabeled, and review cases with high/low probability.</a:t>
-            </a:r>
-            <a:endParaRPr b="0" lang="en-US" sz="2400" spc="-1" strike="noStrike">
-              <a:latin typeface="Arial"/>
-            </a:endParaRPr>
-          </a:p>
-          <a:p>
-            <a:pPr>
-              <a:lnSpc>
-                <a:spcPct val="100000"/>
-              </a:lnSpc>
-              <a:buNone/>
-            </a:pPr>
-            <a:r>
-              <a:rPr b="0" lang="en-US" sz="2400" spc="-1" strike="noStrike">
-                <a:solidFill>
-                  <a:srgbClr val="000000"/>
-                </a:solidFill>
-                <a:latin typeface="Arial"/>
-                <a:ea typeface="DejaVu Sans"/>
-              </a:rPr>
-              <a:t>- Can more data be collected? Can supplemental data be created?</a:t>
-            </a:r>
-            <a:endParaRPr b="0" lang="en-US" sz="2400" spc="-1" strike="noStrike">
-              <a:latin typeface="Arial"/>
-            </a:endParaRPr>
-          </a:p>
-          <a:p>
-            <a:pPr>
-              <a:lnSpc>
-                <a:spcPct val="100000"/>
-              </a:lnSpc>
-              <a:buNone/>
-            </a:pPr>
-            <a:endParaRPr b="0" lang="en-US" sz="2400" spc="-1" strike="noStrike">
-              <a:latin typeface="Arial"/>
-            </a:endParaRPr>
-          </a:p>
-          <a:p>
-            <a:pPr>
-              <a:lnSpc>
-                <a:spcPct val="100000"/>
-              </a:lnSpc>
-              <a:buNone/>
-            </a:pPr>
-            <a:endParaRPr b="0" lang="en-US" sz="2400" spc="-1" strike="noStrike">
+              <a:t>You might propose ideas at intersection of what’s achievable &amp; interesting</a:t>
+            </a:r>
+            <a:endParaRPr b="0" lang="en-US" sz="2200" spc="-1" strike="noStrike">
+              <a:latin typeface="Arial"/>
+            </a:endParaRPr>
+          </a:p>
+          <a:p>
+            <a:pPr>
+              <a:lnSpc>
+                <a:spcPct val="100000"/>
+              </a:lnSpc>
+              <a:buNone/>
+            </a:pPr>
+            <a:endParaRPr b="0" lang="en-US" sz="2200" spc="-1" strike="noStrike">
+              <a:latin typeface="Arial"/>
+            </a:endParaRPr>
+          </a:p>
+          <a:p>
+            <a:pPr>
+              <a:lnSpc>
+                <a:spcPct val="100000"/>
+              </a:lnSpc>
+              <a:buNone/>
+            </a:pPr>
+            <a:endParaRPr b="0" lang="en-US" sz="2200" spc="-1" strike="noStrike">
               <a:latin typeface="Arial"/>
             </a:endParaRPr>
           </a:p>
@@ -12433,14 +12808,14 @@
       </p:grpSpPr>
       <p:sp>
         <p:nvSpPr>
-          <p:cNvPr id="183" name=""/>
+          <p:cNvPr id="182" name=""/>
           <p:cNvSpPr/>
           <p:nvPr/>
         </p:nvSpPr>
         <p:spPr>
           <a:xfrm>
             <a:off x="428760" y="71640"/>
-            <a:ext cx="10085040" cy="539280"/>
+            <a:ext cx="10084680" cy="538920"/>
           </a:xfrm>
           <a:prstGeom prst="rect">
             <a:avLst/>
@@ -12475,7 +12850,7 @@
                 <a:latin typeface="Times New Roman"/>
                 <a:ea typeface="DejaVu Sans"/>
               </a:rPr>
-              <a:t>Making Meetings more Productive</a:t>
+              <a:t>Lack of Data</a:t>
             </a:r>
             <a:endParaRPr b="0" lang="en-US" sz="3200" spc="-1" strike="noStrike">
               <a:latin typeface="Arial"/>
@@ -12485,14 +12860,14 @@
       </p:sp>
       <p:sp>
         <p:nvSpPr>
-          <p:cNvPr id="184" name=""/>
+          <p:cNvPr id="183" name=""/>
           <p:cNvSpPr/>
           <p:nvPr/>
         </p:nvSpPr>
         <p:spPr>
           <a:xfrm>
             <a:off x="457200" y="2057400"/>
-            <a:ext cx="4340520" cy="343440"/>
+            <a:ext cx="4340160" cy="343080"/>
           </a:xfrm>
           <a:prstGeom prst="rect">
             <a:avLst/>
@@ -12511,14 +12886,14 @@
       </p:sp>
       <p:sp>
         <p:nvSpPr>
-          <p:cNvPr id="185" name=""/>
+          <p:cNvPr id="184" name=""/>
           <p:cNvSpPr/>
           <p:nvPr/>
         </p:nvSpPr>
         <p:spPr>
           <a:xfrm>
             <a:off x="457200" y="1277640"/>
-            <a:ext cx="10512720" cy="3485880"/>
+            <a:ext cx="10512360" cy="3485520"/>
           </a:xfrm>
           <a:prstGeom prst="rect">
             <a:avLst/>
@@ -12553,7 +12928,7 @@
                 <a:latin typeface="Arial"/>
                 <a:ea typeface="DejaVu Sans"/>
               </a:rPr>
-              <a:t>Each sponsor should meet w students as needed.</a:t>
+              <a:t>Each project should have data, but coverage and quality may vary</a:t>
             </a:r>
             <a:endParaRPr b="0" lang="en-US" sz="2400" spc="-1" strike="noStrike">
               <a:latin typeface="Arial"/>
@@ -12585,7 +12960,7 @@
                 <a:latin typeface="Arial"/>
                 <a:ea typeface="DejaVu Sans"/>
               </a:rPr>
-              <a:t>Q: What if the meetings aren’t productive enough?</a:t>
+              <a:t>Q: What if the data won’t support the objective?</a:t>
             </a:r>
             <a:endParaRPr b="0" lang="en-US" sz="2400" spc="-1" strike="noStrike">
               <a:latin typeface="Arial"/>
@@ -12617,11 +12992,8 @@
                 <a:latin typeface="Arial"/>
                 <a:ea typeface="DejaVu Sans"/>
               </a:rPr>
-              <a:t>You might try:</a:t>
-            </a:r>
-            <a:br>
-              <a:rPr sz="2400"/>
-            </a:br>
+              <a:t>You might propose ideas on what is achievable</a:t>
+            </a:r>
             <a:endParaRPr b="0" lang="en-US" sz="2400" spc="-1" strike="noStrike">
               <a:latin typeface="Arial"/>
             </a:endParaRPr>
@@ -12641,7 +13013,7 @@
                 <a:latin typeface="Arial"/>
                 <a:ea typeface="DejaVu Sans"/>
               </a:rPr>
-              <a:t>- Forming an agenda / agreeing on it beforehand</a:t>
+              <a:t>- Solve for subset of population?</a:t>
             </a:r>
             <a:endParaRPr b="0" lang="en-US" sz="2400" spc="-1" strike="noStrike">
               <a:latin typeface="Arial"/>
@@ -12662,7 +13034,7 @@
                 <a:latin typeface="Arial"/>
                 <a:ea typeface="DejaVu Sans"/>
               </a:rPr>
-              <a:t>- Sharing results beforehand to discuss during meeting</a:t>
+              <a:t>- Pivot the question?</a:t>
             </a:r>
             <a:endParaRPr b="0" lang="en-US" sz="2400" spc="-1" strike="noStrike">
               <a:latin typeface="Arial"/>
@@ -12683,19 +13055,11 @@
                 <a:latin typeface="Arial"/>
                 <a:ea typeface="DejaVu Sans"/>
               </a:rPr>
-              <a:t>- Decide Next Steps in the meeting</a:t>
-            </a:r>
-            <a:endParaRPr b="0" lang="en-US" sz="2400" spc="-1" strike="noStrike">
-              <a:latin typeface="Arial"/>
-            </a:endParaRPr>
-          </a:p>
-          <a:p>
-            <a:pPr>
-              <a:lnSpc>
-                <a:spcPct val="100000"/>
-              </a:lnSpc>
-              <a:buNone/>
-            </a:pPr>
+              <a:t>- If labeled dataset is small, you might train on labeled data, </a:t>
+            </a:r>
+            <a:br>
+              <a:rPr sz="2400"/>
+            </a:br>
             <a:r>
               <a:rPr b="0" lang="en-US" sz="2400" spc="-1" strike="noStrike">
                 <a:solidFill>
@@ -12704,7 +13068,7 @@
                 <a:latin typeface="Arial"/>
                 <a:ea typeface="DejaVu Sans"/>
               </a:rPr>
-              <a:t>- Call out decision points in meeting</a:t>
+              <a:t>  predict on unlabeled, and review cases with high/low probability.</a:t>
             </a:r>
             <a:endParaRPr b="0" lang="en-US" sz="2400" spc="-1" strike="noStrike">
               <a:latin typeface="Arial"/>
@@ -12725,7 +13089,7 @@
                 <a:latin typeface="Arial"/>
                 <a:ea typeface="DejaVu Sans"/>
               </a:rPr>
-              <a:t>- Ask for feedback</a:t>
+              <a:t>- Can more data be collected? Can supplemental data be created?</a:t>
             </a:r>
             <a:endParaRPr b="0" lang="en-US" sz="2400" spc="-1" strike="noStrike">
               <a:latin typeface="Arial"/>
@@ -12787,14 +13151,14 @@
       </p:grpSpPr>
       <p:sp>
         <p:nvSpPr>
-          <p:cNvPr id="186" name=""/>
+          <p:cNvPr id="185" name=""/>
           <p:cNvSpPr/>
           <p:nvPr/>
         </p:nvSpPr>
         <p:spPr>
           <a:xfrm>
             <a:off x="428760" y="71640"/>
-            <a:ext cx="10085040" cy="539280"/>
+            <a:ext cx="10084680" cy="538920"/>
           </a:xfrm>
           <a:prstGeom prst="rect">
             <a:avLst/>
@@ -12829,7 +13193,7 @@
                 <a:latin typeface="Times New Roman"/>
                 <a:ea typeface="DejaVu Sans"/>
               </a:rPr>
-              <a:t>Upskilling</a:t>
+              <a:t>Making Meetings more Productive</a:t>
             </a:r>
             <a:endParaRPr b="0" lang="en-US" sz="3200" spc="-1" strike="noStrike">
               <a:latin typeface="Arial"/>
@@ -12839,14 +13203,14 @@
       </p:sp>
       <p:sp>
         <p:nvSpPr>
-          <p:cNvPr id="187" name=""/>
+          <p:cNvPr id="186" name=""/>
           <p:cNvSpPr/>
           <p:nvPr/>
         </p:nvSpPr>
         <p:spPr>
           <a:xfrm>
             <a:off x="457200" y="2057400"/>
-            <a:ext cx="4340520" cy="343440"/>
+            <a:ext cx="4340160" cy="343080"/>
           </a:xfrm>
           <a:prstGeom prst="rect">
             <a:avLst/>
@@ -12865,14 +13229,14 @@
       </p:sp>
       <p:sp>
         <p:nvSpPr>
-          <p:cNvPr id="188" name=""/>
+          <p:cNvPr id="187" name=""/>
           <p:cNvSpPr/>
           <p:nvPr/>
         </p:nvSpPr>
         <p:spPr>
           <a:xfrm>
             <a:off x="457200" y="1277640"/>
-            <a:ext cx="10512720" cy="3485880"/>
+            <a:ext cx="10512360" cy="3485520"/>
           </a:xfrm>
           <a:prstGeom prst="rect">
             <a:avLst/>
@@ -12907,7 +13271,7 @@
                 <a:latin typeface="Arial"/>
                 <a:ea typeface="DejaVu Sans"/>
               </a:rPr>
-              <a:t>Ideally, the project brings together skills you’ve learned in the program.</a:t>
+              <a:t>Each sponsor should meet w students as needed.</a:t>
             </a:r>
             <a:endParaRPr b="0" lang="en-US" sz="2400" spc="-1" strike="noStrike">
               <a:latin typeface="Arial"/>
@@ -12939,7 +13303,7 @@
                 <a:latin typeface="Arial"/>
                 <a:ea typeface="DejaVu Sans"/>
               </a:rPr>
-              <a:t>Q: What if I don’t have the skills to solve the problem?</a:t>
+              <a:t>Q: What if the meetings aren’t productive enough?</a:t>
             </a:r>
             <a:endParaRPr b="0" lang="en-US" sz="2400" spc="-1" strike="noStrike">
               <a:latin typeface="Arial"/>
@@ -12971,8 +13335,11 @@
                 <a:latin typeface="Arial"/>
                 <a:ea typeface="DejaVu Sans"/>
               </a:rPr>
-              <a:t>&gt; In some cases, you will need to learn new things</a:t>
-            </a:r>
+              <a:t>You might try:</a:t>
+            </a:r>
+            <a:br>
+              <a:rPr sz="2400"/>
+            </a:br>
             <a:endParaRPr b="0" lang="en-US" sz="2400" spc="-1" strike="noStrike">
               <a:latin typeface="Arial"/>
             </a:endParaRPr>
@@ -12992,8 +13359,103 @@
                 <a:latin typeface="Arial"/>
                 <a:ea typeface="DejaVu Sans"/>
               </a:rPr>
-              <a:t>&gt; Your sponsor / mentor might be able to suggest resources</a:t>
-            </a:r>
+              <a:t>- Forming an agenda / agreeing on it beforehand</a:t>
+            </a:r>
+            <a:endParaRPr b="0" lang="en-US" sz="2400" spc="-1" strike="noStrike">
+              <a:latin typeface="Arial"/>
+            </a:endParaRPr>
+          </a:p>
+          <a:p>
+            <a:pPr>
+              <a:lnSpc>
+                <a:spcPct val="100000"/>
+              </a:lnSpc>
+              <a:buNone/>
+            </a:pPr>
+            <a:r>
+              <a:rPr b="0" lang="en-US" sz="2400" spc="-1" strike="noStrike">
+                <a:solidFill>
+                  <a:srgbClr val="000000"/>
+                </a:solidFill>
+                <a:latin typeface="Arial"/>
+                <a:ea typeface="DejaVu Sans"/>
+              </a:rPr>
+              <a:t>- Sharing results beforehand to discuss during meeting</a:t>
+            </a:r>
+            <a:endParaRPr b="0" lang="en-US" sz="2400" spc="-1" strike="noStrike">
+              <a:latin typeface="Arial"/>
+            </a:endParaRPr>
+          </a:p>
+          <a:p>
+            <a:pPr>
+              <a:lnSpc>
+                <a:spcPct val="100000"/>
+              </a:lnSpc>
+              <a:buNone/>
+            </a:pPr>
+            <a:r>
+              <a:rPr b="0" lang="en-US" sz="2400" spc="-1" strike="noStrike">
+                <a:solidFill>
+                  <a:srgbClr val="000000"/>
+                </a:solidFill>
+                <a:latin typeface="Arial"/>
+                <a:ea typeface="DejaVu Sans"/>
+              </a:rPr>
+              <a:t>- Decide Next Steps in the meeting</a:t>
+            </a:r>
+            <a:endParaRPr b="0" lang="en-US" sz="2400" spc="-1" strike="noStrike">
+              <a:latin typeface="Arial"/>
+            </a:endParaRPr>
+          </a:p>
+          <a:p>
+            <a:pPr>
+              <a:lnSpc>
+                <a:spcPct val="100000"/>
+              </a:lnSpc>
+              <a:buNone/>
+            </a:pPr>
+            <a:r>
+              <a:rPr b="0" lang="en-US" sz="2400" spc="-1" strike="noStrike">
+                <a:solidFill>
+                  <a:srgbClr val="000000"/>
+                </a:solidFill>
+                <a:latin typeface="Arial"/>
+                <a:ea typeface="DejaVu Sans"/>
+              </a:rPr>
+              <a:t>- Call out decision points in meeting</a:t>
+            </a:r>
+            <a:endParaRPr b="0" lang="en-US" sz="2400" spc="-1" strike="noStrike">
+              <a:latin typeface="Arial"/>
+            </a:endParaRPr>
+          </a:p>
+          <a:p>
+            <a:pPr>
+              <a:lnSpc>
+                <a:spcPct val="100000"/>
+              </a:lnSpc>
+              <a:buNone/>
+            </a:pPr>
+            <a:r>
+              <a:rPr b="0" lang="en-US" sz="2400" spc="-1" strike="noStrike">
+                <a:solidFill>
+                  <a:srgbClr val="000000"/>
+                </a:solidFill>
+                <a:latin typeface="Arial"/>
+                <a:ea typeface="DejaVu Sans"/>
+              </a:rPr>
+              <a:t>- Ask for feedback</a:t>
+            </a:r>
+            <a:endParaRPr b="0" lang="en-US" sz="2400" spc="-1" strike="noStrike">
+              <a:latin typeface="Arial"/>
+            </a:endParaRPr>
+          </a:p>
+          <a:p>
+            <a:pPr>
+              <a:lnSpc>
+                <a:spcPct val="100000"/>
+              </a:lnSpc>
+              <a:buNone/>
+            </a:pPr>
             <a:endParaRPr b="0" lang="en-US" sz="2400" spc="-1" strike="noStrike">
               <a:latin typeface="Arial"/>
             </a:endParaRPr>
@@ -13043,14 +13505,14 @@
       </p:grpSpPr>
       <p:sp>
         <p:nvSpPr>
-          <p:cNvPr id="189" name=""/>
+          <p:cNvPr id="188" name=""/>
           <p:cNvSpPr/>
           <p:nvPr/>
         </p:nvSpPr>
         <p:spPr>
           <a:xfrm>
             <a:off x="428760" y="71640"/>
-            <a:ext cx="10085040" cy="539280"/>
+            <a:ext cx="10084680" cy="538920"/>
           </a:xfrm>
           <a:prstGeom prst="rect">
             <a:avLst/>
@@ -13085,7 +13547,7 @@
                 <a:latin typeface="Times New Roman"/>
                 <a:ea typeface="DejaVu Sans"/>
               </a:rPr>
-              <a:t>Upskilling</a:t>
+              <a:t>High Workload</a:t>
             </a:r>
             <a:endParaRPr b="0" lang="en-US" sz="3200" spc="-1" strike="noStrike">
               <a:latin typeface="Arial"/>
@@ -13095,14 +13557,14 @@
       </p:sp>
       <p:sp>
         <p:nvSpPr>
-          <p:cNvPr id="190" name=""/>
+          <p:cNvPr id="189" name=""/>
           <p:cNvSpPr/>
           <p:nvPr/>
         </p:nvSpPr>
         <p:spPr>
           <a:xfrm>
             <a:off x="457200" y="2057400"/>
-            <a:ext cx="4340520" cy="343440"/>
+            <a:ext cx="4340160" cy="343080"/>
           </a:xfrm>
           <a:prstGeom prst="rect">
             <a:avLst/>
@@ -13121,14 +13583,14 @@
       </p:sp>
       <p:sp>
         <p:nvSpPr>
-          <p:cNvPr id="191" name=""/>
+          <p:cNvPr id="190" name=""/>
           <p:cNvSpPr/>
           <p:nvPr/>
         </p:nvSpPr>
         <p:spPr>
           <a:xfrm>
             <a:off x="457200" y="1277640"/>
-            <a:ext cx="10512720" cy="3485880"/>
+            <a:ext cx="10512360" cy="3485520"/>
           </a:xfrm>
           <a:prstGeom prst="rect">
             <a:avLst/>
@@ -13156,188 +13618,176 @@
               <a:buNone/>
             </a:pPr>
             <a:r>
-              <a:rPr b="0" lang="en-US" sz="2200" spc="-1" strike="noStrike">
+              <a:rPr b="0" lang="en-US" sz="2400" spc="-1" strike="noStrike">
                 <a:solidFill>
                   <a:srgbClr val="000000"/>
                 </a:solidFill>
                 <a:latin typeface="Arial"/>
                 <a:ea typeface="DejaVu Sans"/>
               </a:rPr>
-              <a:t>Ideally, the project brings together skills you’ve learned in the program.</a:t>
-            </a:r>
-            <a:endParaRPr b="0" lang="en-US" sz="2200" spc="-1" strike="noStrike">
-              <a:latin typeface="Arial"/>
-            </a:endParaRPr>
-          </a:p>
-          <a:p>
-            <a:pPr>
-              <a:lnSpc>
-                <a:spcPct val="100000"/>
-              </a:lnSpc>
-              <a:buNone/>
-            </a:pPr>
-            <a:endParaRPr b="0" lang="en-US" sz="2200" spc="-1" strike="noStrike">
-              <a:latin typeface="Arial"/>
-            </a:endParaRPr>
-          </a:p>
-          <a:p>
-            <a:pPr>
-              <a:lnSpc>
-                <a:spcPct val="100000"/>
-              </a:lnSpc>
-              <a:buNone/>
-            </a:pPr>
-            <a:r>
-              <a:rPr b="1" lang="en-US" sz="2200" spc="-1" strike="noStrike">
+              <a:t>The sponsor is made aware that capstone is one of several things students are working on. At the same time, capstone is an important component.</a:t>
+            </a:r>
+            <a:endParaRPr b="0" lang="en-US" sz="2400" spc="-1" strike="noStrike">
+              <a:latin typeface="Arial"/>
+            </a:endParaRPr>
+          </a:p>
+          <a:p>
+            <a:pPr>
+              <a:lnSpc>
+                <a:spcPct val="100000"/>
+              </a:lnSpc>
+              <a:buNone/>
+            </a:pPr>
+            <a:endParaRPr b="0" lang="en-US" sz="2400" spc="-1" strike="noStrike">
+              <a:latin typeface="Arial"/>
+            </a:endParaRPr>
+          </a:p>
+          <a:p>
+            <a:pPr>
+              <a:lnSpc>
+                <a:spcPct val="100000"/>
+              </a:lnSpc>
+              <a:buNone/>
+            </a:pPr>
+            <a:r>
+              <a:rPr b="1" lang="en-US" sz="2400" spc="-1" strike="noStrike">
                 <a:solidFill>
                   <a:srgbClr val="000000"/>
                 </a:solidFill>
                 <a:latin typeface="Arial"/>
                 <a:ea typeface="DejaVu Sans"/>
               </a:rPr>
-              <a:t>Q: What if I don’t have the skills to solve the problem?</a:t>
-            </a:r>
-            <a:endParaRPr b="0" lang="en-US" sz="2200" spc="-1" strike="noStrike">
-              <a:latin typeface="Arial"/>
-            </a:endParaRPr>
-          </a:p>
-          <a:p>
-            <a:pPr>
-              <a:lnSpc>
-                <a:spcPct val="100000"/>
-              </a:lnSpc>
-              <a:buNone/>
-            </a:pPr>
-            <a:endParaRPr b="0" lang="en-US" sz="2200" spc="-1" strike="noStrike">
-              <a:latin typeface="Arial"/>
-            </a:endParaRPr>
-          </a:p>
-          <a:p>
-            <a:pPr>
-              <a:lnSpc>
-                <a:spcPct val="100000"/>
-              </a:lnSpc>
-              <a:buNone/>
-            </a:pPr>
-            <a:r>
-              <a:rPr b="0" lang="en-US" sz="2200" spc="-1" strike="noStrike">
+              <a:t>Q: What if the sponsor demands cannot be met?</a:t>
+            </a:r>
+            <a:endParaRPr b="0" lang="en-US" sz="2400" spc="-1" strike="noStrike">
+              <a:latin typeface="Arial"/>
+            </a:endParaRPr>
+          </a:p>
+          <a:p>
+            <a:pPr>
+              <a:lnSpc>
+                <a:spcPct val="100000"/>
+              </a:lnSpc>
+              <a:buNone/>
+            </a:pPr>
+            <a:endParaRPr b="0" lang="en-US" sz="2400" spc="-1" strike="noStrike">
+              <a:latin typeface="Arial"/>
+            </a:endParaRPr>
+          </a:p>
+          <a:p>
+            <a:pPr>
+              <a:lnSpc>
+                <a:spcPct val="100000"/>
+              </a:lnSpc>
+              <a:buNone/>
+            </a:pPr>
+            <a:r>
+              <a:rPr b="0" lang="en-US" sz="2400" spc="-1" strike="noStrike">
                 <a:solidFill>
                   <a:srgbClr val="000000"/>
                 </a:solidFill>
                 <a:latin typeface="Arial"/>
                 <a:ea typeface="DejaVu Sans"/>
               </a:rPr>
-              <a:t>&gt; In some cases, you will need to learn new things</a:t>
-            </a:r>
-            <a:endParaRPr b="0" lang="en-US" sz="2200" spc="-1" strike="noStrike">
-              <a:latin typeface="Arial"/>
-            </a:endParaRPr>
-          </a:p>
-          <a:p>
-            <a:pPr>
-              <a:lnSpc>
-                <a:spcPct val="100000"/>
-              </a:lnSpc>
-              <a:buNone/>
-            </a:pPr>
-            <a:r>
-              <a:rPr b="0" lang="en-US" sz="2200" spc="-1" strike="noStrike">
+              <a:t>First, the students should discuss and decide if things truly are too demanding, and assess if you are managing your time well.</a:t>
+            </a:r>
+            <a:endParaRPr b="0" lang="en-US" sz="2400" spc="-1" strike="noStrike">
+              <a:latin typeface="Arial"/>
+            </a:endParaRPr>
+          </a:p>
+          <a:p>
+            <a:pPr>
+              <a:lnSpc>
+                <a:spcPct val="100000"/>
+              </a:lnSpc>
+              <a:buNone/>
+            </a:pPr>
+            <a:endParaRPr b="0" lang="en-US" sz="2400" spc="-1" strike="noStrike">
+              <a:latin typeface="Arial"/>
+            </a:endParaRPr>
+          </a:p>
+          <a:p>
+            <a:pPr>
+              <a:lnSpc>
+                <a:spcPct val="100000"/>
+              </a:lnSpc>
+              <a:buNone/>
+            </a:pPr>
+            <a:r>
+              <a:rPr b="0" lang="en-US" sz="2400" spc="-1" strike="noStrike">
                 <a:solidFill>
                   <a:srgbClr val="000000"/>
                 </a:solidFill>
                 <a:latin typeface="Arial"/>
                 <a:ea typeface="DejaVu Sans"/>
               </a:rPr>
-              <a:t>&gt; Your sponsor / mentor might be able to suggest resources</a:t>
-            </a:r>
-            <a:br>
-              <a:rPr sz="2200"/>
-            </a:br>
-            <a:endParaRPr b="0" lang="en-US" sz="2200" spc="-1" strike="noStrike">
-              <a:latin typeface="Arial"/>
-            </a:endParaRPr>
-          </a:p>
-          <a:p>
-            <a:pPr>
-              <a:lnSpc>
-                <a:spcPct val="100000"/>
-              </a:lnSpc>
-              <a:buNone/>
-            </a:pPr>
-            <a:r>
-              <a:rPr b="0" lang="en-US" sz="2200" spc="-1" strike="noStrike">
+              <a:t>You can discuss with your faculty mentor and Capstone Director</a:t>
+            </a:r>
+            <a:endParaRPr b="0" lang="en-US" sz="2400" spc="-1" strike="noStrike">
+              <a:latin typeface="Arial"/>
+            </a:endParaRPr>
+          </a:p>
+          <a:p>
+            <a:pPr>
+              <a:lnSpc>
+                <a:spcPct val="100000"/>
+              </a:lnSpc>
+              <a:buNone/>
+            </a:pPr>
+            <a:endParaRPr b="0" lang="en-US" sz="2400" spc="-1" strike="noStrike">
+              <a:latin typeface="Arial"/>
+            </a:endParaRPr>
+          </a:p>
+          <a:p>
+            <a:pPr>
+              <a:lnSpc>
+                <a:spcPct val="100000"/>
+              </a:lnSpc>
+              <a:buNone/>
+            </a:pPr>
+            <a:r>
+              <a:rPr b="0" lang="en-US" sz="2400" spc="-1" strike="noStrike">
                 <a:solidFill>
                   <a:srgbClr val="000000"/>
                 </a:solidFill>
                 <a:latin typeface="Arial"/>
                 <a:ea typeface="DejaVu Sans"/>
               </a:rPr>
-              <a:t>&gt; Keep a list of open questions, skills needed</a:t>
-            </a:r>
-            <a:endParaRPr b="0" lang="en-US" sz="2200" spc="-1" strike="noStrike">
-              <a:latin typeface="Arial"/>
-            </a:endParaRPr>
-          </a:p>
-          <a:p>
-            <a:pPr>
-              <a:lnSpc>
-                <a:spcPct val="100000"/>
-              </a:lnSpc>
-              <a:buNone/>
-            </a:pPr>
-            <a:r>
-              <a:rPr b="0" lang="en-US" sz="2200" spc="-1" strike="noStrike">
+              <a:t>You can gently remind the sponsor of the workload</a:t>
+            </a:r>
+            <a:endParaRPr b="0" lang="en-US" sz="2400" spc="-1" strike="noStrike">
+              <a:latin typeface="Arial"/>
+            </a:endParaRPr>
+          </a:p>
+          <a:p>
+            <a:pPr>
+              <a:lnSpc>
+                <a:spcPct val="100000"/>
+              </a:lnSpc>
+              <a:buNone/>
+            </a:pPr>
+            <a:endParaRPr b="0" lang="en-US" sz="2400" spc="-1" strike="noStrike">
+              <a:latin typeface="Arial"/>
+            </a:endParaRPr>
+          </a:p>
+          <a:p>
+            <a:pPr>
+              <a:lnSpc>
+                <a:spcPct val="100000"/>
+              </a:lnSpc>
+              <a:buNone/>
+            </a:pPr>
+            <a:r>
+              <a:rPr b="0" lang="en-US" sz="2400" spc="-1" strike="noStrike">
                 <a:solidFill>
                   <a:srgbClr val="000000"/>
                 </a:solidFill>
                 <a:latin typeface="Arial"/>
                 <a:ea typeface="DejaVu Sans"/>
               </a:rPr>
-              <a:t>   </a:t>
-            </a:r>
-            <a:r>
-              <a:rPr b="0" lang="en-US" sz="2200" spc="-1" strike="noStrike">
-                <a:solidFill>
-                  <a:srgbClr val="000000"/>
-                </a:solidFill>
-                <a:latin typeface="Arial"/>
-                <a:ea typeface="DejaVu Sans"/>
-              </a:rPr>
-              <a:t>Break these down into manageable tasks (e.g., learn n-gram models)</a:t>
-            </a:r>
-            <a:endParaRPr b="0" lang="en-US" sz="2200" spc="-1" strike="noStrike">
-              <a:latin typeface="Arial"/>
-            </a:endParaRPr>
-          </a:p>
-          <a:p>
-            <a:pPr>
-              <a:lnSpc>
-                <a:spcPct val="100000"/>
-              </a:lnSpc>
-              <a:buNone/>
-            </a:pPr>
-            <a:r>
-              <a:rPr b="0" lang="en-US" sz="2200" spc="-1" strike="noStrike">
-                <a:solidFill>
-                  <a:srgbClr val="000000"/>
-                </a:solidFill>
-                <a:latin typeface="Arial"/>
-                <a:ea typeface="DejaVu Sans"/>
-              </a:rPr>
-              <a:t>&gt; You might distribute the work across teammates and share learnings </a:t>
-            </a:r>
-            <a:endParaRPr b="0" lang="en-US" sz="2200" spc="-1" strike="noStrike">
-              <a:latin typeface="Arial"/>
-            </a:endParaRPr>
-          </a:p>
-          <a:p>
-            <a:pPr>
-              <a:lnSpc>
-                <a:spcPct val="100000"/>
-              </a:lnSpc>
-              <a:buNone/>
-            </a:pPr>
-            <a:endParaRPr b="0" lang="en-US" sz="2200" spc="-1" strike="noStrike">
+              <a:t>You can suggest what might be more reasonable and get buy in</a:t>
+            </a:r>
+            <a:endParaRPr b="0" lang="en-US" sz="2400" spc="-1" strike="noStrike">
               <a:latin typeface="Arial"/>
             </a:endParaRPr>
           </a:p>
@@ -13375,14 +13825,14 @@
       </p:grpSpPr>
       <p:sp>
         <p:nvSpPr>
-          <p:cNvPr id="192" name=""/>
+          <p:cNvPr id="191" name=""/>
           <p:cNvSpPr/>
           <p:nvPr/>
         </p:nvSpPr>
         <p:spPr>
           <a:xfrm>
             <a:off x="428760" y="71640"/>
-            <a:ext cx="10085040" cy="539280"/>
+            <a:ext cx="10084680" cy="538920"/>
           </a:xfrm>
           <a:prstGeom prst="rect">
             <a:avLst/>
@@ -13417,7 +13867,7 @@
                 <a:latin typeface="Times New Roman"/>
                 <a:ea typeface="DejaVu Sans"/>
               </a:rPr>
-              <a:t>Sparse Feedback</a:t>
+              <a:t>Upskilling</a:t>
             </a:r>
             <a:endParaRPr b="0" lang="en-US" sz="3200" spc="-1" strike="noStrike">
               <a:latin typeface="Arial"/>
@@ -13427,14 +13877,14 @@
       </p:sp>
       <p:sp>
         <p:nvSpPr>
-          <p:cNvPr id="193" name=""/>
+          <p:cNvPr id="192" name=""/>
           <p:cNvSpPr/>
           <p:nvPr/>
         </p:nvSpPr>
         <p:spPr>
           <a:xfrm>
             <a:off x="457200" y="2057400"/>
-            <a:ext cx="4340520" cy="343440"/>
+            <a:ext cx="4340160" cy="343080"/>
           </a:xfrm>
           <a:prstGeom prst="rect">
             <a:avLst/>
@@ -13453,14 +13903,14 @@
       </p:sp>
       <p:sp>
         <p:nvSpPr>
-          <p:cNvPr id="194" name=""/>
+          <p:cNvPr id="193" name=""/>
           <p:cNvSpPr/>
           <p:nvPr/>
         </p:nvSpPr>
         <p:spPr>
           <a:xfrm>
             <a:off x="457200" y="1277640"/>
-            <a:ext cx="11428560" cy="3485880"/>
+            <a:ext cx="10512360" cy="3485520"/>
           </a:xfrm>
           <a:prstGeom prst="rect">
             <a:avLst/>
@@ -13495,7 +13945,7 @@
                 <a:latin typeface="Arial"/>
                 <a:ea typeface="DejaVu Sans"/>
               </a:rPr>
-              <a:t>Your mentor and sponsor should provide feedback on your work</a:t>
+              <a:t>Ideally, the project brings together skills you’ve learned in the program.</a:t>
             </a:r>
             <a:endParaRPr b="0" lang="en-US" sz="2400" spc="-1" strike="noStrike">
               <a:latin typeface="Arial"/>
@@ -13527,7 +13977,7 @@
                 <a:latin typeface="Arial"/>
                 <a:ea typeface="DejaVu Sans"/>
               </a:rPr>
-              <a:t>Q: What if feedback isn’t arriving often enough?</a:t>
+              <a:t>Q: What if I don’t have the skills to solve the problem?</a:t>
             </a:r>
             <a:endParaRPr b="0" lang="en-US" sz="2400" spc="-1" strike="noStrike">
               <a:latin typeface="Arial"/>
@@ -13559,7 +14009,7 @@
                 <a:latin typeface="Arial"/>
                 <a:ea typeface="DejaVu Sans"/>
               </a:rPr>
-              <a:t>You can try:</a:t>
+              <a:t>&gt; In some cases, you will need to learn new things</a:t>
             </a:r>
             <a:endParaRPr b="0" lang="en-US" sz="2400" spc="-1" strike="noStrike">
               <a:latin typeface="Arial"/>
@@ -13572,9 +14022,6 @@
               </a:lnSpc>
               <a:buNone/>
             </a:pPr>
-            <a:br>
-              <a:rPr sz="2400"/>
-            </a:br>
             <a:r>
               <a:rPr b="0" lang="en-US" sz="2400" spc="-1" strike="noStrike">
                 <a:solidFill>
@@ -13583,7 +14030,7 @@
                 <a:latin typeface="Arial"/>
                 <a:ea typeface="DejaVu Sans"/>
               </a:rPr>
-              <a:t>&gt; Checking if there is a better medium for feedback (email, meetings, …)</a:t>
+              <a:t>&gt; Your sponsor / mentor might be able to suggest resources</a:t>
             </a:r>
             <a:endParaRPr b="0" lang="en-US" sz="2400" spc="-1" strike="noStrike">
               <a:latin typeface="Arial"/>
@@ -13596,58 +14043,6 @@
               </a:lnSpc>
               <a:buNone/>
             </a:pPr>
-            <a:br>
-              <a:rPr sz="2400"/>
-            </a:br>
-            <a:r>
-              <a:rPr b="0" lang="en-US" sz="2400" spc="-1" strike="noStrike">
-                <a:solidFill>
-                  <a:srgbClr val="000000"/>
-                </a:solidFill>
-                <a:latin typeface="Arial"/>
-                <a:ea typeface="DejaVu Sans"/>
-              </a:rPr>
-              <a:t>&gt; Asking if there is a better way to share results</a:t>
-            </a:r>
-            <a:br>
-              <a:rPr sz="2400"/>
-            </a:br>
-            <a:r>
-              <a:rPr b="0" lang="en-US" sz="2400" spc="-1" strike="noStrike">
-                <a:solidFill>
-                  <a:srgbClr val="000000"/>
-                </a:solidFill>
-                <a:latin typeface="Arial"/>
-                <a:ea typeface="DejaVu Sans"/>
-              </a:rPr>
-              <a:t>   - Are questions clear enough?</a:t>
-            </a:r>
-            <a:br>
-              <a:rPr sz="2400"/>
-            </a:br>
-            <a:r>
-              <a:rPr b="0" lang="en-US" sz="2400" spc="-1" strike="noStrike">
-                <a:solidFill>
-                  <a:srgbClr val="000000"/>
-                </a:solidFill>
-                <a:latin typeface="Arial"/>
-                <a:ea typeface="DejaVu Sans"/>
-              </a:rPr>
-              <a:t>   - Are things summarized? </a:t>
-            </a:r>
-            <a:br>
-              <a:rPr sz="2400"/>
-            </a:br>
-            <a:r>
-              <a:rPr b="0" lang="en-US" sz="2400" spc="-1" strike="noStrike">
-                <a:solidFill>
-                  <a:srgbClr val="000000"/>
-                </a:solidFill>
-                <a:latin typeface="Arial"/>
-                <a:ea typeface="DejaVu Sans"/>
-              </a:rPr>
-              <a:t>    (e.g., assemble separate questions into single slide)</a:t>
-            </a:r>
             <a:endParaRPr b="0" lang="en-US" sz="2400" spc="-1" strike="noStrike">
               <a:latin typeface="Arial"/>
             </a:endParaRPr>
